--- a/Zontal/Zontal-ELN Signals Integration.pptx
+++ b/Zontal/Zontal-ELN Signals Integration.pptx
@@ -6,6 +6,17 @@
   </p:sldMasterIdLst>
   <p:sldIdLst>
     <p:sldId id="257" r:id="rId2"/>
+    <p:sldId id="258" r:id="rId3"/>
+    <p:sldId id="259" r:id="rId4"/>
+    <p:sldId id="260" r:id="rId5"/>
+    <p:sldId id="263" r:id="rId6"/>
+    <p:sldId id="265" r:id="rId7"/>
+    <p:sldId id="266" r:id="rId8"/>
+    <p:sldId id="268" r:id="rId9"/>
+    <p:sldId id="267" r:id="rId10"/>
+    <p:sldId id="270" r:id="rId11"/>
+    <p:sldId id="269" r:id="rId12"/>
+    <p:sldId id="271" r:id="rId13"/>
   </p:sldIdLst>
   <p:sldSz cx="12192000" cy="6858000"/>
   <p:notesSz cx="6858000" cy="9144000"/>
@@ -3342,31 +3353,296 @@
           <a:bodyPr/>
           <a:lstStyle/>
           <a:p>
+            <a:r>
+              <a:rPr lang="en-US" dirty="0"/>
+              <a:t>Get </a:t>
+            </a:r>
+            <a:r>
+              <a:rPr lang="en-US" dirty="0" err="1"/>
+              <a:t>Zontal</a:t>
+            </a:r>
+            <a:r>
+              <a:rPr lang="en-US" dirty="0"/>
+              <a:t> Access Token</a:t>
+            </a:r>
+          </a:p>
+        </p:txBody>
+      </p:sp>
+      <p:sp>
+        <p:nvSpPr>
+          <p:cNvPr id="3" name="Content Placeholder 2">
+            <a:extLst>
+              <a:ext uri="{FF2B5EF4-FFF2-40B4-BE49-F238E27FC236}">
+                <a16:creationId xmlns:a16="http://schemas.microsoft.com/office/drawing/2014/main" id="{068F038D-B165-BA8E-FF89-2521970577E2}"/>
+              </a:ext>
+            </a:extLst>
+          </p:cNvPr>
+          <p:cNvSpPr>
+            <a:spLocks noGrp="1"/>
+          </p:cNvSpPr>
+          <p:nvPr>
+            <p:ph idx="1"/>
+          </p:nvPr>
+        </p:nvSpPr>
+        <p:spPr/>
+        <p:txBody>
+          <a:bodyPr/>
+          <a:lstStyle/>
+          <a:p>
+            <a:pPr marL="0" indent="0">
+              <a:buNone/>
+            </a:pPr>
+            <a:r>
+              <a:rPr lang="en-US" dirty="0"/>
+              <a:t>Retrieve </a:t>
+            </a:r>
+            <a:r>
+              <a:rPr lang="en-US" dirty="0" err="1"/>
+              <a:t>zontal_access_token</a:t>
+            </a:r>
+            <a:r>
+              <a:rPr lang="en-US" dirty="0"/>
+              <a:t>:</a:t>
+            </a:r>
+            <a:br>
+              <a:rPr lang="en-US" dirty="0"/>
+            </a:br>
+            <a:r>
+              <a:rPr lang="en-US" dirty="0">
+                <a:latin typeface="Consolas" panose="020B0609020204030204" pitchFamily="49" charset="0"/>
+                <a:hlinkClick r:id="rId2"/>
+              </a:rPr>
+              <a:t>https://{{ZONTAL_HOST}}/auth/realms/zontal-space/protocol/openid-connect/token</a:t>
+            </a:r>
+            <a:br>
+              <a:rPr lang="en-US" dirty="0"/>
+            </a:br>
+            <a:endParaRPr lang="en-US" dirty="0"/>
+          </a:p>
+          <a:p>
+            <a:endParaRPr lang="en-US" dirty="0"/>
+          </a:p>
+        </p:txBody>
+      </p:sp>
+      <p:pic>
+        <p:nvPicPr>
+          <p:cNvPr id="5" name="Picture 4">
+            <a:extLst>
+              <a:ext uri="{FF2B5EF4-FFF2-40B4-BE49-F238E27FC236}">
+                <a16:creationId xmlns:a16="http://schemas.microsoft.com/office/drawing/2014/main" id="{2DAC98E3-161F-8F93-097E-11B11483B2E1}"/>
+              </a:ext>
+            </a:extLst>
+          </p:cNvPr>
+          <p:cNvPicPr>
+            <a:picLocks noChangeAspect="1"/>
+          </p:cNvPicPr>
+          <p:nvPr/>
+        </p:nvPicPr>
+        <p:blipFill>
+          <a:blip r:embed="rId3"/>
+          <a:stretch>
+            <a:fillRect/>
+          </a:stretch>
+        </p:blipFill>
+        <p:spPr>
+          <a:xfrm>
+            <a:off x="3323838" y="3157452"/>
+            <a:ext cx="2772162" cy="1228896"/>
+          </a:xfrm>
+          <a:prstGeom prst="rect">
+            <a:avLst/>
+          </a:prstGeom>
+        </p:spPr>
+      </p:pic>
+      <p:grpSp>
+        <p:nvGrpSpPr>
+          <p:cNvPr id="10" name="Group 9">
+            <a:extLst>
+              <a:ext uri="{FF2B5EF4-FFF2-40B4-BE49-F238E27FC236}">
+                <a16:creationId xmlns:a16="http://schemas.microsoft.com/office/drawing/2014/main" id="{77ADB351-C21E-FF03-6C80-906381B94431}"/>
+              </a:ext>
+            </a:extLst>
+          </p:cNvPr>
+          <p:cNvGrpSpPr/>
+          <p:nvPr/>
+        </p:nvGrpSpPr>
+        <p:grpSpPr>
+          <a:xfrm>
+            <a:off x="8476647" y="3022557"/>
+            <a:ext cx="2877153" cy="1498686"/>
+            <a:chOff x="7281459" y="3820293"/>
+            <a:chExt cx="2877153" cy="1498686"/>
+          </a:xfrm>
+        </p:grpSpPr>
+        <p:pic>
+          <p:nvPicPr>
+            <p:cNvPr id="7" name="Picture 6">
+              <a:extLst>
+                <a:ext uri="{FF2B5EF4-FFF2-40B4-BE49-F238E27FC236}">
+                  <a16:creationId xmlns:a16="http://schemas.microsoft.com/office/drawing/2014/main" id="{916DE36A-8B3B-CDB0-6770-B70C0444A1E1}"/>
+                </a:ext>
+              </a:extLst>
+            </p:cNvPr>
+            <p:cNvPicPr>
+              <a:picLocks noChangeAspect="1"/>
+            </p:cNvPicPr>
+            <p:nvPr/>
+          </p:nvPicPr>
+          <p:blipFill>
+            <a:blip r:embed="rId4"/>
+            <a:stretch>
+              <a:fillRect/>
+            </a:stretch>
+          </p:blipFill>
+          <p:spPr>
+            <a:xfrm>
+              <a:off x="7291187" y="4204398"/>
+              <a:ext cx="2867425" cy="1114581"/>
+            </a:xfrm>
+            <a:prstGeom prst="rect">
+              <a:avLst/>
+            </a:prstGeom>
+          </p:spPr>
+        </p:pic>
+        <p:pic>
+          <p:nvPicPr>
+            <p:cNvPr id="9" name="Picture 8">
+              <a:extLst>
+                <a:ext uri="{FF2B5EF4-FFF2-40B4-BE49-F238E27FC236}">
+                  <a16:creationId xmlns:a16="http://schemas.microsoft.com/office/drawing/2014/main" id="{EA73219C-0C93-7E79-0D4E-1A807283997E}"/>
+                </a:ext>
+              </a:extLst>
+            </p:cNvPr>
+            <p:cNvPicPr>
+              <a:picLocks noChangeAspect="1"/>
+            </p:cNvPicPr>
+            <p:nvPr/>
+          </p:nvPicPr>
+          <p:blipFill>
+            <a:blip r:embed="rId5"/>
+            <a:stretch>
+              <a:fillRect/>
+            </a:stretch>
+          </p:blipFill>
+          <p:spPr>
+            <a:xfrm>
+              <a:off x="7281459" y="3820293"/>
+              <a:ext cx="1695687" cy="362001"/>
+            </a:xfrm>
+            <a:prstGeom prst="rect">
+              <a:avLst/>
+            </a:prstGeom>
+          </p:spPr>
+        </p:pic>
+      </p:grpSp>
+      <p:sp>
+        <p:nvSpPr>
+          <p:cNvPr id="11" name="Arrow: Right 10">
+            <a:extLst>
+              <a:ext uri="{FF2B5EF4-FFF2-40B4-BE49-F238E27FC236}">
+                <a16:creationId xmlns:a16="http://schemas.microsoft.com/office/drawing/2014/main" id="{33EB7C8B-D423-011E-678E-7A5B6D308266}"/>
+              </a:ext>
+            </a:extLst>
+          </p:cNvPr>
+          <p:cNvSpPr/>
+          <p:nvPr/>
+        </p:nvSpPr>
+        <p:spPr>
+          <a:xfrm>
+            <a:off x="6912864" y="3479320"/>
+            <a:ext cx="978408" cy="484632"/>
+          </a:xfrm>
+          <a:prstGeom prst="rightArrow">
+            <a:avLst/>
+          </a:prstGeom>
+          <a:solidFill>
+            <a:srgbClr val="E97132">
+              <a:alpha val="25098"/>
+            </a:srgbClr>
+          </a:solidFill>
+          <a:ln>
+            <a:solidFill>
+              <a:schemeClr val="accent2"/>
+            </a:solidFill>
+          </a:ln>
+        </p:spPr>
+        <p:style>
+          <a:lnRef idx="2">
+            <a:schemeClr val="accent1">
+              <a:shade val="15000"/>
+            </a:schemeClr>
+          </a:lnRef>
+          <a:fillRef idx="1">
+            <a:schemeClr val="accent1"/>
+          </a:fillRef>
+          <a:effectRef idx="0">
+            <a:schemeClr val="accent1"/>
+          </a:effectRef>
+          <a:fontRef idx="minor">
+            <a:schemeClr val="lt1"/>
+          </a:fontRef>
+        </p:style>
+        <p:txBody>
+          <a:bodyPr rtlCol="0" anchor="ctr"/>
+          <a:lstStyle/>
+          <a:p>
+            <a:pPr algn="ctr"/>
             <a:endParaRPr lang="en-US"/>
           </a:p>
         </p:txBody>
       </p:sp>
       <p:sp>
         <p:nvSpPr>
-          <p:cNvPr id="3" name="Content Placeholder 2">
-            <a:extLst>
-              <a:ext uri="{FF2B5EF4-FFF2-40B4-BE49-F238E27FC236}">
-                <a16:creationId xmlns:a16="http://schemas.microsoft.com/office/drawing/2014/main" id="{068F038D-B165-BA8E-FF89-2521970577E2}"/>
-              </a:ext>
-            </a:extLst>
-          </p:cNvPr>
-          <p:cNvSpPr>
-            <a:spLocks noGrp="1"/>
-          </p:cNvSpPr>
-          <p:nvPr>
-            <p:ph idx="1"/>
-          </p:nvPr>
-        </p:nvSpPr>
-        <p:spPr/>
-        <p:txBody>
-          <a:bodyPr/>
-          <a:lstStyle/>
-          <a:p>
+          <p:cNvPr id="13" name="Rectangle: Rounded Corners 12">
+            <a:extLst>
+              <a:ext uri="{FF2B5EF4-FFF2-40B4-BE49-F238E27FC236}">
+                <a16:creationId xmlns:a16="http://schemas.microsoft.com/office/drawing/2014/main" id="{D873659C-429B-438D-BE55-1E476A9A6338}"/>
+              </a:ext>
+            </a:extLst>
+          </p:cNvPr>
+          <p:cNvSpPr/>
+          <p:nvPr/>
+        </p:nvSpPr>
+        <p:spPr>
+          <a:xfrm>
+            <a:off x="8994552" y="3228975"/>
+            <a:ext cx="1042416" cy="177687"/>
+          </a:xfrm>
+          <a:prstGeom prst="roundRect">
+            <a:avLst/>
+          </a:prstGeom>
+          <a:solidFill>
+            <a:srgbClr val="E97132">
+              <a:alpha val="25098"/>
+            </a:srgbClr>
+          </a:solidFill>
+          <a:ln>
+            <a:solidFill>
+              <a:schemeClr val="accent2"/>
+            </a:solidFill>
+          </a:ln>
+        </p:spPr>
+        <p:style>
+          <a:lnRef idx="2">
+            <a:schemeClr val="accent1">
+              <a:shade val="15000"/>
+            </a:schemeClr>
+          </a:lnRef>
+          <a:fillRef idx="1">
+            <a:schemeClr val="accent1"/>
+          </a:fillRef>
+          <a:effectRef idx="0">
+            <a:schemeClr val="accent1"/>
+          </a:effectRef>
+          <a:fontRef idx="minor">
+            <a:schemeClr val="lt1"/>
+          </a:fontRef>
+        </p:style>
+        <p:txBody>
+          <a:bodyPr rtlCol="0" anchor="ctr"/>
+          <a:lstStyle/>
+          <a:p>
+            <a:pPr algn="ctr"/>
             <a:endParaRPr lang="en-US"/>
           </a:p>
         </p:txBody>
@@ -3375,6 +3651,3953 @@
     <p:extLst>
       <p:ext uri="{BB962C8B-B14F-4D97-AF65-F5344CB8AC3E}">
         <p14:creationId xmlns:p14="http://schemas.microsoft.com/office/powerpoint/2010/main" val="3970195100"/>
+      </p:ext>
+    </p:extLst>
+  </p:cSld>
+  <p:clrMapOvr>
+    <a:masterClrMapping/>
+  </p:clrMapOvr>
+</p:sld>
+</file>
+
+<file path=ppt/slides/slide10.xml><?xml version="1.0" encoding="utf-8"?>
+<p:sld xmlns:a="http://schemas.openxmlformats.org/drawingml/2006/main" xmlns:r="http://schemas.openxmlformats.org/officeDocument/2006/relationships" xmlns:p="http://schemas.openxmlformats.org/presentationml/2006/main">
+  <p:cSld>
+    <p:spTree>
+      <p:nvGrpSpPr>
+        <p:cNvPr id="1" name=""/>
+        <p:cNvGrpSpPr/>
+        <p:nvPr/>
+      </p:nvGrpSpPr>
+      <p:grpSpPr>
+        <a:xfrm>
+          <a:off x="0" y="0"/>
+          <a:ext cx="0" cy="0"/>
+          <a:chOff x="0" y="0"/>
+          <a:chExt cx="0" cy="0"/>
+        </a:xfrm>
+      </p:grpSpPr>
+      <p:sp>
+        <p:nvSpPr>
+          <p:cNvPr id="10" name="Content Placeholder 9">
+            <a:extLst>
+              <a:ext uri="{FF2B5EF4-FFF2-40B4-BE49-F238E27FC236}">
+                <a16:creationId xmlns:a16="http://schemas.microsoft.com/office/drawing/2014/main" id="{1FE2BB29-D8FE-3929-834F-36FEB1C5A9B3}"/>
+              </a:ext>
+            </a:extLst>
+          </p:cNvPr>
+          <p:cNvSpPr>
+            <a:spLocks noGrp="1"/>
+          </p:cNvSpPr>
+          <p:nvPr>
+            <p:ph idx="1"/>
+          </p:nvPr>
+        </p:nvSpPr>
+        <p:spPr>
+          <a:xfrm>
+            <a:off x="838200" y="1438275"/>
+            <a:ext cx="10515600" cy="4738688"/>
+          </a:xfrm>
+        </p:spPr>
+        <p:txBody>
+          <a:bodyPr>
+            <a:normAutofit fontScale="92500" lnSpcReduction="20000"/>
+          </a:bodyPr>
+          <a:lstStyle/>
+          <a:p>
+            <a:pPr marL="0" indent="0">
+              <a:buNone/>
+            </a:pPr>
+            <a:r>
+              <a:rPr lang="en-US" dirty="0"/>
+              <a:t>Build a field catalog directly from an Allotrope ASM JSON Schema (e.g. </a:t>
+            </a:r>
+            <a:r>
+              <a:rPr lang="en-US" dirty="0" err="1"/>
+              <a:t>ftir.schema</a:t>
+            </a:r>
+            <a:r>
+              <a:rPr lang="en-US" dirty="0"/>
+              <a:t>), instead of from an actual measurement file.</a:t>
+            </a:r>
+          </a:p>
+          <a:p>
+            <a:pPr marL="0" indent="0">
+              <a:buNone/>
+            </a:pPr>
+            <a:r>
+              <a:rPr lang="en-US" dirty="0"/>
+              <a:t>It acts as template to join with an actual measurements file.</a:t>
+            </a:r>
+          </a:p>
+          <a:p>
+            <a:pPr marL="0" indent="0">
+              <a:buNone/>
+            </a:pPr>
+            <a:r>
+              <a:rPr lang="en-US" dirty="0"/>
+              <a:t>Units are known where the schema pins them via a "$</a:t>
+            </a:r>
+            <a:r>
+              <a:rPr lang="en-US" dirty="0" err="1"/>
+              <a:t>defs</a:t>
+            </a:r>
+            <a:r>
+              <a:rPr lang="en-US" dirty="0"/>
+              <a:t>/&lt;unit&gt;" $ref (quantity datum) or via a </a:t>
+            </a:r>
+            <a:r>
+              <a:rPr lang="en-US" dirty="0" err="1"/>
+              <a:t>datacube’s</a:t>
+            </a:r>
+            <a:r>
+              <a:rPr lang="en-US" dirty="0"/>
+              <a:t> cube-structure constants.</a:t>
+            </a:r>
+          </a:p>
+          <a:p>
+            <a:pPr marL="0" indent="0">
+              <a:buNone/>
+            </a:pPr>
+            <a:r>
+              <a:rPr lang="en-US" dirty="0"/>
+              <a:t>Recognized "$</a:t>
+            </a:r>
+            <a:r>
+              <a:rPr lang="en-US" dirty="0" err="1"/>
+              <a:t>asm.pattern</a:t>
+            </a:r>
+            <a:r>
+              <a:rPr lang="en-US" dirty="0"/>
+              <a:t>" values:</a:t>
+            </a:r>
+          </a:p>
+          <a:p>
+            <a:r>
+              <a:rPr lang="en-US" dirty="0"/>
+              <a:t>"aggregate datum": a container -&gt; recurse into its "properties".</a:t>
+            </a:r>
+          </a:p>
+          <a:p>
+            <a:r>
+              <a:rPr lang="en-US" dirty="0"/>
+              <a:t>"</a:t>
+            </a:r>
+            <a:r>
+              <a:rPr lang="en-US" b="1" dirty="0"/>
+              <a:t>quantity datum</a:t>
+            </a:r>
+            <a:r>
+              <a:rPr lang="en-US" dirty="0"/>
+              <a:t>": a {value, unit} leaf -&gt; unit taken from the </a:t>
+            </a:r>
+            <a:r>
+              <a:rPr lang="en-US" dirty="0" err="1"/>
+              <a:t>units.schema</a:t>
+            </a:r>
+            <a:r>
+              <a:rPr lang="en-US" dirty="0"/>
+              <a:t> $ref. </a:t>
+            </a:r>
+          </a:p>
+          <a:p>
+            <a:r>
+              <a:rPr lang="en-US" dirty="0"/>
+              <a:t>"</a:t>
+            </a:r>
+            <a:r>
+              <a:rPr lang="en-US" b="1" dirty="0"/>
+              <a:t>value datum</a:t>
+            </a:r>
+            <a:r>
+              <a:rPr lang="en-US" dirty="0"/>
+              <a:t>": a plain value leaf -&gt; unit is always null. </a:t>
+            </a:r>
+          </a:p>
+          <a:p>
+            <a:r>
+              <a:rPr lang="en-US" dirty="0"/>
+              <a:t>"</a:t>
+            </a:r>
+            <a:r>
+              <a:rPr lang="en-US" dirty="0" err="1"/>
+              <a:t>datacube</a:t>
+            </a:r>
+            <a:r>
+              <a:rPr lang="en-US" dirty="0"/>
+              <a:t>": an Allotrope data cube -&gt; described (dimensions/measures), not expanded.</a:t>
+            </a:r>
+          </a:p>
+          <a:p>
+            <a:pPr marL="0" indent="0">
+              <a:buNone/>
+            </a:pPr>
+            <a:endParaRPr lang="en-US" dirty="0"/>
+          </a:p>
+          <a:p>
+            <a:pPr marL="0" indent="0">
+              <a:buNone/>
+            </a:pPr>
+            <a:endParaRPr lang="en-US" dirty="0"/>
+          </a:p>
+          <a:p>
+            <a:pPr marL="0" indent="0">
+              <a:buNone/>
+            </a:pPr>
+            <a:endParaRPr lang="en-US" dirty="0"/>
+          </a:p>
+        </p:txBody>
+      </p:sp>
+      <p:sp>
+        <p:nvSpPr>
+          <p:cNvPr id="7" name="Title 1">
+            <a:extLst>
+              <a:ext uri="{FF2B5EF4-FFF2-40B4-BE49-F238E27FC236}">
+                <a16:creationId xmlns:a16="http://schemas.microsoft.com/office/drawing/2014/main" id="{D3CF684B-3FD1-F213-C18A-E38BA9FB8846}"/>
+              </a:ext>
+            </a:extLst>
+          </p:cNvPr>
+          <p:cNvSpPr>
+            <a:spLocks noGrp="1"/>
+          </p:cNvSpPr>
+          <p:nvPr>
+            <p:ph type="title"/>
+          </p:nvPr>
+        </p:nvSpPr>
+        <p:spPr>
+          <a:xfrm>
+            <a:off x="838200" y="365125"/>
+            <a:ext cx="10515600" cy="796925"/>
+          </a:xfrm>
+        </p:spPr>
+        <p:txBody>
+          <a:bodyPr>
+            <a:normAutofit/>
+          </a:bodyPr>
+          <a:lstStyle/>
+          <a:p>
+            <a:r>
+              <a:rPr lang="en-US" dirty="0"/>
+              <a:t>Transform Schema</a:t>
+            </a:r>
+          </a:p>
+        </p:txBody>
+      </p:sp>
+      <p:pic>
+        <p:nvPicPr>
+          <p:cNvPr id="3" name="Picture 2">
+            <a:extLst>
+              <a:ext uri="{FF2B5EF4-FFF2-40B4-BE49-F238E27FC236}">
+                <a16:creationId xmlns:a16="http://schemas.microsoft.com/office/drawing/2014/main" id="{F3FFC1E5-0220-4DDD-7FD1-ECB669B20FD7}"/>
+              </a:ext>
+            </a:extLst>
+          </p:cNvPr>
+          <p:cNvPicPr>
+            <a:picLocks noChangeAspect="1"/>
+          </p:cNvPicPr>
+          <p:nvPr/>
+        </p:nvPicPr>
+        <p:blipFill>
+          <a:blip r:embed="rId2"/>
+          <a:stretch>
+            <a:fillRect/>
+          </a:stretch>
+        </p:blipFill>
+        <p:spPr>
+          <a:xfrm>
+            <a:off x="8739011" y="5133076"/>
+            <a:ext cx="2524477" cy="752580"/>
+          </a:xfrm>
+          <a:prstGeom prst="rect">
+            <a:avLst/>
+          </a:prstGeom>
+        </p:spPr>
+      </p:pic>
+    </p:spTree>
+    <p:extLst>
+      <p:ext uri="{BB962C8B-B14F-4D97-AF65-F5344CB8AC3E}">
+        <p14:creationId xmlns:p14="http://schemas.microsoft.com/office/powerpoint/2010/main" val="2350607350"/>
+      </p:ext>
+    </p:extLst>
+  </p:cSld>
+  <p:clrMapOvr>
+    <a:masterClrMapping/>
+  </p:clrMapOvr>
+</p:sld>
+</file>
+
+<file path=ppt/slides/slide11.xml><?xml version="1.0" encoding="utf-8"?>
+<p:sld xmlns:a="http://schemas.openxmlformats.org/drawingml/2006/main" xmlns:r="http://schemas.openxmlformats.org/officeDocument/2006/relationships" xmlns:p="http://schemas.openxmlformats.org/presentationml/2006/main">
+  <p:cSld>
+    <p:spTree>
+      <p:nvGrpSpPr>
+        <p:cNvPr id="1" name=""/>
+        <p:cNvGrpSpPr/>
+        <p:nvPr/>
+      </p:nvGrpSpPr>
+      <p:grpSpPr>
+        <a:xfrm>
+          <a:off x="0" y="0"/>
+          <a:ext cx="0" cy="0"/>
+          <a:chOff x="0" y="0"/>
+          <a:chExt cx="0" cy="0"/>
+        </a:xfrm>
+      </p:grpSpPr>
+      <p:sp>
+        <p:nvSpPr>
+          <p:cNvPr id="2" name="Title 1">
+            <a:extLst>
+              <a:ext uri="{FF2B5EF4-FFF2-40B4-BE49-F238E27FC236}">
+                <a16:creationId xmlns:a16="http://schemas.microsoft.com/office/drawing/2014/main" id="{B1C38CD8-A0DD-9F0C-F3C2-6840F403B411}"/>
+              </a:ext>
+            </a:extLst>
+          </p:cNvPr>
+          <p:cNvSpPr>
+            <a:spLocks noGrp="1"/>
+          </p:cNvSpPr>
+          <p:nvPr>
+            <p:ph type="title"/>
+          </p:nvPr>
+        </p:nvSpPr>
+        <p:spPr/>
+        <p:txBody>
+          <a:bodyPr/>
+          <a:lstStyle/>
+          <a:p>
+            <a:r>
+              <a:rPr lang="en-US" dirty="0"/>
+              <a:t>Schema -&gt; Field Catalog</a:t>
+            </a:r>
+          </a:p>
+        </p:txBody>
+      </p:sp>
+      <p:sp>
+        <p:nvSpPr>
+          <p:cNvPr id="3" name="Content Placeholder 2">
+            <a:extLst>
+              <a:ext uri="{FF2B5EF4-FFF2-40B4-BE49-F238E27FC236}">
+                <a16:creationId xmlns:a16="http://schemas.microsoft.com/office/drawing/2014/main" id="{8272F957-7E66-E9E0-B43A-97978E47DB45}"/>
+              </a:ext>
+            </a:extLst>
+          </p:cNvPr>
+          <p:cNvSpPr>
+            <a:spLocks noGrp="1"/>
+          </p:cNvSpPr>
+          <p:nvPr>
+            <p:ph idx="1"/>
+          </p:nvPr>
+        </p:nvSpPr>
+        <p:spPr/>
+        <p:txBody>
+          <a:bodyPr/>
+          <a:lstStyle/>
+          <a:p>
+            <a:r>
+              <a:rPr lang="en-US" dirty="0"/>
+              <a:t>For each property with pattern “quantity datum” or “value datum”, add an entry to the field catalog:</a:t>
+            </a:r>
+          </a:p>
+          <a:p>
+            <a:pPr marL="0" indent="0">
+              <a:buNone/>
+            </a:pPr>
+            <a:endParaRPr lang="en-US" dirty="0"/>
+          </a:p>
+        </p:txBody>
+      </p:sp>
+      <p:pic>
+        <p:nvPicPr>
+          <p:cNvPr id="8" name="Picture 7">
+            <a:extLst>
+              <a:ext uri="{FF2B5EF4-FFF2-40B4-BE49-F238E27FC236}">
+                <a16:creationId xmlns:a16="http://schemas.microsoft.com/office/drawing/2014/main" id="{84510713-018F-ED24-B874-65C9BF3924AC}"/>
+              </a:ext>
+            </a:extLst>
+          </p:cNvPr>
+          <p:cNvPicPr>
+            <a:picLocks noChangeAspect="1"/>
+          </p:cNvPicPr>
+          <p:nvPr/>
+        </p:nvPicPr>
+        <p:blipFill>
+          <a:blip r:embed="rId2"/>
+          <a:stretch>
+            <a:fillRect/>
+          </a:stretch>
+        </p:blipFill>
+        <p:spPr>
+          <a:xfrm>
+            <a:off x="4781449" y="2728785"/>
+            <a:ext cx="1448002" cy="1819529"/>
+          </a:xfrm>
+          <a:prstGeom prst="rect">
+            <a:avLst/>
+          </a:prstGeom>
+        </p:spPr>
+      </p:pic>
+    </p:spTree>
+    <p:extLst>
+      <p:ext uri="{BB962C8B-B14F-4D97-AF65-F5344CB8AC3E}">
+        <p14:creationId xmlns:p14="http://schemas.microsoft.com/office/powerpoint/2010/main" val="3018401541"/>
+      </p:ext>
+    </p:extLst>
+  </p:cSld>
+  <p:clrMapOvr>
+    <a:masterClrMapping/>
+  </p:clrMapOvr>
+</p:sld>
+</file>
+
+<file path=ppt/slides/slide12.xml><?xml version="1.0" encoding="utf-8"?>
+<p:sld xmlns:a="http://schemas.openxmlformats.org/drawingml/2006/main" xmlns:r="http://schemas.openxmlformats.org/officeDocument/2006/relationships" xmlns:p="http://schemas.openxmlformats.org/presentationml/2006/main">
+  <p:cSld>
+    <p:spTree>
+      <p:nvGrpSpPr>
+        <p:cNvPr id="1" name=""/>
+        <p:cNvGrpSpPr/>
+        <p:nvPr/>
+      </p:nvGrpSpPr>
+      <p:grpSpPr>
+        <a:xfrm>
+          <a:off x="0" y="0"/>
+          <a:ext cx="0" cy="0"/>
+          <a:chOff x="0" y="0"/>
+          <a:chExt cx="0" cy="0"/>
+        </a:xfrm>
+      </p:grpSpPr>
+      <p:sp>
+        <p:nvSpPr>
+          <p:cNvPr id="2" name="Title 1">
+            <a:extLst>
+              <a:ext uri="{FF2B5EF4-FFF2-40B4-BE49-F238E27FC236}">
+                <a16:creationId xmlns:a16="http://schemas.microsoft.com/office/drawing/2014/main" id="{B1C38CD8-A0DD-9F0C-F3C2-6840F403B411}"/>
+              </a:ext>
+            </a:extLst>
+          </p:cNvPr>
+          <p:cNvSpPr>
+            <a:spLocks noGrp="1"/>
+          </p:cNvSpPr>
+          <p:nvPr>
+            <p:ph type="title"/>
+          </p:nvPr>
+        </p:nvSpPr>
+        <p:spPr/>
+        <p:txBody>
+          <a:bodyPr/>
+          <a:lstStyle/>
+          <a:p>
+            <a:r>
+              <a:rPr lang="en-US" dirty="0"/>
+              <a:t>Schema -&gt; Field Catalog: Examples</a:t>
+            </a:r>
+          </a:p>
+        </p:txBody>
+      </p:sp>
+      <p:sp>
+        <p:nvSpPr>
+          <p:cNvPr id="3" name="Content Placeholder 2">
+            <a:extLst>
+              <a:ext uri="{FF2B5EF4-FFF2-40B4-BE49-F238E27FC236}">
+                <a16:creationId xmlns:a16="http://schemas.microsoft.com/office/drawing/2014/main" id="{8272F957-7E66-E9E0-B43A-97978E47DB45}"/>
+              </a:ext>
+            </a:extLst>
+          </p:cNvPr>
+          <p:cNvSpPr>
+            <a:spLocks noGrp="1"/>
+          </p:cNvSpPr>
+          <p:nvPr>
+            <p:ph idx="1"/>
+          </p:nvPr>
+        </p:nvSpPr>
+        <p:spPr/>
+        <p:txBody>
+          <a:bodyPr/>
+          <a:lstStyle/>
+          <a:p>
+            <a:endParaRPr lang="en-US" dirty="0"/>
+          </a:p>
+          <a:p>
+            <a:pPr marL="0" indent="0">
+              <a:buNone/>
+            </a:pPr>
+            <a:endParaRPr lang="en-US" dirty="0"/>
+          </a:p>
+        </p:txBody>
+      </p:sp>
+      <p:graphicFrame>
+        <p:nvGraphicFramePr>
+          <p:cNvPr id="4" name="Object 3">
+            <a:extLst>
+              <a:ext uri="{FF2B5EF4-FFF2-40B4-BE49-F238E27FC236}">
+                <a16:creationId xmlns:a16="http://schemas.microsoft.com/office/drawing/2014/main" id="{3E80710E-AE83-D519-2A42-B2776CBE2289}"/>
+              </a:ext>
+            </a:extLst>
+          </p:cNvPr>
+          <p:cNvGraphicFramePr>
+            <a:graphicFrameLocks noChangeAspect="1"/>
+          </p:cNvGraphicFramePr>
+          <p:nvPr>
+            <p:extLst>
+              <p:ext uri="{D42A27DB-BD31-4B8C-83A1-F6EECF244321}">
+                <p14:modId xmlns:p14="http://schemas.microsoft.com/office/powerpoint/2010/main" val="725438730"/>
+              </p:ext>
+            </p:extLst>
+          </p:nvPr>
+        </p:nvGraphicFramePr>
+        <p:xfrm>
+          <a:off x="9832975" y="770731"/>
+          <a:ext cx="1647825" cy="514350"/>
+        </p:xfrm>
+        <a:graphic>
+          <a:graphicData uri="http://schemas.openxmlformats.org/presentationml/2006/ole">
+            <mc:AlternateContent xmlns:mc="http://schemas.openxmlformats.org/markup-compatibility/2006">
+              <mc:Choice xmlns:v="urn:schemas-microsoft-com:vml" Requires="v">
+                <p:oleObj name="Packager Shell Object" showAsIcon="1" r:id="rId2" imgW="1647743" imgH="514350" progId="Package">
+                  <p:embed/>
+                </p:oleObj>
+              </mc:Choice>
+              <mc:Fallback>
+                <p:oleObj name="Packager Shell Object" showAsIcon="1" r:id="rId2" imgW="1647743" imgH="514350" progId="Package">
+                  <p:embed/>
+                  <p:pic>
+                    <p:nvPicPr>
+                      <p:cNvPr id="0" name=""/>
+                      <p:cNvPicPr/>
+                      <p:nvPr/>
+                    </p:nvPicPr>
+                    <p:blipFill>
+                      <a:blip r:embed="rId3"/>
+                      <a:stretch>
+                        <a:fillRect/>
+                      </a:stretch>
+                    </p:blipFill>
+                    <p:spPr>
+                      <a:xfrm>
+                        <a:off x="9832975" y="770731"/>
+                        <a:ext cx="1647825" cy="514350"/>
+                      </a:xfrm>
+                      <a:prstGeom prst="rect">
+                        <a:avLst/>
+                      </a:prstGeom>
+                    </p:spPr>
+                  </p:pic>
+                </p:oleObj>
+              </mc:Fallback>
+            </mc:AlternateContent>
+          </a:graphicData>
+        </a:graphic>
+      </p:graphicFrame>
+      <p:pic>
+        <p:nvPicPr>
+          <p:cNvPr id="7" name="Picture 6">
+            <a:extLst>
+              <a:ext uri="{FF2B5EF4-FFF2-40B4-BE49-F238E27FC236}">
+                <a16:creationId xmlns:a16="http://schemas.microsoft.com/office/drawing/2014/main" id="{568D9790-6E38-1A6F-B661-C0668ACC9517}"/>
+              </a:ext>
+            </a:extLst>
+          </p:cNvPr>
+          <p:cNvPicPr>
+            <a:picLocks noChangeAspect="1"/>
+          </p:cNvPicPr>
+          <p:nvPr/>
+        </p:nvPicPr>
+        <p:blipFill>
+          <a:blip r:embed="rId4"/>
+          <a:stretch>
+            <a:fillRect/>
+          </a:stretch>
+        </p:blipFill>
+        <p:spPr>
+          <a:xfrm>
+            <a:off x="742203" y="1457764"/>
+            <a:ext cx="5353797" cy="2543530"/>
+          </a:xfrm>
+          <a:prstGeom prst="rect">
+            <a:avLst/>
+          </a:prstGeom>
+        </p:spPr>
+      </p:pic>
+    </p:spTree>
+    <p:extLst>
+      <p:ext uri="{BB962C8B-B14F-4D97-AF65-F5344CB8AC3E}">
+        <p14:creationId xmlns:p14="http://schemas.microsoft.com/office/powerpoint/2010/main" val="2885429117"/>
+      </p:ext>
+    </p:extLst>
+  </p:cSld>
+  <p:clrMapOvr>
+    <a:masterClrMapping/>
+  </p:clrMapOvr>
+</p:sld>
+</file>
+
+<file path=ppt/slides/slide2.xml><?xml version="1.0" encoding="utf-8"?>
+<p:sld xmlns:a="http://schemas.openxmlformats.org/drawingml/2006/main" xmlns:r="http://schemas.openxmlformats.org/officeDocument/2006/relationships" xmlns:p="http://schemas.openxmlformats.org/presentationml/2006/main">
+  <p:cSld>
+    <p:spTree>
+      <p:nvGrpSpPr>
+        <p:cNvPr id="1" name=""/>
+        <p:cNvGrpSpPr/>
+        <p:nvPr/>
+      </p:nvGrpSpPr>
+      <p:grpSpPr>
+        <a:xfrm>
+          <a:off x="0" y="0"/>
+          <a:ext cx="0" cy="0"/>
+          <a:chOff x="0" y="0"/>
+          <a:chExt cx="0" cy="0"/>
+        </a:xfrm>
+      </p:grpSpPr>
+      <p:sp>
+        <p:nvSpPr>
+          <p:cNvPr id="2" name="Title 1">
+            <a:extLst>
+              <a:ext uri="{FF2B5EF4-FFF2-40B4-BE49-F238E27FC236}">
+                <a16:creationId xmlns:a16="http://schemas.microsoft.com/office/drawing/2014/main" id="{9085F222-BA8A-BDD8-61E9-F6312D8AD2AE}"/>
+              </a:ext>
+            </a:extLst>
+          </p:cNvPr>
+          <p:cNvSpPr>
+            <a:spLocks noGrp="1"/>
+          </p:cNvSpPr>
+          <p:nvPr>
+            <p:ph type="title"/>
+          </p:nvPr>
+        </p:nvSpPr>
+        <p:spPr/>
+        <p:txBody>
+          <a:bodyPr/>
+          <a:lstStyle/>
+          <a:p>
+            <a:r>
+              <a:rPr lang="en-US" dirty="0"/>
+              <a:t>Query Information Packages on </a:t>
+            </a:r>
+            <a:r>
+              <a:rPr lang="en-US" dirty="0" err="1"/>
+              <a:t>Zontal</a:t>
+            </a:r>
+            <a:endParaRPr lang="en-US" dirty="0"/>
+          </a:p>
+        </p:txBody>
+      </p:sp>
+      <p:sp>
+        <p:nvSpPr>
+          <p:cNvPr id="3" name="Content Placeholder 2">
+            <a:extLst>
+              <a:ext uri="{FF2B5EF4-FFF2-40B4-BE49-F238E27FC236}">
+                <a16:creationId xmlns:a16="http://schemas.microsoft.com/office/drawing/2014/main" id="{DD6116D5-D257-1A80-135D-06D10BD40169}"/>
+              </a:ext>
+            </a:extLst>
+          </p:cNvPr>
+          <p:cNvSpPr>
+            <a:spLocks noGrp="1"/>
+          </p:cNvSpPr>
+          <p:nvPr>
+            <p:ph idx="1"/>
+          </p:nvPr>
+        </p:nvSpPr>
+        <p:spPr>
+          <a:xfrm>
+            <a:off x="838200" y="1825625"/>
+            <a:ext cx="8104632" cy="4351338"/>
+          </a:xfrm>
+        </p:spPr>
+        <p:txBody>
+          <a:bodyPr>
+            <a:normAutofit fontScale="77500" lnSpcReduction="20000"/>
+          </a:bodyPr>
+          <a:lstStyle/>
+          <a:p>
+            <a:pPr marL="0" indent="0">
+              <a:buNone/>
+            </a:pPr>
+            <a:r>
+              <a:rPr lang="en-US" dirty="0"/>
+              <a:t>https://{{ZONTAL_HOST}}/api/search/informationPackages/</a:t>
+            </a:r>
+          </a:p>
+          <a:p>
+            <a:r>
+              <a:rPr lang="en-US" dirty="0"/>
+              <a:t>1 or more sample names:</a:t>
+            </a:r>
+          </a:p>
+          <a:p>
+            <a:pPr marL="0" indent="0">
+              <a:buNone/>
+            </a:pPr>
+            <a:r>
+              <a:rPr lang="en-US" dirty="0">
+                <a:latin typeface="Consolas" panose="020B0609020204030204" pitchFamily="49" charset="0"/>
+              </a:rPr>
+              <a:t>"filter": [</a:t>
+            </a:r>
+          </a:p>
+          <a:p>
+            <a:pPr marL="0" indent="0">
+              <a:buNone/>
+            </a:pPr>
+            <a:r>
+              <a:rPr lang="en-US" dirty="0">
+                <a:latin typeface="Consolas" panose="020B0609020204030204" pitchFamily="49" charset="0"/>
+              </a:rPr>
+              <a:t>    {</a:t>
+            </a:r>
+          </a:p>
+          <a:p>
+            <a:pPr marL="0" indent="0">
+              <a:buNone/>
+            </a:pPr>
+            <a:r>
+              <a:rPr lang="en-US" dirty="0">
+                <a:latin typeface="Consolas" panose="020B0609020204030204" pitchFamily="49" charset="0"/>
+              </a:rPr>
+              <a:t>      "</a:t>
+            </a:r>
+            <a:r>
+              <a:rPr lang="en-US" dirty="0" err="1">
+                <a:latin typeface="Consolas" panose="020B0609020204030204" pitchFamily="49" charset="0"/>
+              </a:rPr>
+              <a:t>propertyName</a:t>
+            </a:r>
+            <a:r>
+              <a:rPr lang="en-US" dirty="0">
+                <a:latin typeface="Consolas" panose="020B0609020204030204" pitchFamily="49" charset="0"/>
+              </a:rPr>
+              <a:t>": "</a:t>
+            </a:r>
+            <a:r>
+              <a:rPr lang="en-US" dirty="0" err="1">
+                <a:latin typeface="Consolas" panose="020B0609020204030204" pitchFamily="49" charset="0"/>
+              </a:rPr>
+              <a:t>sampleName</a:t>
+            </a:r>
+            <a:r>
+              <a:rPr lang="en-US" dirty="0">
+                <a:latin typeface="Consolas" panose="020B0609020204030204" pitchFamily="49" charset="0"/>
+              </a:rPr>
+              <a:t>",</a:t>
+            </a:r>
+          </a:p>
+          <a:p>
+            <a:pPr marL="0" indent="0">
+              <a:buNone/>
+            </a:pPr>
+            <a:r>
+              <a:rPr lang="en-US" dirty="0">
+                <a:latin typeface="Consolas" panose="020B0609020204030204" pitchFamily="49" charset="0"/>
+              </a:rPr>
+              <a:t>      "value": </a:t>
+            </a:r>
+            <a:r>
+              <a:rPr lang="en-US" b="1" dirty="0">
+                <a:latin typeface="Consolas" panose="020B0609020204030204" pitchFamily="49" charset="0"/>
+              </a:rPr>
+              <a:t>[</a:t>
+            </a:r>
+          </a:p>
+          <a:p>
+            <a:pPr marL="0" indent="0">
+              <a:buNone/>
+            </a:pPr>
+            <a:r>
+              <a:rPr lang="en-US" dirty="0">
+                <a:latin typeface="Consolas" panose="020B0609020204030204" pitchFamily="49" charset="0"/>
+              </a:rPr>
+              <a:t>        "QAS4001","QAS3001-b","QAS4001: TI_5599638"</a:t>
+            </a:r>
+          </a:p>
+          <a:p>
+            <a:pPr marL="0" indent="0">
+              <a:buNone/>
+            </a:pPr>
+            <a:r>
+              <a:rPr lang="en-US" dirty="0">
+                <a:latin typeface="Consolas" panose="020B0609020204030204" pitchFamily="49" charset="0"/>
+              </a:rPr>
+              <a:t>      </a:t>
+            </a:r>
+            <a:r>
+              <a:rPr lang="en-US" b="1" dirty="0">
+                <a:latin typeface="Consolas" panose="020B0609020204030204" pitchFamily="49" charset="0"/>
+              </a:rPr>
+              <a:t>]</a:t>
+            </a:r>
+            <a:r>
+              <a:rPr lang="en-US" dirty="0">
+                <a:latin typeface="Consolas" panose="020B0609020204030204" pitchFamily="49" charset="0"/>
+              </a:rPr>
+              <a:t>,</a:t>
+            </a:r>
+          </a:p>
+          <a:p>
+            <a:pPr marL="0" indent="0">
+              <a:buNone/>
+            </a:pPr>
+            <a:r>
+              <a:rPr lang="en-US" dirty="0">
+                <a:latin typeface="Consolas" panose="020B0609020204030204" pitchFamily="49" charset="0"/>
+              </a:rPr>
+              <a:t>      "</a:t>
+            </a:r>
+            <a:r>
+              <a:rPr lang="en-US" dirty="0" err="1">
+                <a:latin typeface="Consolas" panose="020B0609020204030204" pitchFamily="49" charset="0"/>
+              </a:rPr>
+              <a:t>filterType</a:t>
+            </a:r>
+            <a:r>
+              <a:rPr lang="en-US" dirty="0">
+                <a:latin typeface="Consolas" panose="020B0609020204030204" pitchFamily="49" charset="0"/>
+              </a:rPr>
+              <a:t>": "prefix",</a:t>
+            </a:r>
+          </a:p>
+          <a:p>
+            <a:pPr marL="0" indent="0">
+              <a:buNone/>
+            </a:pPr>
+            <a:r>
+              <a:rPr lang="en-US" dirty="0">
+                <a:latin typeface="Consolas" panose="020B0609020204030204" pitchFamily="49" charset="0"/>
+              </a:rPr>
+              <a:t>      "</a:t>
+            </a:r>
+            <a:r>
+              <a:rPr lang="en-US" dirty="0" err="1">
+                <a:latin typeface="Consolas" panose="020B0609020204030204" pitchFamily="49" charset="0"/>
+              </a:rPr>
+              <a:t>caseInsensitive</a:t>
+            </a:r>
+            <a:r>
+              <a:rPr lang="en-US" dirty="0">
+                <a:latin typeface="Consolas" panose="020B0609020204030204" pitchFamily="49" charset="0"/>
+              </a:rPr>
+              <a:t>": true</a:t>
+            </a:r>
+          </a:p>
+          <a:p>
+            <a:pPr marL="0" indent="0">
+              <a:buNone/>
+            </a:pPr>
+            <a:r>
+              <a:rPr lang="en-US" dirty="0">
+                <a:latin typeface="Consolas" panose="020B0609020204030204" pitchFamily="49" charset="0"/>
+              </a:rPr>
+              <a:t>    }</a:t>
+            </a:r>
+          </a:p>
+          <a:p>
+            <a:pPr marL="0" indent="0">
+              <a:buNone/>
+            </a:pPr>
+            <a:r>
+              <a:rPr lang="en-US" dirty="0">
+                <a:latin typeface="Consolas" panose="020B0609020204030204" pitchFamily="49" charset="0"/>
+              </a:rPr>
+              <a:t>  ]</a:t>
+            </a:r>
+          </a:p>
+        </p:txBody>
+      </p:sp>
+      <p:sp>
+        <p:nvSpPr>
+          <p:cNvPr id="5" name="Rectangle: Rounded Corners 4">
+            <a:extLst>
+              <a:ext uri="{FF2B5EF4-FFF2-40B4-BE49-F238E27FC236}">
+                <a16:creationId xmlns:a16="http://schemas.microsoft.com/office/drawing/2014/main" id="{512484A3-704D-4DCA-3D8B-144363E7FB21}"/>
+              </a:ext>
+            </a:extLst>
+          </p:cNvPr>
+          <p:cNvSpPr/>
+          <p:nvPr/>
+        </p:nvSpPr>
+        <p:spPr>
+          <a:xfrm>
+            <a:off x="1847088" y="4672584"/>
+            <a:ext cx="2020824" cy="393192"/>
+          </a:xfrm>
+          <a:prstGeom prst="roundRect">
+            <a:avLst/>
+          </a:prstGeom>
+          <a:solidFill>
+            <a:srgbClr val="E97132">
+              <a:alpha val="25098"/>
+            </a:srgbClr>
+          </a:solidFill>
+          <a:ln>
+            <a:solidFill>
+              <a:schemeClr val="accent2"/>
+            </a:solidFill>
+          </a:ln>
+        </p:spPr>
+        <p:style>
+          <a:lnRef idx="2">
+            <a:schemeClr val="accent1">
+              <a:shade val="15000"/>
+            </a:schemeClr>
+          </a:lnRef>
+          <a:fillRef idx="1">
+            <a:schemeClr val="accent1"/>
+          </a:fillRef>
+          <a:effectRef idx="0">
+            <a:schemeClr val="accent1"/>
+          </a:effectRef>
+          <a:fontRef idx="minor">
+            <a:schemeClr val="lt1"/>
+          </a:fontRef>
+        </p:style>
+        <p:txBody>
+          <a:bodyPr rtlCol="0" anchor="ctr"/>
+          <a:lstStyle/>
+          <a:p>
+            <a:pPr algn="ctr"/>
+            <a:endParaRPr lang="en-US"/>
+          </a:p>
+        </p:txBody>
+      </p:sp>
+    </p:spTree>
+    <p:extLst>
+      <p:ext uri="{BB962C8B-B14F-4D97-AF65-F5344CB8AC3E}">
+        <p14:creationId xmlns:p14="http://schemas.microsoft.com/office/powerpoint/2010/main" val="1060949372"/>
+      </p:ext>
+    </p:extLst>
+  </p:cSld>
+  <p:clrMapOvr>
+    <a:masterClrMapping/>
+  </p:clrMapOvr>
+</p:sld>
+</file>
+
+<file path=ppt/slides/slide3.xml><?xml version="1.0" encoding="utf-8"?>
+<p:sld xmlns:a="http://schemas.openxmlformats.org/drawingml/2006/main" xmlns:r="http://schemas.openxmlformats.org/officeDocument/2006/relationships" xmlns:p="http://schemas.openxmlformats.org/presentationml/2006/main">
+  <p:cSld>
+    <p:spTree>
+      <p:nvGrpSpPr>
+        <p:cNvPr id="1" name=""/>
+        <p:cNvGrpSpPr/>
+        <p:nvPr/>
+      </p:nvGrpSpPr>
+      <p:grpSpPr>
+        <a:xfrm>
+          <a:off x="0" y="0"/>
+          <a:ext cx="0" cy="0"/>
+          <a:chOff x="0" y="0"/>
+          <a:chExt cx="0" cy="0"/>
+        </a:xfrm>
+      </p:grpSpPr>
+      <p:sp>
+        <p:nvSpPr>
+          <p:cNvPr id="8" name="TextBox 7">
+            <a:extLst>
+              <a:ext uri="{FF2B5EF4-FFF2-40B4-BE49-F238E27FC236}">
+                <a16:creationId xmlns:a16="http://schemas.microsoft.com/office/drawing/2014/main" id="{C70598E1-74B6-95A4-EEDF-FECB1CA81A52}"/>
+              </a:ext>
+            </a:extLst>
+          </p:cNvPr>
+          <p:cNvSpPr txBox="1"/>
+          <p:nvPr/>
+        </p:nvSpPr>
+        <p:spPr>
+          <a:xfrm>
+            <a:off x="285188" y="871701"/>
+            <a:ext cx="11621623" cy="6186309"/>
+          </a:xfrm>
+          <a:prstGeom prst="rect">
+            <a:avLst/>
+          </a:prstGeom>
+          <a:noFill/>
+        </p:spPr>
+        <p:txBody>
+          <a:bodyPr wrap="square" rtlCol="0">
+            <a:spAutoFit/>
+          </a:bodyPr>
+          <a:lstStyle/>
+          <a:p>
+            <a:r>
+              <a:rPr lang="en-US" b="1" dirty="0"/>
+              <a:t>1. "range"</a:t>
+            </a:r>
+            <a:endParaRPr lang="en-US" dirty="0"/>
+          </a:p>
+          <a:p>
+            <a:r>
+              <a:rPr lang="en-US" dirty="0"/>
+              <a:t>Used to filter numeric values, timestamps, or date ranges. It typically requires defining bounding criteria such as:</a:t>
+            </a:r>
+          </a:p>
+          <a:p>
+            <a:pPr marL="285750" lvl="0" indent="-285750">
+              <a:buFont typeface="Arial" panose="020B0604020202020204" pitchFamily="34" charset="0"/>
+              <a:buChar char="•"/>
+            </a:pPr>
+            <a:r>
+              <a:rPr lang="en-US" dirty="0" err="1"/>
+              <a:t>gte</a:t>
+            </a:r>
+            <a:r>
+              <a:rPr lang="en-US" dirty="0"/>
+              <a:t> (Greater than or equal to)</a:t>
+            </a:r>
+          </a:p>
+          <a:p>
+            <a:pPr marL="285750" lvl="0" indent="-285750">
+              <a:buFont typeface="Arial" panose="020B0604020202020204" pitchFamily="34" charset="0"/>
+              <a:buChar char="•"/>
+            </a:pPr>
+            <a:r>
+              <a:rPr lang="en-US" dirty="0" err="1"/>
+              <a:t>lte</a:t>
+            </a:r>
+            <a:r>
+              <a:rPr lang="en-US" dirty="0"/>
+              <a:t> (Less than or equal to)</a:t>
+            </a:r>
+          </a:p>
+          <a:p>
+            <a:pPr marL="285750" lvl="0" indent="-285750">
+              <a:buFont typeface="Arial" panose="020B0604020202020204" pitchFamily="34" charset="0"/>
+              <a:buChar char="•"/>
+            </a:pPr>
+            <a:r>
+              <a:rPr lang="en-US" dirty="0" err="1"/>
+              <a:t>gt</a:t>
+            </a:r>
+            <a:r>
+              <a:rPr lang="en-US" dirty="0"/>
+              <a:t> (Greater than)</a:t>
+            </a:r>
+          </a:p>
+          <a:p>
+            <a:pPr marL="285750" lvl="0" indent="-285750">
+              <a:buFont typeface="Arial" panose="020B0604020202020204" pitchFamily="34" charset="0"/>
+              <a:buChar char="•"/>
+            </a:pPr>
+            <a:r>
+              <a:rPr lang="en-US" dirty="0" err="1"/>
+              <a:t>lt</a:t>
+            </a:r>
+            <a:r>
+              <a:rPr lang="en-US" dirty="0"/>
+              <a:t> (Less than)</a:t>
+            </a:r>
+          </a:p>
+          <a:p>
+            <a:r>
+              <a:rPr lang="en-US" b="1" dirty="0"/>
+              <a:t>2. "term"</a:t>
+            </a:r>
+            <a:endParaRPr lang="en-US" dirty="0"/>
+          </a:p>
+          <a:p>
+            <a:r>
+              <a:rPr lang="en-US" dirty="0"/>
+              <a:t>Distinct from "terms", this filters by a single, exact matching value instead of an array of multiple potential matching terms. It prevents tokenization or text-splitting and is commonly used for exact ID or exact flag matching.</a:t>
+            </a:r>
+          </a:p>
+          <a:p>
+            <a:r>
+              <a:rPr lang="en-US" b="1" dirty="0"/>
+              <a:t>3. "prefix"</a:t>
+            </a:r>
+            <a:endParaRPr lang="en-US" dirty="0"/>
+          </a:p>
+          <a:p>
+            <a:r>
+              <a:rPr lang="en-US" dirty="0"/>
+              <a:t>Matches documents that contain a specific field starting with the exact characters provided. For example, applying a prefix filter of </a:t>
+            </a:r>
+            <a:r>
+              <a:rPr lang="en-US" i="1" dirty="0"/>
+              <a:t>ana</a:t>
+            </a:r>
+            <a:r>
+              <a:rPr lang="en-US" dirty="0"/>
+              <a:t> might return items starting with </a:t>
+            </a:r>
+            <a:r>
+              <a:rPr lang="en-US" i="1" dirty="0"/>
+              <a:t>analysis</a:t>
+            </a:r>
+            <a:r>
+              <a:rPr lang="en-US" dirty="0"/>
+              <a:t>.</a:t>
+            </a:r>
+          </a:p>
+          <a:p>
+            <a:r>
+              <a:rPr lang="en-US" b="1" dirty="0"/>
+              <a:t>4. "wildcard"</a:t>
+            </a:r>
+            <a:endParaRPr lang="en-US" dirty="0"/>
+          </a:p>
+          <a:p>
+            <a:r>
+              <a:rPr lang="en-US" dirty="0"/>
+              <a:t>Allows matching based on pattern constraints. It supports standard operators like * (matches zero or more characters) and ? (matches a single character).</a:t>
+            </a:r>
+          </a:p>
+          <a:p>
+            <a:r>
+              <a:rPr lang="en-US" b="1" dirty="0"/>
+              <a:t>5. "exists"</a:t>
+            </a:r>
+            <a:endParaRPr lang="en-US" dirty="0"/>
+          </a:p>
+          <a:p>
+            <a:r>
+              <a:rPr lang="en-US" dirty="0"/>
+              <a:t>Filters data based on whether a particular field contains any valid value or is missing completely. It typically accepts a </a:t>
+            </a:r>
+            <a:r>
+              <a:rPr lang="en-US" dirty="0" err="1"/>
+              <a:t>boolean</a:t>
+            </a:r>
+            <a:r>
+              <a:rPr lang="en-US" dirty="0"/>
+              <a:t> flag or operates as a standalone check to find entries where a specific metadata attribute is non-null.</a:t>
+            </a:r>
+          </a:p>
+          <a:p>
+            <a:r>
+              <a:rPr lang="en-US" b="1" dirty="0"/>
+              <a:t>6. "match"</a:t>
+            </a:r>
+            <a:endParaRPr lang="en-US" dirty="0"/>
+          </a:p>
+          <a:p>
+            <a:r>
+              <a:rPr lang="en-US" dirty="0"/>
+              <a:t>Used for standard full-text search filtering. Unlike exact match options like term, "match" will analyze the input text (such as stripping punctuation, lowercasing, or splitting into keywords) to look for similarities.</a:t>
+            </a:r>
+          </a:p>
+          <a:p>
+            <a:endParaRPr lang="en-US" dirty="0"/>
+          </a:p>
+        </p:txBody>
+      </p:sp>
+      <p:grpSp>
+        <p:nvGrpSpPr>
+          <p:cNvPr id="15" name="Group 14">
+            <a:extLst>
+              <a:ext uri="{FF2B5EF4-FFF2-40B4-BE49-F238E27FC236}">
+                <a16:creationId xmlns:a16="http://schemas.microsoft.com/office/drawing/2014/main" id="{3F3217FA-1D34-DA95-3EB0-897F0CA1B2E4}"/>
+              </a:ext>
+            </a:extLst>
+          </p:cNvPr>
+          <p:cNvGrpSpPr/>
+          <p:nvPr/>
+        </p:nvGrpSpPr>
+        <p:grpSpPr>
+          <a:xfrm>
+            <a:off x="285187" y="348481"/>
+            <a:ext cx="2907955" cy="523220"/>
+            <a:chOff x="285187" y="348481"/>
+            <a:chExt cx="2907955" cy="523220"/>
+          </a:xfrm>
+        </p:grpSpPr>
+        <p:sp>
+          <p:nvSpPr>
+            <p:cNvPr id="12" name="Rectangle: Rounded Corners 11">
+              <a:extLst>
+                <a:ext uri="{FF2B5EF4-FFF2-40B4-BE49-F238E27FC236}">
+                  <a16:creationId xmlns:a16="http://schemas.microsoft.com/office/drawing/2014/main" id="{3B9615E6-C509-EDB4-B880-C2DBD21007B5}"/>
+                </a:ext>
+              </a:extLst>
+            </p:cNvPr>
+            <p:cNvSpPr/>
+            <p:nvPr/>
+          </p:nvSpPr>
+          <p:spPr>
+            <a:xfrm>
+              <a:off x="332014" y="413495"/>
+              <a:ext cx="2640132" cy="393192"/>
+            </a:xfrm>
+            <a:prstGeom prst="roundRect">
+              <a:avLst/>
+            </a:prstGeom>
+            <a:solidFill>
+              <a:srgbClr val="E97132">
+                <a:alpha val="25098"/>
+              </a:srgbClr>
+            </a:solidFill>
+            <a:ln>
+              <a:solidFill>
+                <a:schemeClr val="accent2"/>
+              </a:solidFill>
+            </a:ln>
+          </p:spPr>
+          <p:style>
+            <a:lnRef idx="2">
+              <a:schemeClr val="accent1">
+                <a:shade val="15000"/>
+              </a:schemeClr>
+            </a:lnRef>
+            <a:fillRef idx="1">
+              <a:schemeClr val="accent1"/>
+            </a:fillRef>
+            <a:effectRef idx="0">
+              <a:schemeClr val="accent1"/>
+            </a:effectRef>
+            <a:fontRef idx="minor">
+              <a:schemeClr val="lt1"/>
+            </a:fontRef>
+          </p:style>
+          <p:txBody>
+            <a:bodyPr rtlCol="0" anchor="ctr"/>
+            <a:lstStyle/>
+            <a:p>
+              <a:pPr algn="ctr"/>
+              <a:endParaRPr lang="en-US" dirty="0"/>
+            </a:p>
+          </p:txBody>
+        </p:sp>
+        <p:sp>
+          <p:nvSpPr>
+            <p:cNvPr id="14" name="TextBox 13">
+              <a:extLst>
+                <a:ext uri="{FF2B5EF4-FFF2-40B4-BE49-F238E27FC236}">
+                  <a16:creationId xmlns:a16="http://schemas.microsoft.com/office/drawing/2014/main" id="{9372E7CF-FA7F-038E-1E1E-29691C5760E0}"/>
+                </a:ext>
+              </a:extLst>
+            </p:cNvPr>
+            <p:cNvSpPr txBox="1"/>
+            <p:nvPr/>
+          </p:nvSpPr>
+          <p:spPr>
+            <a:xfrm>
+              <a:off x="285187" y="348481"/>
+              <a:ext cx="2907955" cy="523220"/>
+            </a:xfrm>
+            <a:prstGeom prst="rect">
+              <a:avLst/>
+            </a:prstGeom>
+            <a:noFill/>
+          </p:spPr>
+          <p:txBody>
+            <a:bodyPr wrap="square">
+              <a:spAutoFit/>
+            </a:bodyPr>
+            <a:lstStyle/>
+            <a:p>
+              <a:r>
+                <a:rPr lang="en-US" sz="2800" dirty="0">
+                  <a:latin typeface="Consolas" panose="020B0609020204030204" pitchFamily="49" charset="0"/>
+                </a:rPr>
+                <a:t>"</a:t>
+              </a:r>
+              <a:r>
+                <a:rPr lang="en-US" sz="2800" dirty="0" err="1">
+                  <a:latin typeface="Consolas" panose="020B0609020204030204" pitchFamily="49" charset="0"/>
+                </a:rPr>
+                <a:t>filterType</a:t>
+              </a:r>
+              <a:r>
+                <a:rPr lang="en-US" sz="2800" dirty="0">
+                  <a:latin typeface="Consolas" panose="020B0609020204030204" pitchFamily="49" charset="0"/>
+                </a:rPr>
+                <a:t>":</a:t>
+              </a:r>
+              <a:endParaRPr lang="en-US" dirty="0"/>
+            </a:p>
+          </p:txBody>
+        </p:sp>
+      </p:grpSp>
+    </p:spTree>
+    <p:extLst>
+      <p:ext uri="{BB962C8B-B14F-4D97-AF65-F5344CB8AC3E}">
+        <p14:creationId xmlns:p14="http://schemas.microsoft.com/office/powerpoint/2010/main" val="244283543"/>
+      </p:ext>
+    </p:extLst>
+  </p:cSld>
+  <p:clrMapOvr>
+    <a:masterClrMapping/>
+  </p:clrMapOvr>
+</p:sld>
+</file>
+
+<file path=ppt/slides/slide4.xml><?xml version="1.0" encoding="utf-8"?>
+<p:sld xmlns:a="http://schemas.openxmlformats.org/drawingml/2006/main" xmlns:r="http://schemas.openxmlformats.org/officeDocument/2006/relationships" xmlns:p="http://schemas.openxmlformats.org/presentationml/2006/main">
+  <p:cSld>
+    <p:spTree>
+      <p:nvGrpSpPr>
+        <p:cNvPr id="1" name=""/>
+        <p:cNvGrpSpPr/>
+        <p:nvPr/>
+      </p:nvGrpSpPr>
+      <p:grpSpPr>
+        <a:xfrm>
+          <a:off x="0" y="0"/>
+          <a:ext cx="0" cy="0"/>
+          <a:chOff x="0" y="0"/>
+          <a:chExt cx="0" cy="0"/>
+        </a:xfrm>
+      </p:grpSpPr>
+      <p:sp>
+        <p:nvSpPr>
+          <p:cNvPr id="6" name="Content Placeholder 5">
+            <a:extLst>
+              <a:ext uri="{FF2B5EF4-FFF2-40B4-BE49-F238E27FC236}">
+                <a16:creationId xmlns:a16="http://schemas.microsoft.com/office/drawing/2014/main" id="{C519ADD6-3991-94D6-AD81-A608C689D98D}"/>
+              </a:ext>
+            </a:extLst>
+          </p:cNvPr>
+          <p:cNvSpPr>
+            <a:spLocks noGrp="1"/>
+          </p:cNvSpPr>
+          <p:nvPr>
+            <p:ph idx="1"/>
+          </p:nvPr>
+        </p:nvSpPr>
+        <p:spPr>
+          <a:xfrm>
+            <a:off x="838200" y="1988457"/>
+            <a:ext cx="5257800" cy="5587999"/>
+          </a:xfrm>
+        </p:spPr>
+        <p:txBody>
+          <a:bodyPr>
+            <a:noAutofit/>
+          </a:bodyPr>
+          <a:lstStyle/>
+          <a:p>
+            <a:pPr marL="0" indent="0">
+              <a:lnSpc>
+                <a:spcPct val="50000"/>
+              </a:lnSpc>
+              <a:buNone/>
+            </a:pPr>
+            <a:r>
+              <a:rPr lang="en-US" sz="1800" dirty="0"/>
+              <a:t>{</a:t>
+            </a:r>
+          </a:p>
+          <a:p>
+            <a:pPr marL="0" indent="0">
+              <a:lnSpc>
+                <a:spcPct val="50000"/>
+              </a:lnSpc>
+              <a:buNone/>
+            </a:pPr>
+            <a:r>
+              <a:rPr lang="en-US" sz="1800" dirty="0"/>
+              <a:t>    "size": 25,</a:t>
+            </a:r>
+          </a:p>
+          <a:p>
+            <a:pPr marL="0" indent="0">
+              <a:lnSpc>
+                <a:spcPct val="50000"/>
+              </a:lnSpc>
+              <a:buNone/>
+            </a:pPr>
+            <a:r>
+              <a:rPr lang="en-US" sz="1800" dirty="0"/>
+              <a:t>    "filter": [</a:t>
+            </a:r>
+          </a:p>
+          <a:p>
+            <a:pPr marL="0" indent="0">
+              <a:lnSpc>
+                <a:spcPct val="50000"/>
+              </a:lnSpc>
+              <a:buNone/>
+            </a:pPr>
+            <a:r>
+              <a:rPr lang="en-US" sz="1800" dirty="0"/>
+              <a:t>        {</a:t>
+            </a:r>
+          </a:p>
+          <a:p>
+            <a:pPr marL="0" indent="0">
+              <a:lnSpc>
+                <a:spcPct val="50000"/>
+              </a:lnSpc>
+              <a:buNone/>
+            </a:pPr>
+            <a:r>
+              <a:rPr lang="en-US" sz="1800" dirty="0"/>
+              <a:t>            "</a:t>
+            </a:r>
+            <a:r>
+              <a:rPr lang="en-US" sz="1800" dirty="0" err="1"/>
+              <a:t>propertyName</a:t>
+            </a:r>
+            <a:r>
+              <a:rPr lang="en-US" sz="1800" dirty="0"/>
+              <a:t>": "</a:t>
+            </a:r>
+            <a:r>
+              <a:rPr lang="en-US" sz="1800" dirty="0" err="1"/>
+              <a:t>lifecycleStatus</a:t>
+            </a:r>
+            <a:r>
+              <a:rPr lang="en-US" sz="1800" dirty="0"/>
+              <a:t>",</a:t>
+            </a:r>
+          </a:p>
+          <a:p>
+            <a:pPr marL="0" indent="0">
+              <a:lnSpc>
+                <a:spcPct val="50000"/>
+              </a:lnSpc>
+              <a:buNone/>
+            </a:pPr>
+            <a:r>
+              <a:rPr lang="en-US" sz="1800" dirty="0"/>
+              <a:t>            "value": [</a:t>
+            </a:r>
+          </a:p>
+          <a:p>
+            <a:pPr marL="0" indent="0">
+              <a:lnSpc>
+                <a:spcPct val="50000"/>
+              </a:lnSpc>
+              <a:buNone/>
+            </a:pPr>
+            <a:r>
+              <a:rPr lang="en-US" sz="1800" dirty="0"/>
+              <a:t>                "Submitted",</a:t>
+            </a:r>
+          </a:p>
+          <a:p>
+            <a:pPr marL="0" indent="0">
+              <a:lnSpc>
+                <a:spcPct val="50000"/>
+              </a:lnSpc>
+              <a:buNone/>
+            </a:pPr>
+            <a:r>
+              <a:rPr lang="en-US" sz="1800" dirty="0"/>
+              <a:t>                "Archived"</a:t>
+            </a:r>
+          </a:p>
+          <a:p>
+            <a:pPr marL="0" indent="0">
+              <a:lnSpc>
+                <a:spcPct val="50000"/>
+              </a:lnSpc>
+              <a:buNone/>
+            </a:pPr>
+            <a:r>
+              <a:rPr lang="en-US" sz="1800" dirty="0"/>
+              <a:t>            ],</a:t>
+            </a:r>
+          </a:p>
+          <a:p>
+            <a:pPr marL="0" indent="0">
+              <a:lnSpc>
+                <a:spcPct val="50000"/>
+              </a:lnSpc>
+              <a:buNone/>
+            </a:pPr>
+            <a:r>
+              <a:rPr lang="en-US" sz="1800" dirty="0"/>
+              <a:t>            "</a:t>
+            </a:r>
+            <a:r>
+              <a:rPr lang="en-US" sz="1800" dirty="0" err="1"/>
+              <a:t>filterType</a:t>
+            </a:r>
+            <a:r>
+              <a:rPr lang="en-US" sz="1800" dirty="0"/>
+              <a:t>": "terms"</a:t>
+            </a:r>
+          </a:p>
+          <a:p>
+            <a:pPr marL="0" indent="0">
+              <a:lnSpc>
+                <a:spcPct val="50000"/>
+              </a:lnSpc>
+              <a:buNone/>
+            </a:pPr>
+            <a:r>
+              <a:rPr lang="en-US" sz="1800" dirty="0"/>
+              <a:t>        },</a:t>
+            </a:r>
+          </a:p>
+          <a:p>
+            <a:pPr marL="0" indent="0">
+              <a:lnSpc>
+                <a:spcPct val="50000"/>
+              </a:lnSpc>
+              <a:buNone/>
+            </a:pPr>
+            <a:r>
+              <a:rPr lang="en-US" sz="1800" dirty="0"/>
+              <a:t>        {</a:t>
+            </a:r>
+          </a:p>
+          <a:p>
+            <a:pPr marL="0" indent="0">
+              <a:lnSpc>
+                <a:spcPct val="50000"/>
+              </a:lnSpc>
+              <a:buNone/>
+            </a:pPr>
+            <a:r>
+              <a:rPr lang="en-US" sz="1800" dirty="0"/>
+              <a:t>            "</a:t>
+            </a:r>
+            <a:r>
+              <a:rPr lang="en-US" sz="1800" dirty="0" err="1"/>
+              <a:t>propertyName</a:t>
+            </a:r>
+            <a:r>
+              <a:rPr lang="en-US" sz="1800" dirty="0"/>
+              <a:t>": "</a:t>
+            </a:r>
+            <a:r>
+              <a:rPr lang="en-US" sz="1800" dirty="0" err="1"/>
+              <a:t>fileName</a:t>
+            </a:r>
+            <a:r>
+              <a:rPr lang="en-US" sz="1800" dirty="0"/>
+              <a:t>",</a:t>
+            </a:r>
+          </a:p>
+          <a:p>
+            <a:pPr marL="0" indent="0">
+              <a:lnSpc>
+                <a:spcPct val="50000"/>
+              </a:lnSpc>
+              <a:buNone/>
+            </a:pPr>
+            <a:r>
+              <a:rPr lang="en-US" sz="1800" dirty="0"/>
+              <a:t>            "value": [</a:t>
+            </a:r>
+          </a:p>
+          <a:p>
+            <a:pPr marL="0" indent="0">
+              <a:lnSpc>
+                <a:spcPct val="50000"/>
+              </a:lnSpc>
+              <a:buNone/>
+            </a:pPr>
+            <a:r>
+              <a:rPr lang="en-US" sz="1800" dirty="0"/>
+              <a:t>                "S0995945"</a:t>
+            </a:r>
+          </a:p>
+          <a:p>
+            <a:pPr marL="0" indent="0">
+              <a:lnSpc>
+                <a:spcPct val="50000"/>
+              </a:lnSpc>
+              <a:buNone/>
+            </a:pPr>
+            <a:r>
+              <a:rPr lang="en-US" sz="1800" dirty="0"/>
+              <a:t>            ],</a:t>
+            </a:r>
+          </a:p>
+          <a:p>
+            <a:pPr marL="0" indent="0">
+              <a:lnSpc>
+                <a:spcPct val="50000"/>
+              </a:lnSpc>
+              <a:buNone/>
+            </a:pPr>
+            <a:r>
+              <a:rPr lang="en-US" sz="1800" dirty="0"/>
+              <a:t>            "</a:t>
+            </a:r>
+            <a:r>
+              <a:rPr lang="en-US" sz="1800" dirty="0" err="1"/>
+              <a:t>filterType</a:t>
+            </a:r>
+            <a:r>
+              <a:rPr lang="en-US" sz="1800" dirty="0"/>
+              <a:t>": "wildcard"</a:t>
+            </a:r>
+          </a:p>
+          <a:p>
+            <a:pPr marL="0" indent="0">
+              <a:lnSpc>
+                <a:spcPct val="50000"/>
+              </a:lnSpc>
+              <a:buNone/>
+            </a:pPr>
+            <a:r>
+              <a:rPr lang="en-US" sz="1800" dirty="0"/>
+              <a:t>        },</a:t>
+            </a:r>
+          </a:p>
+        </p:txBody>
+      </p:sp>
+      <p:sp>
+        <p:nvSpPr>
+          <p:cNvPr id="9" name="Content Placeholder 5">
+            <a:extLst>
+              <a:ext uri="{FF2B5EF4-FFF2-40B4-BE49-F238E27FC236}">
+                <a16:creationId xmlns:a16="http://schemas.microsoft.com/office/drawing/2014/main" id="{919FD2E6-D8F0-FF1C-F2D5-77E7E1B87E98}"/>
+              </a:ext>
+            </a:extLst>
+          </p:cNvPr>
+          <p:cNvSpPr txBox="1">
+            <a:spLocks/>
+          </p:cNvSpPr>
+          <p:nvPr/>
+        </p:nvSpPr>
+        <p:spPr>
+          <a:xfrm>
+            <a:off x="6096000" y="899885"/>
+            <a:ext cx="5257800" cy="5587999"/>
+          </a:xfrm>
+          <a:prstGeom prst="rect">
+            <a:avLst/>
+          </a:prstGeom>
+        </p:spPr>
+        <p:txBody>
+          <a:bodyPr vert="horz" lIns="91440" tIns="45720" rIns="91440" bIns="45720" rtlCol="0">
+            <a:noAutofit/>
+          </a:bodyPr>
+          <a:lstStyle>
+            <a:lvl1pPr marL="228600" indent="-228600" algn="l" defTabSz="914400" rtl="0" eaLnBrk="1" latinLnBrk="0" hangingPunct="1">
+              <a:lnSpc>
+                <a:spcPct val="90000"/>
+              </a:lnSpc>
+              <a:spcBef>
+                <a:spcPts val="1000"/>
+              </a:spcBef>
+              <a:buFont typeface="Arial" panose="020B0604020202020204" pitchFamily="34" charset="0"/>
+              <a:buChar char="•"/>
+              <a:defRPr sz="2800" kern="1200">
+                <a:solidFill>
+                  <a:schemeClr val="tx1"/>
+                </a:solidFill>
+                <a:latin typeface="+mn-lt"/>
+                <a:ea typeface="+mn-ea"/>
+                <a:cs typeface="+mn-cs"/>
+              </a:defRPr>
+            </a:lvl1pPr>
+            <a:lvl2pPr marL="685800" indent="-228600" algn="l" defTabSz="914400" rtl="0" eaLnBrk="1" latinLnBrk="0" hangingPunct="1">
+              <a:lnSpc>
+                <a:spcPct val="90000"/>
+              </a:lnSpc>
+              <a:spcBef>
+                <a:spcPts val="500"/>
+              </a:spcBef>
+              <a:buFont typeface="Arial" panose="020B0604020202020204" pitchFamily="34" charset="0"/>
+              <a:buChar char="•"/>
+              <a:defRPr sz="2400" kern="1200">
+                <a:solidFill>
+                  <a:schemeClr val="tx1"/>
+                </a:solidFill>
+                <a:latin typeface="+mn-lt"/>
+                <a:ea typeface="+mn-ea"/>
+                <a:cs typeface="+mn-cs"/>
+              </a:defRPr>
+            </a:lvl2pPr>
+            <a:lvl3pPr marL="1143000" indent="-228600" algn="l" defTabSz="914400" rtl="0" eaLnBrk="1" latinLnBrk="0" hangingPunct="1">
+              <a:lnSpc>
+                <a:spcPct val="90000"/>
+              </a:lnSpc>
+              <a:spcBef>
+                <a:spcPts val="500"/>
+              </a:spcBef>
+              <a:buFont typeface="Arial" panose="020B0604020202020204" pitchFamily="34" charset="0"/>
+              <a:buChar char="•"/>
+              <a:defRPr sz="2000" kern="1200">
+                <a:solidFill>
+                  <a:schemeClr val="tx1"/>
+                </a:solidFill>
+                <a:latin typeface="+mn-lt"/>
+                <a:ea typeface="+mn-ea"/>
+                <a:cs typeface="+mn-cs"/>
+              </a:defRPr>
+            </a:lvl3pPr>
+            <a:lvl4pPr marL="1600200" indent="-228600" algn="l" defTabSz="914400" rtl="0" eaLnBrk="1" latinLnBrk="0" hangingPunct="1">
+              <a:lnSpc>
+                <a:spcPct val="90000"/>
+              </a:lnSpc>
+              <a:spcBef>
+                <a:spcPts val="500"/>
+              </a:spcBef>
+              <a:buFont typeface="Arial" panose="020B0604020202020204" pitchFamily="34" charset="0"/>
+              <a:buChar char="•"/>
+              <a:defRPr sz="1800" kern="1200">
+                <a:solidFill>
+                  <a:schemeClr val="tx1"/>
+                </a:solidFill>
+                <a:latin typeface="+mn-lt"/>
+                <a:ea typeface="+mn-ea"/>
+                <a:cs typeface="+mn-cs"/>
+              </a:defRPr>
+            </a:lvl4pPr>
+            <a:lvl5pPr marL="2057400" indent="-228600" algn="l" defTabSz="914400" rtl="0" eaLnBrk="1" latinLnBrk="0" hangingPunct="1">
+              <a:lnSpc>
+                <a:spcPct val="90000"/>
+              </a:lnSpc>
+              <a:spcBef>
+                <a:spcPts val="500"/>
+              </a:spcBef>
+              <a:buFont typeface="Arial" panose="020B0604020202020204" pitchFamily="34" charset="0"/>
+              <a:buChar char="•"/>
+              <a:defRPr sz="1800" kern="1200">
+                <a:solidFill>
+                  <a:schemeClr val="tx1"/>
+                </a:solidFill>
+                <a:latin typeface="+mn-lt"/>
+                <a:ea typeface="+mn-ea"/>
+                <a:cs typeface="+mn-cs"/>
+              </a:defRPr>
+            </a:lvl5pPr>
+            <a:lvl6pPr marL="2514600" indent="-228600" algn="l" defTabSz="914400" rtl="0" eaLnBrk="1" latinLnBrk="0" hangingPunct="1">
+              <a:lnSpc>
+                <a:spcPct val="90000"/>
+              </a:lnSpc>
+              <a:spcBef>
+                <a:spcPts val="500"/>
+              </a:spcBef>
+              <a:buFont typeface="Arial" panose="020B0604020202020204" pitchFamily="34" charset="0"/>
+              <a:buChar char="•"/>
+              <a:defRPr sz="1800" kern="1200">
+                <a:solidFill>
+                  <a:schemeClr val="tx1"/>
+                </a:solidFill>
+                <a:latin typeface="+mn-lt"/>
+                <a:ea typeface="+mn-ea"/>
+                <a:cs typeface="+mn-cs"/>
+              </a:defRPr>
+            </a:lvl6pPr>
+            <a:lvl7pPr marL="2971800" indent="-228600" algn="l" defTabSz="914400" rtl="0" eaLnBrk="1" latinLnBrk="0" hangingPunct="1">
+              <a:lnSpc>
+                <a:spcPct val="90000"/>
+              </a:lnSpc>
+              <a:spcBef>
+                <a:spcPts val="500"/>
+              </a:spcBef>
+              <a:buFont typeface="Arial" panose="020B0604020202020204" pitchFamily="34" charset="0"/>
+              <a:buChar char="•"/>
+              <a:defRPr sz="1800" kern="1200">
+                <a:solidFill>
+                  <a:schemeClr val="tx1"/>
+                </a:solidFill>
+                <a:latin typeface="+mn-lt"/>
+                <a:ea typeface="+mn-ea"/>
+                <a:cs typeface="+mn-cs"/>
+              </a:defRPr>
+            </a:lvl7pPr>
+            <a:lvl8pPr marL="3429000" indent="-228600" algn="l" defTabSz="914400" rtl="0" eaLnBrk="1" latinLnBrk="0" hangingPunct="1">
+              <a:lnSpc>
+                <a:spcPct val="90000"/>
+              </a:lnSpc>
+              <a:spcBef>
+                <a:spcPts val="500"/>
+              </a:spcBef>
+              <a:buFont typeface="Arial" panose="020B0604020202020204" pitchFamily="34" charset="0"/>
+              <a:buChar char="•"/>
+              <a:defRPr sz="1800" kern="1200">
+                <a:solidFill>
+                  <a:schemeClr val="tx1"/>
+                </a:solidFill>
+                <a:latin typeface="+mn-lt"/>
+                <a:ea typeface="+mn-ea"/>
+                <a:cs typeface="+mn-cs"/>
+              </a:defRPr>
+            </a:lvl8pPr>
+            <a:lvl9pPr marL="3886200" indent="-228600" algn="l" defTabSz="914400" rtl="0" eaLnBrk="1" latinLnBrk="0" hangingPunct="1">
+              <a:lnSpc>
+                <a:spcPct val="90000"/>
+              </a:lnSpc>
+              <a:spcBef>
+                <a:spcPts val="500"/>
+              </a:spcBef>
+              <a:buFont typeface="Arial" panose="020B0604020202020204" pitchFamily="34" charset="0"/>
+              <a:buChar char="•"/>
+              <a:defRPr sz="1800" kern="1200">
+                <a:solidFill>
+                  <a:schemeClr val="tx1"/>
+                </a:solidFill>
+                <a:latin typeface="+mn-lt"/>
+                <a:ea typeface="+mn-ea"/>
+                <a:cs typeface="+mn-cs"/>
+              </a:defRPr>
+            </a:lvl9pPr>
+          </a:lstStyle>
+          <a:p>
+            <a:pPr marL="0" indent="0">
+              <a:lnSpc>
+                <a:spcPct val="50000"/>
+              </a:lnSpc>
+              <a:buFont typeface="Arial" panose="020B0604020202020204" pitchFamily="34" charset="0"/>
+              <a:buNone/>
+            </a:pPr>
+            <a:r>
+              <a:rPr lang="en-US" sz="1800" dirty="0"/>
+              <a:t>        {</a:t>
+            </a:r>
+          </a:p>
+          <a:p>
+            <a:pPr marL="0" indent="0">
+              <a:lnSpc>
+                <a:spcPct val="50000"/>
+              </a:lnSpc>
+              <a:buFont typeface="Arial" panose="020B0604020202020204" pitchFamily="34" charset="0"/>
+              <a:buNone/>
+            </a:pPr>
+            <a:r>
+              <a:rPr lang="en-US" sz="1800" dirty="0"/>
+              <a:t>            "</a:t>
+            </a:r>
+            <a:r>
+              <a:rPr lang="en-US" sz="1800" dirty="0" err="1"/>
+              <a:t>propertyName</a:t>
+            </a:r>
+            <a:r>
+              <a:rPr lang="en-US" sz="1800" dirty="0"/>
+              <a:t>": "</a:t>
+            </a:r>
+            <a:r>
+              <a:rPr lang="en-US" sz="1800" dirty="0" err="1"/>
+              <a:t>instrumentId</a:t>
+            </a:r>
+            <a:r>
+              <a:rPr lang="en-US" sz="1800" dirty="0"/>
+              <a:t>",</a:t>
+            </a:r>
+          </a:p>
+          <a:p>
+            <a:pPr marL="0" indent="0">
+              <a:lnSpc>
+                <a:spcPct val="50000"/>
+              </a:lnSpc>
+              <a:buFont typeface="Arial" panose="020B0604020202020204" pitchFamily="34" charset="0"/>
+              <a:buNone/>
+            </a:pPr>
+            <a:r>
+              <a:rPr lang="en-US" sz="1800" dirty="0"/>
+              <a:t>            "value": [</a:t>
+            </a:r>
+          </a:p>
+          <a:p>
+            <a:pPr marL="0" indent="0">
+              <a:lnSpc>
+                <a:spcPct val="50000"/>
+              </a:lnSpc>
+              <a:buFont typeface="Arial" panose="020B0604020202020204" pitchFamily="34" charset="0"/>
+              <a:buNone/>
+            </a:pPr>
+            <a:r>
+              <a:rPr lang="en-US" sz="1800" dirty="0"/>
+              <a:t>                "IF_NIR"</a:t>
+            </a:r>
+          </a:p>
+          <a:p>
+            <a:pPr marL="0" indent="0">
+              <a:lnSpc>
+                <a:spcPct val="50000"/>
+              </a:lnSpc>
+              <a:buFont typeface="Arial" panose="020B0604020202020204" pitchFamily="34" charset="0"/>
+              <a:buNone/>
+            </a:pPr>
+            <a:r>
+              <a:rPr lang="en-US" sz="1800" dirty="0"/>
+              <a:t>            ],</a:t>
+            </a:r>
+          </a:p>
+          <a:p>
+            <a:pPr marL="0" indent="0">
+              <a:lnSpc>
+                <a:spcPct val="50000"/>
+              </a:lnSpc>
+              <a:buFont typeface="Arial" panose="020B0604020202020204" pitchFamily="34" charset="0"/>
+              <a:buNone/>
+            </a:pPr>
+            <a:r>
+              <a:rPr lang="en-US" sz="1800" dirty="0"/>
+              <a:t>            "</a:t>
+            </a:r>
+            <a:r>
+              <a:rPr lang="en-US" sz="1800" dirty="0" err="1"/>
+              <a:t>filterType</a:t>
+            </a:r>
+            <a:r>
+              <a:rPr lang="en-US" sz="1800" dirty="0"/>
+              <a:t>": "terms"</a:t>
+            </a:r>
+          </a:p>
+          <a:p>
+            <a:pPr marL="0" indent="0">
+              <a:lnSpc>
+                <a:spcPct val="50000"/>
+              </a:lnSpc>
+              <a:buFont typeface="Arial" panose="020B0604020202020204" pitchFamily="34" charset="0"/>
+              <a:buNone/>
+            </a:pPr>
+            <a:r>
+              <a:rPr lang="en-US" sz="1800" dirty="0"/>
+              <a:t>        },</a:t>
+            </a:r>
+          </a:p>
+          <a:p>
+            <a:pPr marL="0" indent="0">
+              <a:lnSpc>
+                <a:spcPct val="50000"/>
+              </a:lnSpc>
+              <a:buFont typeface="Arial" panose="020B0604020202020204" pitchFamily="34" charset="0"/>
+              <a:buNone/>
+            </a:pPr>
+            <a:r>
+              <a:rPr lang="en-US" sz="1800" dirty="0"/>
+              <a:t>        {</a:t>
+            </a:r>
+          </a:p>
+          <a:p>
+            <a:pPr marL="0" indent="0">
+              <a:lnSpc>
+                <a:spcPct val="50000"/>
+              </a:lnSpc>
+              <a:buFont typeface="Arial" panose="020B0604020202020204" pitchFamily="34" charset="0"/>
+              <a:buNone/>
+            </a:pPr>
+            <a:r>
+              <a:rPr lang="en-US" sz="1800" dirty="0"/>
+              <a:t>            "</a:t>
+            </a:r>
+            <a:r>
+              <a:rPr lang="en-US" sz="1800" dirty="0" err="1"/>
+              <a:t>propertyName</a:t>
+            </a:r>
+            <a:r>
+              <a:rPr lang="en-US" sz="1800" dirty="0"/>
+              <a:t>": "</a:t>
+            </a:r>
+            <a:r>
+              <a:rPr lang="en-US" sz="1800" dirty="0" err="1"/>
+              <a:t>informationPackageProfile</a:t>
+            </a:r>
+            <a:r>
+              <a:rPr lang="en-US" sz="1800" dirty="0"/>
+              <a:t>",</a:t>
+            </a:r>
+          </a:p>
+          <a:p>
+            <a:pPr marL="0" indent="0">
+              <a:lnSpc>
+                <a:spcPct val="50000"/>
+              </a:lnSpc>
+              <a:buFont typeface="Arial" panose="020B0604020202020204" pitchFamily="34" charset="0"/>
+              <a:buNone/>
+            </a:pPr>
+            <a:r>
+              <a:rPr lang="en-US" sz="1800" dirty="0"/>
+              <a:t>            "value": [</a:t>
+            </a:r>
+          </a:p>
+          <a:p>
+            <a:pPr marL="0" indent="0">
+              <a:lnSpc>
+                <a:spcPct val="50000"/>
+              </a:lnSpc>
+              <a:buFont typeface="Arial" panose="020B0604020202020204" pitchFamily="34" charset="0"/>
+              <a:buNone/>
+            </a:pPr>
+            <a:r>
+              <a:rPr lang="en-US" sz="1800" dirty="0"/>
+              <a:t>                "VNF"</a:t>
+            </a:r>
+          </a:p>
+          <a:p>
+            <a:pPr marL="0" indent="0">
+              <a:lnSpc>
+                <a:spcPct val="50000"/>
+              </a:lnSpc>
+              <a:buFont typeface="Arial" panose="020B0604020202020204" pitchFamily="34" charset="0"/>
+              <a:buNone/>
+            </a:pPr>
+            <a:r>
+              <a:rPr lang="en-US" sz="1800" dirty="0"/>
+              <a:t>            ],</a:t>
+            </a:r>
+          </a:p>
+          <a:p>
+            <a:pPr marL="0" indent="0">
+              <a:lnSpc>
+                <a:spcPct val="50000"/>
+              </a:lnSpc>
+              <a:buNone/>
+            </a:pPr>
+            <a:r>
+              <a:rPr lang="en-US" sz="1800" dirty="0"/>
+              <a:t>            "</a:t>
+            </a:r>
+            <a:r>
+              <a:rPr lang="en-US" sz="1800" dirty="0" err="1"/>
+              <a:t>filterType</a:t>
+            </a:r>
+            <a:r>
+              <a:rPr lang="en-US" sz="1800" dirty="0"/>
+              <a:t>": " wildcard "</a:t>
+            </a:r>
+          </a:p>
+          <a:p>
+            <a:pPr marL="0" indent="0">
+              <a:lnSpc>
+                <a:spcPct val="50000"/>
+              </a:lnSpc>
+              <a:buFont typeface="Arial" panose="020B0604020202020204" pitchFamily="34" charset="0"/>
+              <a:buNone/>
+            </a:pPr>
+            <a:r>
+              <a:rPr lang="en-US" sz="1800" dirty="0"/>
+              <a:t>        }</a:t>
+            </a:r>
+          </a:p>
+          <a:p>
+            <a:pPr marL="0" indent="0">
+              <a:lnSpc>
+                <a:spcPct val="50000"/>
+              </a:lnSpc>
+              <a:buFont typeface="Arial" panose="020B0604020202020204" pitchFamily="34" charset="0"/>
+              <a:buNone/>
+            </a:pPr>
+            <a:r>
+              <a:rPr lang="en-US" sz="1800" dirty="0"/>
+              <a:t>    ],</a:t>
+            </a:r>
+          </a:p>
+          <a:p>
+            <a:pPr marL="0" indent="0">
+              <a:lnSpc>
+                <a:spcPct val="50000"/>
+              </a:lnSpc>
+              <a:buFont typeface="Arial" panose="020B0604020202020204" pitchFamily="34" charset="0"/>
+              <a:buNone/>
+            </a:pPr>
+            <a:r>
+              <a:rPr lang="en-US" sz="1800" dirty="0"/>
+              <a:t>    "</a:t>
+            </a:r>
+            <a:r>
+              <a:rPr lang="en-US" sz="1800" dirty="0" err="1"/>
+              <a:t>sortField</a:t>
+            </a:r>
+            <a:r>
+              <a:rPr lang="en-US" sz="1800" dirty="0"/>
+              <a:t>": [</a:t>
+            </a:r>
+          </a:p>
+          <a:p>
+            <a:pPr marL="0" indent="0">
+              <a:lnSpc>
+                <a:spcPct val="50000"/>
+              </a:lnSpc>
+              <a:buFont typeface="Arial" panose="020B0604020202020204" pitchFamily="34" charset="0"/>
+              <a:buNone/>
+            </a:pPr>
+            <a:r>
+              <a:rPr lang="en-US" sz="1800" dirty="0"/>
+              <a:t>        "</a:t>
+            </a:r>
+            <a:r>
+              <a:rPr lang="en-US" sz="1800" dirty="0" err="1"/>
+              <a:t>createdOn</a:t>
+            </a:r>
+            <a:r>
+              <a:rPr lang="en-US" sz="1800" dirty="0"/>
+              <a:t>"</a:t>
+            </a:r>
+          </a:p>
+          <a:p>
+            <a:pPr marL="0" indent="0">
+              <a:lnSpc>
+                <a:spcPct val="50000"/>
+              </a:lnSpc>
+              <a:buFont typeface="Arial" panose="020B0604020202020204" pitchFamily="34" charset="0"/>
+              <a:buNone/>
+            </a:pPr>
+            <a:r>
+              <a:rPr lang="en-US" sz="1800" dirty="0"/>
+              <a:t>    ],</a:t>
+            </a:r>
+          </a:p>
+          <a:p>
+            <a:pPr marL="0" indent="0">
+              <a:lnSpc>
+                <a:spcPct val="50000"/>
+              </a:lnSpc>
+              <a:buFont typeface="Arial" panose="020B0604020202020204" pitchFamily="34" charset="0"/>
+              <a:buNone/>
+            </a:pPr>
+            <a:r>
+              <a:rPr lang="en-US" sz="1800" dirty="0"/>
+              <a:t>    "</a:t>
+            </a:r>
+            <a:r>
+              <a:rPr lang="en-US" sz="1800" dirty="0" err="1"/>
+              <a:t>sortOrder</a:t>
+            </a:r>
+            <a:r>
+              <a:rPr lang="en-US" sz="1800" dirty="0"/>
+              <a:t>": [</a:t>
+            </a:r>
+          </a:p>
+          <a:p>
+            <a:pPr marL="0" indent="0">
+              <a:lnSpc>
+                <a:spcPct val="50000"/>
+              </a:lnSpc>
+              <a:buFont typeface="Arial" panose="020B0604020202020204" pitchFamily="34" charset="0"/>
+              <a:buNone/>
+            </a:pPr>
+            <a:r>
+              <a:rPr lang="en-US" sz="1800" dirty="0"/>
+              <a:t>        "</a:t>
+            </a:r>
+            <a:r>
+              <a:rPr lang="en-US" sz="1800" dirty="0" err="1"/>
+              <a:t>asc</a:t>
+            </a:r>
+            <a:r>
+              <a:rPr lang="en-US" sz="1800" dirty="0"/>
+              <a:t>"</a:t>
+            </a:r>
+          </a:p>
+          <a:p>
+            <a:pPr marL="0" indent="0">
+              <a:lnSpc>
+                <a:spcPct val="50000"/>
+              </a:lnSpc>
+              <a:buFont typeface="Arial" panose="020B0604020202020204" pitchFamily="34" charset="0"/>
+              <a:buNone/>
+            </a:pPr>
+            <a:r>
+              <a:rPr lang="en-US" sz="1800" dirty="0"/>
+              <a:t>    ]</a:t>
+            </a:r>
+          </a:p>
+          <a:p>
+            <a:pPr marL="0" indent="0">
+              <a:lnSpc>
+                <a:spcPct val="50000"/>
+              </a:lnSpc>
+              <a:buFont typeface="Arial" panose="020B0604020202020204" pitchFamily="34" charset="0"/>
+              <a:buNone/>
+            </a:pPr>
+            <a:r>
+              <a:rPr lang="en-US" sz="1800" dirty="0"/>
+              <a:t>}</a:t>
+            </a:r>
+          </a:p>
+        </p:txBody>
+      </p:sp>
+      <p:sp>
+        <p:nvSpPr>
+          <p:cNvPr id="12" name="Title 11">
+            <a:extLst>
+              <a:ext uri="{FF2B5EF4-FFF2-40B4-BE49-F238E27FC236}">
+                <a16:creationId xmlns:a16="http://schemas.microsoft.com/office/drawing/2014/main" id="{65A901B8-9134-0D7A-6289-E8E773245659}"/>
+              </a:ext>
+            </a:extLst>
+          </p:cNvPr>
+          <p:cNvSpPr>
+            <a:spLocks noGrp="1"/>
+          </p:cNvSpPr>
+          <p:nvPr>
+            <p:ph type="title"/>
+          </p:nvPr>
+        </p:nvSpPr>
+        <p:spPr/>
+        <p:txBody>
+          <a:bodyPr/>
+          <a:lstStyle/>
+          <a:p>
+            <a:r>
+              <a:rPr lang="en-US" dirty="0"/>
+              <a:t>Example 2</a:t>
+            </a:r>
+          </a:p>
+        </p:txBody>
+      </p:sp>
+    </p:spTree>
+    <p:extLst>
+      <p:ext uri="{BB962C8B-B14F-4D97-AF65-F5344CB8AC3E}">
+        <p14:creationId xmlns:p14="http://schemas.microsoft.com/office/powerpoint/2010/main" val="1844980969"/>
+      </p:ext>
+    </p:extLst>
+  </p:cSld>
+  <p:clrMapOvr>
+    <a:masterClrMapping/>
+  </p:clrMapOvr>
+</p:sld>
+</file>
+
+<file path=ppt/slides/slide5.xml><?xml version="1.0" encoding="utf-8"?>
+<p:sld xmlns:a="http://schemas.openxmlformats.org/drawingml/2006/main" xmlns:r="http://schemas.openxmlformats.org/officeDocument/2006/relationships" xmlns:p="http://schemas.openxmlformats.org/presentationml/2006/main">
+  <p:cSld>
+    <p:spTree>
+      <p:nvGrpSpPr>
+        <p:cNvPr id="1" name=""/>
+        <p:cNvGrpSpPr/>
+        <p:nvPr/>
+      </p:nvGrpSpPr>
+      <p:grpSpPr>
+        <a:xfrm>
+          <a:off x="0" y="0"/>
+          <a:ext cx="0" cy="0"/>
+          <a:chOff x="0" y="0"/>
+          <a:chExt cx="0" cy="0"/>
+        </a:xfrm>
+      </p:grpSpPr>
+      <p:sp>
+        <p:nvSpPr>
+          <p:cNvPr id="2" name="Title 1">
+            <a:extLst>
+              <a:ext uri="{FF2B5EF4-FFF2-40B4-BE49-F238E27FC236}">
+                <a16:creationId xmlns:a16="http://schemas.microsoft.com/office/drawing/2014/main" id="{3176F02E-61BC-EF4A-C6A9-F277F7C07ED2}"/>
+              </a:ext>
+            </a:extLst>
+          </p:cNvPr>
+          <p:cNvSpPr>
+            <a:spLocks noGrp="1"/>
+          </p:cNvSpPr>
+          <p:nvPr>
+            <p:ph type="title"/>
+          </p:nvPr>
+        </p:nvSpPr>
+        <p:spPr/>
+        <p:txBody>
+          <a:bodyPr/>
+          <a:lstStyle/>
+          <a:p>
+            <a:r>
+              <a:rPr lang="en-US" dirty="0"/>
+              <a:t>GUI </a:t>
+            </a:r>
+            <a:r>
+              <a:rPr lang="en-US" dirty="0" err="1"/>
+              <a:t>Zontal</a:t>
+            </a:r>
+            <a:r>
+              <a:rPr lang="en-US" dirty="0"/>
+              <a:t> - Download</a:t>
+            </a:r>
+          </a:p>
+        </p:txBody>
+      </p:sp>
+      <p:pic>
+        <p:nvPicPr>
+          <p:cNvPr id="5" name="Content Placeholder 4">
+            <a:extLst>
+              <a:ext uri="{FF2B5EF4-FFF2-40B4-BE49-F238E27FC236}">
+                <a16:creationId xmlns:a16="http://schemas.microsoft.com/office/drawing/2014/main" id="{F0E99DBC-C6DF-E648-1A71-0FFDF8F4442A}"/>
+              </a:ext>
+            </a:extLst>
+          </p:cNvPr>
+          <p:cNvPicPr>
+            <a:picLocks noGrp="1" noChangeAspect="1"/>
+          </p:cNvPicPr>
+          <p:nvPr>
+            <p:ph idx="1"/>
+          </p:nvPr>
+        </p:nvPicPr>
+        <p:blipFill>
+          <a:blip r:embed="rId2"/>
+          <a:stretch>
+            <a:fillRect/>
+          </a:stretch>
+        </p:blipFill>
+        <p:spPr>
+          <a:xfrm>
+            <a:off x="2556408" y="1825625"/>
+            <a:ext cx="7079183" cy="4351338"/>
+          </a:xfrm>
+          <a:prstGeom prst="rect">
+            <a:avLst/>
+          </a:prstGeom>
+        </p:spPr>
+      </p:pic>
+      <p:sp>
+        <p:nvSpPr>
+          <p:cNvPr id="6" name="TextBox 5">
+            <a:extLst>
+              <a:ext uri="{FF2B5EF4-FFF2-40B4-BE49-F238E27FC236}">
+                <a16:creationId xmlns:a16="http://schemas.microsoft.com/office/drawing/2014/main" id="{FEEA527A-BDFD-6C51-BE31-A9097EB24AE3}"/>
+              </a:ext>
+            </a:extLst>
+          </p:cNvPr>
+          <p:cNvSpPr txBox="1"/>
+          <p:nvPr/>
+        </p:nvSpPr>
+        <p:spPr>
+          <a:xfrm>
+            <a:off x="9655629" y="1825625"/>
+            <a:ext cx="2057400" cy="2585323"/>
+          </a:xfrm>
+          <a:prstGeom prst="rect">
+            <a:avLst/>
+          </a:prstGeom>
+          <a:noFill/>
+        </p:spPr>
+        <p:txBody>
+          <a:bodyPr wrap="square" rtlCol="0">
+            <a:spAutoFit/>
+          </a:bodyPr>
+          <a:lstStyle/>
+          <a:p>
+            <a:r>
+              <a:rPr lang="en-US" dirty="0"/>
+              <a:t>Download results where file has extension .</a:t>
+            </a:r>
+            <a:r>
+              <a:rPr lang="en-US" dirty="0" err="1"/>
+              <a:t>asm</a:t>
+            </a:r>
+            <a:r>
+              <a:rPr lang="en-US" dirty="0"/>
+              <a:t> (processed results file with a VNF (vendor neutral format) information package profile.</a:t>
+            </a:r>
+          </a:p>
+        </p:txBody>
+      </p:sp>
+    </p:spTree>
+    <p:extLst>
+      <p:ext uri="{BB962C8B-B14F-4D97-AF65-F5344CB8AC3E}">
+        <p14:creationId xmlns:p14="http://schemas.microsoft.com/office/powerpoint/2010/main" val="281022573"/>
+      </p:ext>
+    </p:extLst>
+  </p:cSld>
+  <p:clrMapOvr>
+    <a:masterClrMapping/>
+  </p:clrMapOvr>
+</p:sld>
+</file>
+
+<file path=ppt/slides/slide6.xml><?xml version="1.0" encoding="utf-8"?>
+<p:sld xmlns:a="http://schemas.openxmlformats.org/drawingml/2006/main" xmlns:r="http://schemas.openxmlformats.org/officeDocument/2006/relationships" xmlns:p="http://schemas.openxmlformats.org/presentationml/2006/main">
+  <p:cSld>
+    <p:spTree>
+      <p:nvGrpSpPr>
+        <p:cNvPr id="1" name=""/>
+        <p:cNvGrpSpPr/>
+        <p:nvPr/>
+      </p:nvGrpSpPr>
+      <p:grpSpPr>
+        <a:xfrm>
+          <a:off x="0" y="0"/>
+          <a:ext cx="0" cy="0"/>
+          <a:chOff x="0" y="0"/>
+          <a:chExt cx="0" cy="0"/>
+        </a:xfrm>
+      </p:grpSpPr>
+      <p:pic>
+        <p:nvPicPr>
+          <p:cNvPr id="5" name="Content Placeholder 4">
+            <a:extLst>
+              <a:ext uri="{FF2B5EF4-FFF2-40B4-BE49-F238E27FC236}">
+                <a16:creationId xmlns:a16="http://schemas.microsoft.com/office/drawing/2014/main" id="{45E2A19A-4D10-0564-B3EE-F2A86D89A31B}"/>
+              </a:ext>
+            </a:extLst>
+          </p:cNvPr>
+          <p:cNvPicPr>
+            <a:picLocks noGrp="1" noChangeAspect="1"/>
+          </p:cNvPicPr>
+          <p:nvPr>
+            <p:ph idx="1"/>
+          </p:nvPr>
+        </p:nvPicPr>
+        <p:blipFill>
+          <a:blip r:embed="rId2"/>
+          <a:stretch>
+            <a:fillRect/>
+          </a:stretch>
+        </p:blipFill>
+        <p:spPr>
+          <a:xfrm>
+            <a:off x="1538514" y="861999"/>
+            <a:ext cx="8227278" cy="5754940"/>
+          </a:xfrm>
+          <a:prstGeom prst="rect">
+            <a:avLst/>
+          </a:prstGeom>
+        </p:spPr>
+      </p:pic>
+      <p:sp>
+        <p:nvSpPr>
+          <p:cNvPr id="7" name="Rectangle: Rounded Corners 6">
+            <a:extLst>
+              <a:ext uri="{FF2B5EF4-FFF2-40B4-BE49-F238E27FC236}">
+                <a16:creationId xmlns:a16="http://schemas.microsoft.com/office/drawing/2014/main" id="{8AD96186-AC77-B707-273A-D57B07C4B896}"/>
+              </a:ext>
+            </a:extLst>
+          </p:cNvPr>
+          <p:cNvSpPr/>
+          <p:nvPr/>
+        </p:nvSpPr>
+        <p:spPr>
+          <a:xfrm>
+            <a:off x="6447808" y="1704826"/>
+            <a:ext cx="344026" cy="164780"/>
+          </a:xfrm>
+          <a:prstGeom prst="roundRect">
+            <a:avLst/>
+          </a:prstGeom>
+          <a:solidFill>
+            <a:srgbClr val="E97132">
+              <a:alpha val="25098"/>
+            </a:srgbClr>
+          </a:solidFill>
+          <a:ln>
+            <a:solidFill>
+              <a:schemeClr val="accent2"/>
+            </a:solidFill>
+          </a:ln>
+        </p:spPr>
+        <p:style>
+          <a:lnRef idx="2">
+            <a:schemeClr val="accent1">
+              <a:shade val="15000"/>
+            </a:schemeClr>
+          </a:lnRef>
+          <a:fillRef idx="1">
+            <a:schemeClr val="accent1"/>
+          </a:fillRef>
+          <a:effectRef idx="0">
+            <a:schemeClr val="accent1"/>
+          </a:effectRef>
+          <a:fontRef idx="minor">
+            <a:schemeClr val="lt1"/>
+          </a:fontRef>
+        </p:style>
+        <p:txBody>
+          <a:bodyPr rtlCol="0" anchor="ctr"/>
+          <a:lstStyle/>
+          <a:p>
+            <a:pPr algn="ctr"/>
+            <a:endParaRPr lang="en-US"/>
+          </a:p>
+        </p:txBody>
+      </p:sp>
+      <p:pic>
+        <p:nvPicPr>
+          <p:cNvPr id="9" name="Picture 8">
+            <a:extLst>
+              <a:ext uri="{FF2B5EF4-FFF2-40B4-BE49-F238E27FC236}">
+                <a16:creationId xmlns:a16="http://schemas.microsoft.com/office/drawing/2014/main" id="{3386308E-4E00-B7E0-3848-06CFE6385AD6}"/>
+              </a:ext>
+            </a:extLst>
+          </p:cNvPr>
+          <p:cNvPicPr>
+            <a:picLocks noChangeAspect="1"/>
+          </p:cNvPicPr>
+          <p:nvPr/>
+        </p:nvPicPr>
+        <p:blipFill>
+          <a:blip r:embed="rId3"/>
+          <a:stretch>
+            <a:fillRect/>
+          </a:stretch>
+        </p:blipFill>
+        <p:spPr>
+          <a:xfrm>
+            <a:off x="5652153" y="3346229"/>
+            <a:ext cx="4094538" cy="3099738"/>
+          </a:xfrm>
+          <a:prstGeom prst="rect">
+            <a:avLst/>
+          </a:prstGeom>
+          <a:ln>
+            <a:solidFill>
+              <a:schemeClr val="accent2"/>
+            </a:solidFill>
+          </a:ln>
+        </p:spPr>
+      </p:pic>
+      <p:sp>
+        <p:nvSpPr>
+          <p:cNvPr id="10" name="Rectangle: Rounded Corners 9">
+            <a:extLst>
+              <a:ext uri="{FF2B5EF4-FFF2-40B4-BE49-F238E27FC236}">
+                <a16:creationId xmlns:a16="http://schemas.microsoft.com/office/drawing/2014/main" id="{6A2A1CEE-5AFF-8923-4377-AD5336E84EB4}"/>
+              </a:ext>
+            </a:extLst>
+          </p:cNvPr>
+          <p:cNvSpPr/>
+          <p:nvPr/>
+        </p:nvSpPr>
+        <p:spPr>
+          <a:xfrm>
+            <a:off x="6323442" y="5011964"/>
+            <a:ext cx="715432" cy="135334"/>
+          </a:xfrm>
+          <a:prstGeom prst="roundRect">
+            <a:avLst/>
+          </a:prstGeom>
+          <a:solidFill>
+            <a:srgbClr val="E97132">
+              <a:alpha val="25098"/>
+            </a:srgbClr>
+          </a:solidFill>
+          <a:ln>
+            <a:solidFill>
+              <a:schemeClr val="accent2"/>
+            </a:solidFill>
+          </a:ln>
+        </p:spPr>
+        <p:style>
+          <a:lnRef idx="2">
+            <a:schemeClr val="accent1">
+              <a:shade val="15000"/>
+            </a:schemeClr>
+          </a:lnRef>
+          <a:fillRef idx="1">
+            <a:schemeClr val="accent1"/>
+          </a:fillRef>
+          <a:effectRef idx="0">
+            <a:schemeClr val="accent1"/>
+          </a:effectRef>
+          <a:fontRef idx="minor">
+            <a:schemeClr val="lt1"/>
+          </a:fontRef>
+        </p:style>
+        <p:txBody>
+          <a:bodyPr rtlCol="0" anchor="ctr"/>
+          <a:lstStyle/>
+          <a:p>
+            <a:pPr algn="ctr"/>
+            <a:endParaRPr lang="en-US"/>
+          </a:p>
+        </p:txBody>
+      </p:sp>
+      <p:sp>
+        <p:nvSpPr>
+          <p:cNvPr id="11" name="Rectangle: Rounded Corners 10">
+            <a:extLst>
+              <a:ext uri="{FF2B5EF4-FFF2-40B4-BE49-F238E27FC236}">
+                <a16:creationId xmlns:a16="http://schemas.microsoft.com/office/drawing/2014/main" id="{149BDD8D-0881-2CEE-A28A-01440FE14165}"/>
+              </a:ext>
+            </a:extLst>
+          </p:cNvPr>
+          <p:cNvSpPr/>
+          <p:nvPr/>
+        </p:nvSpPr>
+        <p:spPr>
+          <a:xfrm>
+            <a:off x="6320103" y="5171462"/>
+            <a:ext cx="462587" cy="135334"/>
+          </a:xfrm>
+          <a:prstGeom prst="roundRect">
+            <a:avLst/>
+          </a:prstGeom>
+          <a:solidFill>
+            <a:srgbClr val="E97132">
+              <a:alpha val="25098"/>
+            </a:srgbClr>
+          </a:solidFill>
+          <a:ln>
+            <a:solidFill>
+              <a:schemeClr val="accent2"/>
+            </a:solidFill>
+          </a:ln>
+        </p:spPr>
+        <p:style>
+          <a:lnRef idx="2">
+            <a:schemeClr val="accent1">
+              <a:shade val="15000"/>
+            </a:schemeClr>
+          </a:lnRef>
+          <a:fillRef idx="1">
+            <a:schemeClr val="accent1"/>
+          </a:fillRef>
+          <a:effectRef idx="0">
+            <a:schemeClr val="accent1"/>
+          </a:effectRef>
+          <a:fontRef idx="minor">
+            <a:schemeClr val="lt1"/>
+          </a:fontRef>
+        </p:style>
+        <p:txBody>
+          <a:bodyPr rtlCol="0" anchor="ctr"/>
+          <a:lstStyle/>
+          <a:p>
+            <a:pPr algn="ctr"/>
+            <a:endParaRPr lang="en-US"/>
+          </a:p>
+        </p:txBody>
+      </p:sp>
+      <p:cxnSp>
+        <p:nvCxnSpPr>
+          <p:cNvPr id="13" name="Straight Arrow Connector 12">
+            <a:extLst>
+              <a:ext uri="{FF2B5EF4-FFF2-40B4-BE49-F238E27FC236}">
+                <a16:creationId xmlns:a16="http://schemas.microsoft.com/office/drawing/2014/main" id="{A2EA7C82-4B75-7589-9E6B-DC851D551821}"/>
+              </a:ext>
+            </a:extLst>
+          </p:cNvPr>
+          <p:cNvCxnSpPr>
+            <a:cxnSpLocks/>
+            <a:stCxn id="7" idx="2"/>
+            <a:endCxn id="9" idx="0"/>
+          </p:cNvCxnSpPr>
+          <p:nvPr/>
+        </p:nvCxnSpPr>
+        <p:spPr>
+          <a:xfrm>
+            <a:off x="6619821" y="1869606"/>
+            <a:ext cx="1079601" cy="1476623"/>
+          </a:xfrm>
+          <a:prstGeom prst="straightConnector1">
+            <a:avLst/>
+          </a:prstGeom>
+          <a:ln>
+            <a:solidFill>
+              <a:schemeClr val="accent2"/>
+            </a:solidFill>
+            <a:tailEnd type="triangle"/>
+          </a:ln>
+        </p:spPr>
+        <p:style>
+          <a:lnRef idx="2">
+            <a:schemeClr val="accent1"/>
+          </a:lnRef>
+          <a:fillRef idx="0">
+            <a:schemeClr val="accent1"/>
+          </a:fillRef>
+          <a:effectRef idx="1">
+            <a:schemeClr val="accent1"/>
+          </a:effectRef>
+          <a:fontRef idx="minor">
+            <a:schemeClr val="tx1"/>
+          </a:fontRef>
+        </p:style>
+      </p:cxnSp>
+      <p:sp>
+        <p:nvSpPr>
+          <p:cNvPr id="16" name="Title 1">
+            <a:extLst>
+              <a:ext uri="{FF2B5EF4-FFF2-40B4-BE49-F238E27FC236}">
+                <a16:creationId xmlns:a16="http://schemas.microsoft.com/office/drawing/2014/main" id="{AF1795B7-99C0-E688-06DC-97F5246AA2DB}"/>
+              </a:ext>
+            </a:extLst>
+          </p:cNvPr>
+          <p:cNvSpPr>
+            <a:spLocks noGrp="1"/>
+          </p:cNvSpPr>
+          <p:nvPr>
+            <p:ph type="title"/>
+          </p:nvPr>
+        </p:nvSpPr>
+        <p:spPr>
+          <a:xfrm>
+            <a:off x="838200" y="365126"/>
+            <a:ext cx="10515600" cy="496874"/>
+          </a:xfrm>
+        </p:spPr>
+        <p:txBody>
+          <a:bodyPr>
+            <a:normAutofit fontScale="90000"/>
+          </a:bodyPr>
+          <a:lstStyle/>
+          <a:p>
+            <a:r>
+              <a:rPr lang="en-US" dirty="0"/>
+              <a:t>API </a:t>
+            </a:r>
+            <a:r>
+              <a:rPr lang="en-US" dirty="0" err="1"/>
+              <a:t>Zontal</a:t>
+            </a:r>
+            <a:r>
+              <a:rPr lang="en-US" dirty="0"/>
+              <a:t> – Download – Identifier &amp; Title Lookup</a:t>
+            </a:r>
+          </a:p>
+        </p:txBody>
+      </p:sp>
+    </p:spTree>
+    <p:extLst>
+      <p:ext uri="{BB962C8B-B14F-4D97-AF65-F5344CB8AC3E}">
+        <p14:creationId xmlns:p14="http://schemas.microsoft.com/office/powerpoint/2010/main" val="4277093084"/>
+      </p:ext>
+    </p:extLst>
+  </p:cSld>
+  <p:clrMapOvr>
+    <a:masterClrMapping/>
+  </p:clrMapOvr>
+</p:sld>
+</file>
+
+<file path=ppt/slides/slide7.xml><?xml version="1.0" encoding="utf-8"?>
+<p:sld xmlns:a="http://schemas.openxmlformats.org/drawingml/2006/main" xmlns:r="http://schemas.openxmlformats.org/officeDocument/2006/relationships" xmlns:p="http://schemas.openxmlformats.org/presentationml/2006/main">
+  <p:cSld>
+    <p:spTree>
+      <p:nvGrpSpPr>
+        <p:cNvPr id="1" name=""/>
+        <p:cNvGrpSpPr/>
+        <p:nvPr/>
+      </p:nvGrpSpPr>
+      <p:grpSpPr>
+        <a:xfrm>
+          <a:off x="0" y="0"/>
+          <a:ext cx="0" cy="0"/>
+          <a:chOff x="0" y="0"/>
+          <a:chExt cx="0" cy="0"/>
+        </a:xfrm>
+      </p:grpSpPr>
+      <p:pic>
+        <p:nvPicPr>
+          <p:cNvPr id="5" name="Content Placeholder 4">
+            <a:extLst>
+              <a:ext uri="{FF2B5EF4-FFF2-40B4-BE49-F238E27FC236}">
+                <a16:creationId xmlns:a16="http://schemas.microsoft.com/office/drawing/2014/main" id="{7CBC3B2B-58C6-EE23-7088-3832B30DB6A4}"/>
+              </a:ext>
+            </a:extLst>
+          </p:cNvPr>
+          <p:cNvPicPr>
+            <a:picLocks noGrp="1" noChangeAspect="1"/>
+          </p:cNvPicPr>
+          <p:nvPr>
+            <p:ph idx="1"/>
+          </p:nvPr>
+        </p:nvPicPr>
+        <p:blipFill>
+          <a:blip r:embed="rId2"/>
+          <a:stretch>
+            <a:fillRect/>
+          </a:stretch>
+        </p:blipFill>
+        <p:spPr>
+          <a:xfrm>
+            <a:off x="528090" y="862000"/>
+            <a:ext cx="9593014" cy="3753374"/>
+          </a:xfrm>
+          <a:prstGeom prst="rect">
+            <a:avLst/>
+          </a:prstGeom>
+        </p:spPr>
+      </p:pic>
+      <p:sp>
+        <p:nvSpPr>
+          <p:cNvPr id="6" name="Arrow: Right 5">
+            <a:extLst>
+              <a:ext uri="{FF2B5EF4-FFF2-40B4-BE49-F238E27FC236}">
+                <a16:creationId xmlns:a16="http://schemas.microsoft.com/office/drawing/2014/main" id="{7BC04992-3B8C-3D6D-A56D-41E5F618F3E7}"/>
+              </a:ext>
+            </a:extLst>
+          </p:cNvPr>
+          <p:cNvSpPr/>
+          <p:nvPr/>
+        </p:nvSpPr>
+        <p:spPr>
+          <a:xfrm>
+            <a:off x="10204315" y="2898843"/>
+            <a:ext cx="978408" cy="484632"/>
+          </a:xfrm>
+          <a:prstGeom prst="rightArrow">
+            <a:avLst/>
+          </a:prstGeom>
+          <a:solidFill>
+            <a:srgbClr val="E97132">
+              <a:alpha val="25098"/>
+            </a:srgbClr>
+          </a:solidFill>
+          <a:ln>
+            <a:solidFill>
+              <a:schemeClr val="accent2"/>
+            </a:solidFill>
+          </a:ln>
+        </p:spPr>
+        <p:style>
+          <a:lnRef idx="2">
+            <a:schemeClr val="accent1">
+              <a:shade val="15000"/>
+            </a:schemeClr>
+          </a:lnRef>
+          <a:fillRef idx="1">
+            <a:schemeClr val="accent1"/>
+          </a:fillRef>
+          <a:effectRef idx="0">
+            <a:schemeClr val="accent1"/>
+          </a:effectRef>
+          <a:fontRef idx="minor">
+            <a:schemeClr val="lt1"/>
+          </a:fontRef>
+        </p:style>
+        <p:txBody>
+          <a:bodyPr rtlCol="0" anchor="ctr"/>
+          <a:lstStyle/>
+          <a:p>
+            <a:pPr algn="ctr"/>
+            <a:r>
+              <a:rPr lang="en-US" dirty="0">
+                <a:solidFill>
+                  <a:srgbClr val="E97132"/>
+                </a:solidFill>
+              </a:rPr>
+              <a:t>UNZIP</a:t>
+            </a:r>
+          </a:p>
+        </p:txBody>
+      </p:sp>
+      <p:sp>
+        <p:nvSpPr>
+          <p:cNvPr id="7" name="Title 1">
+            <a:extLst>
+              <a:ext uri="{FF2B5EF4-FFF2-40B4-BE49-F238E27FC236}">
+                <a16:creationId xmlns:a16="http://schemas.microsoft.com/office/drawing/2014/main" id="{D3CF684B-3FD1-F213-C18A-E38BA9FB8846}"/>
+              </a:ext>
+            </a:extLst>
+          </p:cNvPr>
+          <p:cNvSpPr>
+            <a:spLocks noGrp="1"/>
+          </p:cNvSpPr>
+          <p:nvPr>
+            <p:ph type="title"/>
+          </p:nvPr>
+        </p:nvSpPr>
+        <p:spPr>
+          <a:xfrm>
+            <a:off x="838200" y="365126"/>
+            <a:ext cx="10515600" cy="496874"/>
+          </a:xfrm>
+        </p:spPr>
+        <p:txBody>
+          <a:bodyPr>
+            <a:normAutofit fontScale="90000"/>
+          </a:bodyPr>
+          <a:lstStyle/>
+          <a:p>
+            <a:r>
+              <a:rPr lang="en-US" dirty="0"/>
+              <a:t>API </a:t>
+            </a:r>
+            <a:r>
+              <a:rPr lang="en-US" dirty="0" err="1"/>
+              <a:t>Zontal</a:t>
+            </a:r>
+            <a:r>
+              <a:rPr lang="en-US" dirty="0"/>
+              <a:t> – Download &amp; Unzip</a:t>
+            </a:r>
+          </a:p>
+        </p:txBody>
+      </p:sp>
+    </p:spTree>
+    <p:extLst>
+      <p:ext uri="{BB962C8B-B14F-4D97-AF65-F5344CB8AC3E}">
+        <p14:creationId xmlns:p14="http://schemas.microsoft.com/office/powerpoint/2010/main" val="3313264605"/>
+      </p:ext>
+    </p:extLst>
+  </p:cSld>
+  <p:clrMapOvr>
+    <a:masterClrMapping/>
+  </p:clrMapOvr>
+</p:sld>
+</file>
+
+<file path=ppt/slides/slide8.xml><?xml version="1.0" encoding="utf-8"?>
+<p:sld xmlns:a="http://schemas.openxmlformats.org/drawingml/2006/main" xmlns:r="http://schemas.openxmlformats.org/officeDocument/2006/relationships" xmlns:p="http://schemas.openxmlformats.org/presentationml/2006/main">
+  <p:cSld>
+    <p:spTree>
+      <p:nvGrpSpPr>
+        <p:cNvPr id="1" name=""/>
+        <p:cNvGrpSpPr/>
+        <p:nvPr/>
+      </p:nvGrpSpPr>
+      <p:grpSpPr>
+        <a:xfrm>
+          <a:off x="0" y="0"/>
+          <a:ext cx="0" cy="0"/>
+          <a:chOff x="0" y="0"/>
+          <a:chExt cx="0" cy="0"/>
+        </a:xfrm>
+      </p:grpSpPr>
+      <p:sp>
+        <p:nvSpPr>
+          <p:cNvPr id="10" name="Content Placeholder 9">
+            <a:extLst>
+              <a:ext uri="{FF2B5EF4-FFF2-40B4-BE49-F238E27FC236}">
+                <a16:creationId xmlns:a16="http://schemas.microsoft.com/office/drawing/2014/main" id="{1FE2BB29-D8FE-3929-834F-36FEB1C5A9B3}"/>
+              </a:ext>
+            </a:extLst>
+          </p:cNvPr>
+          <p:cNvSpPr>
+            <a:spLocks noGrp="1"/>
+          </p:cNvSpPr>
+          <p:nvPr>
+            <p:ph idx="1"/>
+          </p:nvPr>
+        </p:nvSpPr>
+        <p:spPr/>
+        <p:txBody>
+          <a:bodyPr/>
+          <a:lstStyle/>
+          <a:p>
+            <a:r>
+              <a:rPr lang="en-US" dirty="0"/>
+              <a:t>Get $</a:t>
+            </a:r>
+            <a:r>
+              <a:rPr lang="en-US" dirty="0" err="1"/>
+              <a:t>asm.manifest</a:t>
+            </a:r>
+            <a:endParaRPr lang="en-US" dirty="0"/>
+          </a:p>
+          <a:p>
+            <a:endParaRPr lang="en-US" dirty="0"/>
+          </a:p>
+          <a:p>
+            <a:endParaRPr lang="en-US" dirty="0"/>
+          </a:p>
+          <a:p>
+            <a:r>
+              <a:rPr lang="en-US" dirty="0"/>
+              <a:t>Get </a:t>
+            </a:r>
+            <a:r>
+              <a:rPr lang="en-US" dirty="0" err="1"/>
+              <a:t>json</a:t>
+            </a:r>
+            <a:r>
+              <a:rPr lang="en-US" dirty="0"/>
+              <a:t>-schemas[0]</a:t>
+            </a:r>
+            <a:br>
+              <a:rPr lang="en-US" dirty="0"/>
+            </a:br>
+            <a:endParaRPr lang="en-US" dirty="0"/>
+          </a:p>
+        </p:txBody>
+      </p:sp>
+      <p:sp>
+        <p:nvSpPr>
+          <p:cNvPr id="7" name="Title 1">
+            <a:extLst>
+              <a:ext uri="{FF2B5EF4-FFF2-40B4-BE49-F238E27FC236}">
+                <a16:creationId xmlns:a16="http://schemas.microsoft.com/office/drawing/2014/main" id="{D3CF684B-3FD1-F213-C18A-E38BA9FB8846}"/>
+              </a:ext>
+            </a:extLst>
+          </p:cNvPr>
+          <p:cNvSpPr>
+            <a:spLocks noGrp="1"/>
+          </p:cNvSpPr>
+          <p:nvPr>
+            <p:ph type="title"/>
+          </p:nvPr>
+        </p:nvSpPr>
+        <p:spPr/>
+        <p:txBody>
+          <a:bodyPr>
+            <a:normAutofit/>
+          </a:bodyPr>
+          <a:lstStyle/>
+          <a:p>
+            <a:r>
+              <a:rPr lang="en-US" dirty="0"/>
+              <a:t>Processing Measurement File</a:t>
+            </a:r>
+          </a:p>
+        </p:txBody>
+      </p:sp>
+      <p:graphicFrame>
+        <p:nvGraphicFramePr>
+          <p:cNvPr id="4" name="Object 3">
+            <a:extLst>
+              <a:ext uri="{FF2B5EF4-FFF2-40B4-BE49-F238E27FC236}">
+                <a16:creationId xmlns:a16="http://schemas.microsoft.com/office/drawing/2014/main" id="{E88511B3-0DC6-6EA6-E388-1FFFA776FAAF}"/>
+              </a:ext>
+            </a:extLst>
+          </p:cNvPr>
+          <p:cNvGraphicFramePr>
+            <a:graphicFrameLocks noChangeAspect="1"/>
+          </p:cNvGraphicFramePr>
+          <p:nvPr/>
+        </p:nvGraphicFramePr>
+        <p:xfrm>
+          <a:off x="8772525" y="770731"/>
+          <a:ext cx="3095625" cy="514350"/>
+        </p:xfrm>
+        <a:graphic>
+          <a:graphicData uri="http://schemas.openxmlformats.org/presentationml/2006/ole">
+            <mc:AlternateContent xmlns:mc="http://schemas.openxmlformats.org/markup-compatibility/2006">
+              <mc:Choice xmlns:v="urn:schemas-microsoft-com:vml" Requires="v">
+                <p:oleObj name="Packager Shell Object" showAsIcon="1" r:id="rId2" imgW="3095593" imgH="514350" progId="Package">
+                  <p:embed/>
+                </p:oleObj>
+              </mc:Choice>
+              <mc:Fallback>
+                <p:oleObj name="Packager Shell Object" showAsIcon="1" r:id="rId2" imgW="3095593" imgH="514350" progId="Package">
+                  <p:embed/>
+                  <p:pic>
+                    <p:nvPicPr>
+                      <p:cNvPr id="4" name="Object 3">
+                        <a:extLst>
+                          <a:ext uri="{FF2B5EF4-FFF2-40B4-BE49-F238E27FC236}">
+                            <a16:creationId xmlns:a16="http://schemas.microsoft.com/office/drawing/2014/main" id="{E88511B3-0DC6-6EA6-E388-1FFFA776FAAF}"/>
+                          </a:ext>
+                        </a:extLst>
+                      </p:cNvPr>
+                      <p:cNvPicPr/>
+                      <p:nvPr/>
+                    </p:nvPicPr>
+                    <p:blipFill>
+                      <a:blip r:embed="rId3"/>
+                      <a:stretch>
+                        <a:fillRect/>
+                      </a:stretch>
+                    </p:blipFill>
+                    <p:spPr>
+                      <a:xfrm>
+                        <a:off x="8772525" y="770731"/>
+                        <a:ext cx="3095625" cy="514350"/>
+                      </a:xfrm>
+                      <a:prstGeom prst="rect">
+                        <a:avLst/>
+                      </a:prstGeom>
+                    </p:spPr>
+                  </p:pic>
+                </p:oleObj>
+              </mc:Fallback>
+            </mc:AlternateContent>
+          </a:graphicData>
+        </a:graphic>
+      </p:graphicFrame>
+      <p:pic>
+        <p:nvPicPr>
+          <p:cNvPr id="9" name="Picture 8">
+            <a:extLst>
+              <a:ext uri="{FF2B5EF4-FFF2-40B4-BE49-F238E27FC236}">
+                <a16:creationId xmlns:a16="http://schemas.microsoft.com/office/drawing/2014/main" id="{FD88A164-42DB-2654-144B-C4B40579D00C}"/>
+              </a:ext>
+            </a:extLst>
+          </p:cNvPr>
+          <p:cNvPicPr>
+            <a:picLocks noChangeAspect="1"/>
+          </p:cNvPicPr>
+          <p:nvPr/>
+        </p:nvPicPr>
+        <p:blipFill>
+          <a:blip r:embed="rId4"/>
+          <a:stretch>
+            <a:fillRect/>
+          </a:stretch>
+        </p:blipFill>
+        <p:spPr>
+          <a:xfrm>
+            <a:off x="1219200" y="2270105"/>
+            <a:ext cx="7278116" cy="628738"/>
+          </a:xfrm>
+          <a:prstGeom prst="rect">
+            <a:avLst/>
+          </a:prstGeom>
+        </p:spPr>
+      </p:pic>
+      <p:graphicFrame>
+        <p:nvGraphicFramePr>
+          <p:cNvPr id="11" name="Object 10">
+            <a:extLst>
+              <a:ext uri="{FF2B5EF4-FFF2-40B4-BE49-F238E27FC236}">
+                <a16:creationId xmlns:a16="http://schemas.microsoft.com/office/drawing/2014/main" id="{CBFEE219-10A7-8AC6-81BF-7B208EF28275}"/>
+              </a:ext>
+            </a:extLst>
+          </p:cNvPr>
+          <p:cNvGraphicFramePr>
+            <a:graphicFrameLocks noChangeAspect="1"/>
+          </p:cNvGraphicFramePr>
+          <p:nvPr/>
+        </p:nvGraphicFramePr>
+        <p:xfrm>
+          <a:off x="9548812" y="2451962"/>
+          <a:ext cx="771525" cy="514350"/>
+        </p:xfrm>
+        <a:graphic>
+          <a:graphicData uri="http://schemas.openxmlformats.org/presentationml/2006/ole">
+            <mc:AlternateContent xmlns:mc="http://schemas.openxmlformats.org/markup-compatibility/2006">
+              <mc:Choice xmlns:v="urn:schemas-microsoft-com:vml" Requires="v">
+                <p:oleObj name="Packager Shell Object" showAsIcon="1" r:id="rId5" imgW="771620" imgH="514350" progId="Package">
+                  <p:embed/>
+                </p:oleObj>
+              </mc:Choice>
+              <mc:Fallback>
+                <p:oleObj name="Packager Shell Object" showAsIcon="1" r:id="rId5" imgW="771620" imgH="514350" progId="Package">
+                  <p:embed/>
+                  <p:pic>
+                    <p:nvPicPr>
+                      <p:cNvPr id="11" name="Object 10">
+                        <a:extLst>
+                          <a:ext uri="{FF2B5EF4-FFF2-40B4-BE49-F238E27FC236}">
+                            <a16:creationId xmlns:a16="http://schemas.microsoft.com/office/drawing/2014/main" id="{CBFEE219-10A7-8AC6-81BF-7B208EF28275}"/>
+                          </a:ext>
+                        </a:extLst>
+                      </p:cNvPr>
+                      <p:cNvPicPr/>
+                      <p:nvPr/>
+                    </p:nvPicPr>
+                    <p:blipFill>
+                      <a:blip r:embed="rId6"/>
+                      <a:stretch>
+                        <a:fillRect/>
+                      </a:stretch>
+                    </p:blipFill>
+                    <p:spPr>
+                      <a:xfrm>
+                        <a:off x="9548812" y="2451962"/>
+                        <a:ext cx="771525" cy="514350"/>
+                      </a:xfrm>
+                      <a:prstGeom prst="rect">
+                        <a:avLst/>
+                      </a:prstGeom>
+                    </p:spPr>
+                  </p:pic>
+                </p:oleObj>
+              </mc:Fallback>
+            </mc:AlternateContent>
+          </a:graphicData>
+        </a:graphic>
+      </p:graphicFrame>
+      <p:pic>
+        <p:nvPicPr>
+          <p:cNvPr id="13" name="Picture 12">
+            <a:extLst>
+              <a:ext uri="{FF2B5EF4-FFF2-40B4-BE49-F238E27FC236}">
+                <a16:creationId xmlns:a16="http://schemas.microsoft.com/office/drawing/2014/main" id="{22117EC4-AD89-C647-F393-F32211261E11}"/>
+              </a:ext>
+            </a:extLst>
+          </p:cNvPr>
+          <p:cNvPicPr>
+            <a:picLocks noChangeAspect="1"/>
+          </p:cNvPicPr>
+          <p:nvPr/>
+        </p:nvPicPr>
+        <p:blipFill>
+          <a:blip r:embed="rId7"/>
+          <a:stretch>
+            <a:fillRect/>
+          </a:stretch>
+        </p:blipFill>
+        <p:spPr>
+          <a:xfrm>
+            <a:off x="1219200" y="3768370"/>
+            <a:ext cx="6315956" cy="2543530"/>
+          </a:xfrm>
+          <a:prstGeom prst="rect">
+            <a:avLst/>
+          </a:prstGeom>
+        </p:spPr>
+      </p:pic>
+      <p:sp>
+        <p:nvSpPr>
+          <p:cNvPr id="15" name="Rectangle: Rounded Corners 14">
+            <a:extLst>
+              <a:ext uri="{FF2B5EF4-FFF2-40B4-BE49-F238E27FC236}">
+                <a16:creationId xmlns:a16="http://schemas.microsoft.com/office/drawing/2014/main" id="{54E2571D-9772-7419-7713-D44A8DE7B142}"/>
+              </a:ext>
+            </a:extLst>
+          </p:cNvPr>
+          <p:cNvSpPr/>
+          <p:nvPr/>
+        </p:nvSpPr>
+        <p:spPr>
+          <a:xfrm>
+            <a:off x="2014803" y="4666636"/>
+            <a:ext cx="5414697" cy="248263"/>
+          </a:xfrm>
+          <a:prstGeom prst="roundRect">
+            <a:avLst/>
+          </a:prstGeom>
+          <a:solidFill>
+            <a:srgbClr val="E97132">
+              <a:alpha val="25098"/>
+            </a:srgbClr>
+          </a:solidFill>
+          <a:ln>
+            <a:solidFill>
+              <a:schemeClr val="accent2"/>
+            </a:solidFill>
+          </a:ln>
+        </p:spPr>
+        <p:style>
+          <a:lnRef idx="2">
+            <a:schemeClr val="accent1">
+              <a:shade val="15000"/>
+            </a:schemeClr>
+          </a:lnRef>
+          <a:fillRef idx="1">
+            <a:schemeClr val="accent1"/>
+          </a:fillRef>
+          <a:effectRef idx="0">
+            <a:schemeClr val="accent1"/>
+          </a:effectRef>
+          <a:fontRef idx="minor">
+            <a:schemeClr val="lt1"/>
+          </a:fontRef>
+        </p:style>
+        <p:txBody>
+          <a:bodyPr rtlCol="0" anchor="ctr"/>
+          <a:lstStyle/>
+          <a:p>
+            <a:pPr algn="ctr"/>
+            <a:endParaRPr lang="en-US"/>
+          </a:p>
+        </p:txBody>
+      </p:sp>
+      <p:cxnSp>
+        <p:nvCxnSpPr>
+          <p:cNvPr id="17" name="Straight Arrow Connector 16">
+            <a:extLst>
+              <a:ext uri="{FF2B5EF4-FFF2-40B4-BE49-F238E27FC236}">
+                <a16:creationId xmlns:a16="http://schemas.microsoft.com/office/drawing/2014/main" id="{CED82270-D5C5-F6D3-25BF-D64E3FA588E9}"/>
+              </a:ext>
+            </a:extLst>
+          </p:cNvPr>
+          <p:cNvCxnSpPr>
+            <a:cxnSpLocks/>
+            <a:endCxn id="11" idx="1"/>
+          </p:cNvCxnSpPr>
+          <p:nvPr/>
+        </p:nvCxnSpPr>
+        <p:spPr>
+          <a:xfrm>
+            <a:off x="8497316" y="2709137"/>
+            <a:ext cx="1051496" cy="0"/>
+          </a:xfrm>
+          <a:prstGeom prst="straightConnector1">
+            <a:avLst/>
+          </a:prstGeom>
+          <a:ln>
+            <a:solidFill>
+              <a:schemeClr val="accent2"/>
+            </a:solidFill>
+            <a:tailEnd type="triangle"/>
+          </a:ln>
+        </p:spPr>
+        <p:style>
+          <a:lnRef idx="2">
+            <a:schemeClr val="accent1"/>
+          </a:lnRef>
+          <a:fillRef idx="0">
+            <a:schemeClr val="accent1"/>
+          </a:fillRef>
+          <a:effectRef idx="1">
+            <a:schemeClr val="accent1"/>
+          </a:effectRef>
+          <a:fontRef idx="minor">
+            <a:schemeClr val="tx1"/>
+          </a:fontRef>
+        </p:style>
+      </p:cxnSp>
+      <p:graphicFrame>
+        <p:nvGraphicFramePr>
+          <p:cNvPr id="19" name="Object 18">
+            <a:extLst>
+              <a:ext uri="{FF2B5EF4-FFF2-40B4-BE49-F238E27FC236}">
+                <a16:creationId xmlns:a16="http://schemas.microsoft.com/office/drawing/2014/main" id="{1614A2EB-3796-A29C-AF25-6226FEE94C7B}"/>
+              </a:ext>
+            </a:extLst>
+          </p:cNvPr>
+          <p:cNvGraphicFramePr>
+            <a:graphicFrameLocks noChangeAspect="1"/>
+          </p:cNvGraphicFramePr>
+          <p:nvPr/>
+        </p:nvGraphicFramePr>
+        <p:xfrm>
+          <a:off x="9577386" y="4525785"/>
+          <a:ext cx="714375" cy="514350"/>
+        </p:xfrm>
+        <a:graphic>
+          <a:graphicData uri="http://schemas.openxmlformats.org/presentationml/2006/ole">
+            <mc:AlternateContent xmlns:mc="http://schemas.openxmlformats.org/markup-compatibility/2006">
+              <mc:Choice xmlns:v="urn:schemas-microsoft-com:vml" Requires="v">
+                <p:oleObj name="Packager Shell Object" showAsIcon="1" r:id="rId8" imgW="714508" imgH="514350" progId="Package">
+                  <p:embed/>
+                </p:oleObj>
+              </mc:Choice>
+              <mc:Fallback>
+                <p:oleObj name="Packager Shell Object" showAsIcon="1" r:id="rId8" imgW="714508" imgH="514350" progId="Package">
+                  <p:embed/>
+                  <p:pic>
+                    <p:nvPicPr>
+                      <p:cNvPr id="19" name="Object 18">
+                        <a:extLst>
+                          <a:ext uri="{FF2B5EF4-FFF2-40B4-BE49-F238E27FC236}">
+                            <a16:creationId xmlns:a16="http://schemas.microsoft.com/office/drawing/2014/main" id="{1614A2EB-3796-A29C-AF25-6226FEE94C7B}"/>
+                          </a:ext>
+                        </a:extLst>
+                      </p:cNvPr>
+                      <p:cNvPicPr/>
+                      <p:nvPr/>
+                    </p:nvPicPr>
+                    <p:blipFill>
+                      <a:blip r:embed="rId9"/>
+                      <a:stretch>
+                        <a:fillRect/>
+                      </a:stretch>
+                    </p:blipFill>
+                    <p:spPr>
+                      <a:xfrm>
+                        <a:off x="9577386" y="4525785"/>
+                        <a:ext cx="714375" cy="514350"/>
+                      </a:xfrm>
+                      <a:prstGeom prst="rect">
+                        <a:avLst/>
+                      </a:prstGeom>
+                    </p:spPr>
+                  </p:pic>
+                </p:oleObj>
+              </mc:Fallback>
+            </mc:AlternateContent>
+          </a:graphicData>
+        </a:graphic>
+      </p:graphicFrame>
+      <p:cxnSp>
+        <p:nvCxnSpPr>
+          <p:cNvPr id="20" name="Straight Arrow Connector 19">
+            <a:extLst>
+              <a:ext uri="{FF2B5EF4-FFF2-40B4-BE49-F238E27FC236}">
+                <a16:creationId xmlns:a16="http://schemas.microsoft.com/office/drawing/2014/main" id="{5096D1CA-87F5-AE88-36FF-76E7078024F3}"/>
+              </a:ext>
+            </a:extLst>
+          </p:cNvPr>
+          <p:cNvCxnSpPr>
+            <a:cxnSpLocks/>
+            <a:stCxn id="15" idx="3"/>
+            <a:endCxn id="19" idx="1"/>
+          </p:cNvCxnSpPr>
+          <p:nvPr/>
+        </p:nvCxnSpPr>
+        <p:spPr>
+          <a:xfrm flipV="1">
+            <a:off x="7429500" y="4782960"/>
+            <a:ext cx="2147886" cy="7808"/>
+          </a:xfrm>
+          <a:prstGeom prst="straightConnector1">
+            <a:avLst/>
+          </a:prstGeom>
+          <a:ln>
+            <a:solidFill>
+              <a:schemeClr val="accent2"/>
+            </a:solidFill>
+            <a:tailEnd type="triangle"/>
+          </a:ln>
+        </p:spPr>
+        <p:style>
+          <a:lnRef idx="2">
+            <a:schemeClr val="accent1"/>
+          </a:lnRef>
+          <a:fillRef idx="0">
+            <a:schemeClr val="accent1"/>
+          </a:fillRef>
+          <a:effectRef idx="1">
+            <a:schemeClr val="accent1"/>
+          </a:effectRef>
+          <a:fontRef idx="minor">
+            <a:schemeClr val="tx1"/>
+          </a:fontRef>
+        </p:style>
+      </p:cxnSp>
+    </p:spTree>
+    <p:extLst>
+      <p:ext uri="{BB962C8B-B14F-4D97-AF65-F5344CB8AC3E}">
+        <p14:creationId xmlns:p14="http://schemas.microsoft.com/office/powerpoint/2010/main" val="973595144"/>
+      </p:ext>
+    </p:extLst>
+  </p:cSld>
+  <p:clrMapOvr>
+    <a:masterClrMapping/>
+  </p:clrMapOvr>
+</p:sld>
+</file>
+
+<file path=ppt/slides/slide9.xml><?xml version="1.0" encoding="utf-8"?>
+<p:sld xmlns:a="http://schemas.openxmlformats.org/drawingml/2006/main" xmlns:r="http://schemas.openxmlformats.org/officeDocument/2006/relationships" xmlns:p="http://schemas.openxmlformats.org/presentationml/2006/main">
+  <p:cSld>
+    <p:spTree>
+      <p:nvGrpSpPr>
+        <p:cNvPr id="1" name=""/>
+        <p:cNvGrpSpPr/>
+        <p:nvPr/>
+      </p:nvGrpSpPr>
+      <p:grpSpPr>
+        <a:xfrm>
+          <a:off x="0" y="0"/>
+          <a:ext cx="0" cy="0"/>
+          <a:chOff x="0" y="0"/>
+          <a:chExt cx="0" cy="0"/>
+        </a:xfrm>
+      </p:grpSpPr>
+      <p:sp>
+        <p:nvSpPr>
+          <p:cNvPr id="10" name="Content Placeholder 9">
+            <a:extLst>
+              <a:ext uri="{FF2B5EF4-FFF2-40B4-BE49-F238E27FC236}">
+                <a16:creationId xmlns:a16="http://schemas.microsoft.com/office/drawing/2014/main" id="{1FE2BB29-D8FE-3929-834F-36FEB1C5A9B3}"/>
+              </a:ext>
+            </a:extLst>
+          </p:cNvPr>
+          <p:cNvSpPr>
+            <a:spLocks noGrp="1"/>
+          </p:cNvSpPr>
+          <p:nvPr>
+            <p:ph idx="1"/>
+          </p:nvPr>
+        </p:nvSpPr>
+        <p:spPr/>
+        <p:txBody>
+          <a:bodyPr/>
+          <a:lstStyle/>
+          <a:p>
+            <a:r>
+              <a:rPr lang="en-US" dirty="0"/>
+              <a:t>Schema</a:t>
+            </a:r>
+          </a:p>
+          <a:p>
+            <a:endParaRPr lang="en-US" dirty="0"/>
+          </a:p>
+          <a:p>
+            <a:endParaRPr lang="en-US" dirty="0"/>
+          </a:p>
+        </p:txBody>
+      </p:sp>
+      <p:sp>
+        <p:nvSpPr>
+          <p:cNvPr id="7" name="Title 1">
+            <a:extLst>
+              <a:ext uri="{FF2B5EF4-FFF2-40B4-BE49-F238E27FC236}">
+                <a16:creationId xmlns:a16="http://schemas.microsoft.com/office/drawing/2014/main" id="{D3CF684B-3FD1-F213-C18A-E38BA9FB8846}"/>
+              </a:ext>
+            </a:extLst>
+          </p:cNvPr>
+          <p:cNvSpPr>
+            <a:spLocks noGrp="1"/>
+          </p:cNvSpPr>
+          <p:nvPr>
+            <p:ph type="title"/>
+          </p:nvPr>
+        </p:nvSpPr>
+        <p:spPr/>
+        <p:txBody>
+          <a:bodyPr>
+            <a:normAutofit/>
+          </a:bodyPr>
+          <a:lstStyle/>
+          <a:p>
+            <a:r>
+              <a:rPr lang="en-US" dirty="0"/>
+              <a:t>Processing Measurement File</a:t>
+            </a:r>
+            <a:r>
+              <a:rPr lang="en-US" sz="3200" dirty="0"/>
+              <a:t> (</a:t>
+            </a:r>
+            <a:r>
+              <a:rPr lang="en-US" sz="3200" dirty="0" err="1"/>
+              <a:t>C’ted</a:t>
+            </a:r>
+            <a:r>
+              <a:rPr lang="en-US" sz="3200" dirty="0"/>
+              <a:t>)</a:t>
+            </a:r>
+            <a:endParaRPr lang="en-US" dirty="0"/>
+          </a:p>
+        </p:txBody>
+      </p:sp>
+      <p:graphicFrame>
+        <p:nvGraphicFramePr>
+          <p:cNvPr id="4" name="Object 3">
+            <a:extLst>
+              <a:ext uri="{FF2B5EF4-FFF2-40B4-BE49-F238E27FC236}">
+                <a16:creationId xmlns:a16="http://schemas.microsoft.com/office/drawing/2014/main" id="{E88511B3-0DC6-6EA6-E388-1FFFA776FAAF}"/>
+              </a:ext>
+            </a:extLst>
+          </p:cNvPr>
+          <p:cNvGraphicFramePr>
+            <a:graphicFrameLocks noChangeAspect="1"/>
+          </p:cNvGraphicFramePr>
+          <p:nvPr>
+            <p:extLst>
+              <p:ext uri="{D42A27DB-BD31-4B8C-83A1-F6EECF244321}">
+                <p14:modId xmlns:p14="http://schemas.microsoft.com/office/powerpoint/2010/main" val="518123774"/>
+              </p:ext>
+            </p:extLst>
+          </p:nvPr>
+        </p:nvGraphicFramePr>
+        <p:xfrm>
+          <a:off x="8772525" y="770731"/>
+          <a:ext cx="3095625" cy="514350"/>
+        </p:xfrm>
+        <a:graphic>
+          <a:graphicData uri="http://schemas.openxmlformats.org/presentationml/2006/ole">
+            <mc:AlternateContent xmlns:mc="http://schemas.openxmlformats.org/markup-compatibility/2006">
+              <mc:Choice xmlns:v="urn:schemas-microsoft-com:vml" Requires="v">
+                <p:oleObj name="Packager Shell Object" showAsIcon="1" r:id="rId2" imgW="3095593" imgH="514350" progId="Package">
+                  <p:embed/>
+                </p:oleObj>
+              </mc:Choice>
+              <mc:Fallback>
+                <p:oleObj name="Packager Shell Object" showAsIcon="1" r:id="rId2" imgW="3095593" imgH="514350" progId="Package">
+                  <p:embed/>
+                  <p:pic>
+                    <p:nvPicPr>
+                      <p:cNvPr id="0" name=""/>
+                      <p:cNvPicPr/>
+                      <p:nvPr/>
+                    </p:nvPicPr>
+                    <p:blipFill>
+                      <a:blip r:embed="rId3"/>
+                      <a:stretch>
+                        <a:fillRect/>
+                      </a:stretch>
+                    </p:blipFill>
+                    <p:spPr>
+                      <a:xfrm>
+                        <a:off x="8772525" y="770731"/>
+                        <a:ext cx="3095625" cy="514350"/>
+                      </a:xfrm>
+                      <a:prstGeom prst="rect">
+                        <a:avLst/>
+                      </a:prstGeom>
+                    </p:spPr>
+                  </p:pic>
+                </p:oleObj>
+              </mc:Fallback>
+            </mc:AlternateContent>
+          </a:graphicData>
+        </a:graphic>
+      </p:graphicFrame>
+      <p:pic>
+        <p:nvPicPr>
+          <p:cNvPr id="24" name="Picture 23">
+            <a:extLst>
+              <a:ext uri="{FF2B5EF4-FFF2-40B4-BE49-F238E27FC236}">
+                <a16:creationId xmlns:a16="http://schemas.microsoft.com/office/drawing/2014/main" id="{87C6DC10-5A14-BA40-ADCD-3EC2F56F241E}"/>
+              </a:ext>
+            </a:extLst>
+          </p:cNvPr>
+          <p:cNvPicPr>
+            <a:picLocks noChangeAspect="1"/>
+          </p:cNvPicPr>
+          <p:nvPr/>
+        </p:nvPicPr>
+        <p:blipFill>
+          <a:blip r:embed="rId4"/>
+          <a:stretch>
+            <a:fillRect/>
+          </a:stretch>
+        </p:blipFill>
+        <p:spPr>
+          <a:xfrm>
+            <a:off x="1237319" y="2261966"/>
+            <a:ext cx="6668431" cy="3172268"/>
+          </a:xfrm>
+          <a:prstGeom prst="rect">
+            <a:avLst/>
+          </a:prstGeom>
+        </p:spPr>
+      </p:pic>
+      <p:sp>
+        <p:nvSpPr>
+          <p:cNvPr id="15" name="Rectangle: Rounded Corners 14">
+            <a:extLst>
+              <a:ext uri="{FF2B5EF4-FFF2-40B4-BE49-F238E27FC236}">
+                <a16:creationId xmlns:a16="http://schemas.microsoft.com/office/drawing/2014/main" id="{54E2571D-9772-7419-7713-D44A8DE7B142}"/>
+              </a:ext>
+            </a:extLst>
+          </p:cNvPr>
+          <p:cNvSpPr/>
+          <p:nvPr/>
+        </p:nvSpPr>
+        <p:spPr>
+          <a:xfrm>
+            <a:off x="1986229" y="3133392"/>
+            <a:ext cx="2928671" cy="248263"/>
+          </a:xfrm>
+          <a:prstGeom prst="roundRect">
+            <a:avLst/>
+          </a:prstGeom>
+          <a:solidFill>
+            <a:srgbClr val="E97132">
+              <a:alpha val="25098"/>
+            </a:srgbClr>
+          </a:solidFill>
+          <a:ln>
+            <a:solidFill>
+              <a:schemeClr val="accent2"/>
+            </a:solidFill>
+          </a:ln>
+        </p:spPr>
+        <p:style>
+          <a:lnRef idx="2">
+            <a:schemeClr val="accent1">
+              <a:shade val="15000"/>
+            </a:schemeClr>
+          </a:lnRef>
+          <a:fillRef idx="1">
+            <a:schemeClr val="accent1"/>
+          </a:fillRef>
+          <a:effectRef idx="0">
+            <a:schemeClr val="accent1"/>
+          </a:effectRef>
+          <a:fontRef idx="minor">
+            <a:schemeClr val="lt1"/>
+          </a:fontRef>
+        </p:style>
+        <p:txBody>
+          <a:bodyPr rtlCol="0" anchor="ctr"/>
+          <a:lstStyle/>
+          <a:p>
+            <a:pPr algn="ctr"/>
+            <a:endParaRPr lang="en-US"/>
+          </a:p>
+        </p:txBody>
+      </p:sp>
+      <p:sp>
+        <p:nvSpPr>
+          <p:cNvPr id="26" name="Rectangle: Rounded Corners 25">
+            <a:extLst>
+              <a:ext uri="{FF2B5EF4-FFF2-40B4-BE49-F238E27FC236}">
+                <a16:creationId xmlns:a16="http://schemas.microsoft.com/office/drawing/2014/main" id="{A1689958-9797-91DF-EBDE-9F8EEDFFEC7F}"/>
+              </a:ext>
+            </a:extLst>
+          </p:cNvPr>
+          <p:cNvSpPr/>
+          <p:nvPr/>
+        </p:nvSpPr>
+        <p:spPr>
+          <a:xfrm>
+            <a:off x="1986229" y="3504757"/>
+            <a:ext cx="2928671" cy="248263"/>
+          </a:xfrm>
+          <a:prstGeom prst="roundRect">
+            <a:avLst/>
+          </a:prstGeom>
+          <a:solidFill>
+            <a:srgbClr val="E97132">
+              <a:alpha val="25098"/>
+            </a:srgbClr>
+          </a:solidFill>
+          <a:ln>
+            <a:solidFill>
+              <a:schemeClr val="accent2"/>
+            </a:solidFill>
+          </a:ln>
+        </p:spPr>
+        <p:style>
+          <a:lnRef idx="2">
+            <a:schemeClr val="accent1">
+              <a:shade val="15000"/>
+            </a:schemeClr>
+          </a:lnRef>
+          <a:fillRef idx="1">
+            <a:schemeClr val="accent1"/>
+          </a:fillRef>
+          <a:effectRef idx="0">
+            <a:schemeClr val="accent1"/>
+          </a:effectRef>
+          <a:fontRef idx="minor">
+            <a:schemeClr val="lt1"/>
+          </a:fontRef>
+        </p:style>
+        <p:txBody>
+          <a:bodyPr rtlCol="0" anchor="ctr"/>
+          <a:lstStyle/>
+          <a:p>
+            <a:pPr algn="ctr"/>
+            <a:endParaRPr lang="en-US"/>
+          </a:p>
+        </p:txBody>
+      </p:sp>
+      <p:sp>
+        <p:nvSpPr>
+          <p:cNvPr id="27" name="Rectangle: Rounded Corners 26">
+            <a:extLst>
+              <a:ext uri="{FF2B5EF4-FFF2-40B4-BE49-F238E27FC236}">
+                <a16:creationId xmlns:a16="http://schemas.microsoft.com/office/drawing/2014/main" id="{F8A52252-964A-390B-DB33-0B98F0028D4D}"/>
+              </a:ext>
+            </a:extLst>
+          </p:cNvPr>
+          <p:cNvSpPr/>
+          <p:nvPr/>
+        </p:nvSpPr>
+        <p:spPr>
+          <a:xfrm>
+            <a:off x="1986229" y="3876122"/>
+            <a:ext cx="2928671" cy="248263"/>
+          </a:xfrm>
+          <a:prstGeom prst="roundRect">
+            <a:avLst/>
+          </a:prstGeom>
+          <a:solidFill>
+            <a:srgbClr val="E97132">
+              <a:alpha val="25098"/>
+            </a:srgbClr>
+          </a:solidFill>
+          <a:ln>
+            <a:solidFill>
+              <a:schemeClr val="accent2"/>
+            </a:solidFill>
+          </a:ln>
+        </p:spPr>
+        <p:style>
+          <a:lnRef idx="2">
+            <a:schemeClr val="accent1">
+              <a:shade val="15000"/>
+            </a:schemeClr>
+          </a:lnRef>
+          <a:fillRef idx="1">
+            <a:schemeClr val="accent1"/>
+          </a:fillRef>
+          <a:effectRef idx="0">
+            <a:schemeClr val="accent1"/>
+          </a:effectRef>
+          <a:fontRef idx="minor">
+            <a:schemeClr val="lt1"/>
+          </a:fontRef>
+        </p:style>
+        <p:txBody>
+          <a:bodyPr rtlCol="0" anchor="ctr"/>
+          <a:lstStyle/>
+          <a:p>
+            <a:pPr algn="ctr"/>
+            <a:endParaRPr lang="en-US"/>
+          </a:p>
+        </p:txBody>
+      </p:sp>
+      <p:sp>
+        <p:nvSpPr>
+          <p:cNvPr id="28" name="Rectangle: Rounded Corners 27">
+            <a:extLst>
+              <a:ext uri="{FF2B5EF4-FFF2-40B4-BE49-F238E27FC236}">
+                <a16:creationId xmlns:a16="http://schemas.microsoft.com/office/drawing/2014/main" id="{87061A7D-8161-D8AA-55FD-E3E0F7CC8E2A}"/>
+              </a:ext>
+            </a:extLst>
+          </p:cNvPr>
+          <p:cNvSpPr/>
+          <p:nvPr/>
+        </p:nvSpPr>
+        <p:spPr>
+          <a:xfrm>
+            <a:off x="1986228" y="4231332"/>
+            <a:ext cx="2928671" cy="248263"/>
+          </a:xfrm>
+          <a:prstGeom prst="roundRect">
+            <a:avLst/>
+          </a:prstGeom>
+          <a:solidFill>
+            <a:srgbClr val="E97132">
+              <a:alpha val="25098"/>
+            </a:srgbClr>
+          </a:solidFill>
+          <a:ln>
+            <a:solidFill>
+              <a:schemeClr val="accent2"/>
+            </a:solidFill>
+          </a:ln>
+        </p:spPr>
+        <p:style>
+          <a:lnRef idx="2">
+            <a:schemeClr val="accent1">
+              <a:shade val="15000"/>
+            </a:schemeClr>
+          </a:lnRef>
+          <a:fillRef idx="1">
+            <a:schemeClr val="accent1"/>
+          </a:fillRef>
+          <a:effectRef idx="0">
+            <a:schemeClr val="accent1"/>
+          </a:effectRef>
+          <a:fontRef idx="minor">
+            <a:schemeClr val="lt1"/>
+          </a:fontRef>
+        </p:style>
+        <p:txBody>
+          <a:bodyPr rtlCol="0" anchor="ctr"/>
+          <a:lstStyle/>
+          <a:p>
+            <a:pPr algn="ctr"/>
+            <a:endParaRPr lang="en-US"/>
+          </a:p>
+        </p:txBody>
+      </p:sp>
+      <p:sp>
+        <p:nvSpPr>
+          <p:cNvPr id="29" name="Rectangle: Rounded Corners 28">
+            <a:extLst>
+              <a:ext uri="{FF2B5EF4-FFF2-40B4-BE49-F238E27FC236}">
+                <a16:creationId xmlns:a16="http://schemas.microsoft.com/office/drawing/2014/main" id="{308FE6BA-B0DD-B505-7EA9-64893A5189D2}"/>
+              </a:ext>
+            </a:extLst>
+          </p:cNvPr>
+          <p:cNvSpPr/>
+          <p:nvPr/>
+        </p:nvSpPr>
+        <p:spPr>
+          <a:xfrm>
+            <a:off x="1986227" y="4593112"/>
+            <a:ext cx="2928671" cy="248263"/>
+          </a:xfrm>
+          <a:prstGeom prst="roundRect">
+            <a:avLst/>
+          </a:prstGeom>
+          <a:solidFill>
+            <a:srgbClr val="E97132">
+              <a:alpha val="25098"/>
+            </a:srgbClr>
+          </a:solidFill>
+          <a:ln>
+            <a:solidFill>
+              <a:schemeClr val="accent2"/>
+            </a:solidFill>
+          </a:ln>
+        </p:spPr>
+        <p:style>
+          <a:lnRef idx="2">
+            <a:schemeClr val="accent1">
+              <a:shade val="15000"/>
+            </a:schemeClr>
+          </a:lnRef>
+          <a:fillRef idx="1">
+            <a:schemeClr val="accent1"/>
+          </a:fillRef>
+          <a:effectRef idx="0">
+            <a:schemeClr val="accent1"/>
+          </a:effectRef>
+          <a:fontRef idx="minor">
+            <a:schemeClr val="lt1"/>
+          </a:fontRef>
+        </p:style>
+        <p:txBody>
+          <a:bodyPr rtlCol="0" anchor="ctr"/>
+          <a:lstStyle/>
+          <a:p>
+            <a:pPr algn="ctr"/>
+            <a:endParaRPr lang="en-US"/>
+          </a:p>
+        </p:txBody>
+      </p:sp>
+      <p:sp>
+        <p:nvSpPr>
+          <p:cNvPr id="30" name="Rectangle: Rounded Corners 29">
+            <a:extLst>
+              <a:ext uri="{FF2B5EF4-FFF2-40B4-BE49-F238E27FC236}">
+                <a16:creationId xmlns:a16="http://schemas.microsoft.com/office/drawing/2014/main" id="{A9195428-A172-2B3B-F35D-AEE060E2C087}"/>
+              </a:ext>
+            </a:extLst>
+          </p:cNvPr>
+          <p:cNvSpPr/>
+          <p:nvPr/>
+        </p:nvSpPr>
+        <p:spPr>
+          <a:xfrm>
+            <a:off x="1986227" y="4954892"/>
+            <a:ext cx="2928671" cy="248263"/>
+          </a:xfrm>
+          <a:prstGeom prst="roundRect">
+            <a:avLst/>
+          </a:prstGeom>
+          <a:solidFill>
+            <a:srgbClr val="E97132">
+              <a:alpha val="25098"/>
+            </a:srgbClr>
+          </a:solidFill>
+          <a:ln>
+            <a:solidFill>
+              <a:schemeClr val="accent2"/>
+            </a:solidFill>
+          </a:ln>
+        </p:spPr>
+        <p:style>
+          <a:lnRef idx="2">
+            <a:schemeClr val="accent1">
+              <a:shade val="15000"/>
+            </a:schemeClr>
+          </a:lnRef>
+          <a:fillRef idx="1">
+            <a:schemeClr val="accent1"/>
+          </a:fillRef>
+          <a:effectRef idx="0">
+            <a:schemeClr val="accent1"/>
+          </a:effectRef>
+          <a:fontRef idx="minor">
+            <a:schemeClr val="lt1"/>
+          </a:fontRef>
+        </p:style>
+        <p:txBody>
+          <a:bodyPr rtlCol="0" anchor="ctr"/>
+          <a:lstStyle/>
+          <a:p>
+            <a:pPr algn="ctr"/>
+            <a:endParaRPr lang="en-US"/>
+          </a:p>
+        </p:txBody>
+      </p:sp>
+      <p:pic>
+        <p:nvPicPr>
+          <p:cNvPr id="32" name="Picture 31">
+            <a:extLst>
+              <a:ext uri="{FF2B5EF4-FFF2-40B4-BE49-F238E27FC236}">
+                <a16:creationId xmlns:a16="http://schemas.microsoft.com/office/drawing/2014/main" id="{0626AAAE-A646-3123-598D-0E5C25DB989E}"/>
+              </a:ext>
+            </a:extLst>
+          </p:cNvPr>
+          <p:cNvPicPr>
+            <a:picLocks noChangeAspect="1"/>
+          </p:cNvPicPr>
+          <p:nvPr/>
+        </p:nvPicPr>
+        <p:blipFill>
+          <a:blip r:embed="rId5"/>
+          <a:stretch>
+            <a:fillRect/>
+          </a:stretch>
+        </p:blipFill>
+        <p:spPr>
+          <a:xfrm>
+            <a:off x="5456761" y="5016336"/>
+            <a:ext cx="7621064" cy="1076475"/>
+          </a:xfrm>
+          <a:prstGeom prst="rect">
+            <a:avLst/>
+          </a:prstGeom>
+          <a:ln>
+            <a:solidFill>
+              <a:srgbClr val="E97132"/>
+            </a:solidFill>
+          </a:ln>
+        </p:spPr>
+      </p:pic>
+      <p:pic>
+        <p:nvPicPr>
+          <p:cNvPr id="36" name="Picture 35">
+            <a:extLst>
+              <a:ext uri="{FF2B5EF4-FFF2-40B4-BE49-F238E27FC236}">
+                <a16:creationId xmlns:a16="http://schemas.microsoft.com/office/drawing/2014/main" id="{E1C9187B-9788-193D-B2C5-64FED0CA14BB}"/>
+              </a:ext>
+            </a:extLst>
+          </p:cNvPr>
+          <p:cNvPicPr>
+            <a:picLocks noChangeAspect="1"/>
+          </p:cNvPicPr>
+          <p:nvPr/>
+        </p:nvPicPr>
+        <p:blipFill>
+          <a:blip r:embed="rId6"/>
+          <a:stretch>
+            <a:fillRect/>
+          </a:stretch>
+        </p:blipFill>
+        <p:spPr>
+          <a:xfrm>
+            <a:off x="5456761" y="3059882"/>
+            <a:ext cx="6144482" cy="1295581"/>
+          </a:xfrm>
+          <a:prstGeom prst="rect">
+            <a:avLst/>
+          </a:prstGeom>
+          <a:ln>
+            <a:solidFill>
+              <a:srgbClr val="E97132"/>
+            </a:solidFill>
+          </a:ln>
+        </p:spPr>
+      </p:pic>
+    </p:spTree>
+    <p:extLst>
+      <p:ext uri="{BB962C8B-B14F-4D97-AF65-F5344CB8AC3E}">
+        <p14:creationId xmlns:p14="http://schemas.microsoft.com/office/powerpoint/2010/main" val="3629667892"/>
       </p:ext>
     </p:extLst>
   </p:cSld>
@@ -3670,8 +7893,51 @@
     </a:fmtScheme>
   </a:themeElements>
   <a:objectDefaults>
+    <a:spDef>
+      <a:spPr>
+        <a:solidFill>
+          <a:srgbClr val="E97132">
+            <a:alpha val="25098"/>
+          </a:srgbClr>
+        </a:solidFill>
+        <a:ln>
+          <a:solidFill>
+            <a:schemeClr val="accent2"/>
+          </a:solidFill>
+        </a:ln>
+      </a:spPr>
+      <a:bodyPr rtlCol="0" anchor="ctr"/>
+      <a:lstStyle>
+        <a:defPPr algn="ctr">
+          <a:defRPr/>
+        </a:defPPr>
+      </a:lstStyle>
+      <a:style>
+        <a:lnRef idx="2">
+          <a:schemeClr val="accent1">
+            <a:shade val="15000"/>
+          </a:schemeClr>
+        </a:lnRef>
+        <a:fillRef idx="1">
+          <a:schemeClr val="accent1"/>
+        </a:fillRef>
+        <a:effectRef idx="0">
+          <a:schemeClr val="accent1"/>
+        </a:effectRef>
+        <a:fontRef idx="minor">
+          <a:schemeClr val="lt1"/>
+        </a:fontRef>
+      </a:style>
+    </a:spDef>
     <a:lnDef>
-      <a:spPr/>
+      <a:spPr>
+        <a:ln>
+          <a:solidFill>
+            <a:schemeClr val="accent2"/>
+          </a:solidFill>
+          <a:tailEnd type="triangle"/>
+        </a:ln>
+      </a:spPr>
       <a:bodyPr/>
       <a:lstStyle/>
       <a:style>

--- a/Zontal/Zontal-ELN Signals Integration.pptx
+++ b/Zontal/Zontal-ELN Signals Integration.pptx
@@ -17,6 +17,7 @@
     <p:sldId id="270" r:id="rId11"/>
     <p:sldId id="269" r:id="rId12"/>
     <p:sldId id="271" r:id="rId13"/>
+    <p:sldId id="272" r:id="rId14"/>
   </p:sldIdLst>
   <p:sldSz cx="12192000" cy="6858000"/>
   <p:notesSz cx="6858000" cy="9144000"/>
@@ -115,6 +116,11 @@
       </a:defRPr>
     </a:lvl9pPr>
   </p:defaultTextStyle>
+  <p:extLst>
+    <p:ext uri="{EFAFB233-063F-42B5-8137-9DF3F51BA10A}">
+      <p15:sldGuideLst xmlns:p15="http://schemas.microsoft.com/office/powerpoint/2012/main"/>
+    </p:ext>
+  </p:extLst>
 </p:presentation>
 </file>
 
@@ -3784,7 +3790,7 @@
               <a:t>"</a:t>
             </a:r>
             <a:r>
-              <a:rPr lang="en-US" b="1" dirty="0"/>
+              <a:rPr lang="en-US" b="1" u="sng" dirty="0"/>
               <a:t>quantity datum</a:t>
             </a:r>
             <a:r>
@@ -3806,7 +3812,7 @@
               <a:t>"</a:t>
             </a:r>
             <a:r>
-              <a:rPr lang="en-US" b="1" dirty="0"/>
+              <a:rPr lang="en-US" b="1" u="sng" dirty="0"/>
               <a:t>value datum</a:t>
             </a:r>
             <a:r>
@@ -3820,7 +3826,7 @@
               <a:t>"</a:t>
             </a:r>
             <a:r>
-              <a:rPr lang="en-US" dirty="0" err="1"/>
+              <a:rPr lang="en-US" b="1" u="sng" dirty="0" err="1"/>
               <a:t>datacube</a:t>
             </a:r>
             <a:r>
@@ -3987,21 +3993,22 @@
             <p:ph idx="1"/>
           </p:nvPr>
         </p:nvSpPr>
-        <p:spPr/>
-        <p:txBody>
-          <a:bodyPr/>
+        <p:spPr>
+          <a:xfrm>
+            <a:off x="1200733" y="1690688"/>
+            <a:ext cx="4356370" cy="4351338"/>
+          </a:xfrm>
+        </p:spPr>
+        <p:txBody>
+          <a:bodyPr>
+            <a:normAutofit/>
+          </a:bodyPr>
           <a:lstStyle/>
           <a:p>
             <a:r>
               <a:rPr lang="en-US" dirty="0"/>
               <a:t>For each property with pattern “quantity datum” or “value datum”, add an entry to the field catalog:</a:t>
             </a:r>
-          </a:p>
-          <a:p>
-            <a:pPr marL="0" indent="0">
-              <a:buNone/>
-            </a:pPr>
-            <a:endParaRPr lang="en-US" dirty="0"/>
           </a:p>
         </p:txBody>
       </p:sp>
@@ -4027,7 +4034,7 @@
         </p:blipFill>
         <p:spPr>
           <a:xfrm>
-            <a:off x="4781449" y="2728785"/>
+            <a:off x="1517041" y="3347783"/>
             <a:ext cx="1448002" cy="1819529"/>
           </a:xfrm>
           <a:prstGeom prst="rect">
@@ -4035,6 +4042,250 @@
           </a:prstGeom>
         </p:spPr>
       </p:pic>
+      <p:pic>
+        <p:nvPicPr>
+          <p:cNvPr id="5" name="Picture 4">
+            <a:extLst>
+              <a:ext uri="{FF2B5EF4-FFF2-40B4-BE49-F238E27FC236}">
+                <a16:creationId xmlns:a16="http://schemas.microsoft.com/office/drawing/2014/main" id="{80A4B002-9383-BF48-B629-A06D72D9311F}"/>
+              </a:ext>
+            </a:extLst>
+          </p:cNvPr>
+          <p:cNvPicPr>
+            <a:picLocks noChangeAspect="1"/>
+          </p:cNvPicPr>
+          <p:nvPr/>
+        </p:nvPicPr>
+        <p:blipFill>
+          <a:blip r:embed="rId3"/>
+          <a:stretch>
+            <a:fillRect/>
+          </a:stretch>
+        </p:blipFill>
+        <p:spPr>
+          <a:xfrm>
+            <a:off x="7556934" y="2361807"/>
+            <a:ext cx="1590897" cy="3791479"/>
+          </a:xfrm>
+          <a:prstGeom prst="rect">
+            <a:avLst/>
+          </a:prstGeom>
+        </p:spPr>
+      </p:pic>
+      <p:sp>
+        <p:nvSpPr>
+          <p:cNvPr id="6" name="Content Placeholder 2">
+            <a:extLst>
+              <a:ext uri="{FF2B5EF4-FFF2-40B4-BE49-F238E27FC236}">
+                <a16:creationId xmlns:a16="http://schemas.microsoft.com/office/drawing/2014/main" id="{5819729A-E95F-877A-C1CC-252E7299B952}"/>
+              </a:ext>
+            </a:extLst>
+          </p:cNvPr>
+          <p:cNvSpPr txBox="1">
+            <a:spLocks/>
+          </p:cNvSpPr>
+          <p:nvPr/>
+        </p:nvSpPr>
+        <p:spPr>
+          <a:xfrm>
+            <a:off x="7222185" y="624380"/>
+            <a:ext cx="4356370" cy="4351338"/>
+          </a:xfrm>
+          <a:prstGeom prst="rect">
+            <a:avLst/>
+          </a:prstGeom>
+        </p:spPr>
+        <p:txBody>
+          <a:bodyPr vert="horz" lIns="91440" tIns="45720" rIns="91440" bIns="45720" rtlCol="0">
+            <a:normAutofit/>
+          </a:bodyPr>
+          <a:lstStyle>
+            <a:lvl1pPr marL="228600" indent="-228600" algn="l" defTabSz="914400" rtl="0" eaLnBrk="1" latinLnBrk="0" hangingPunct="1">
+              <a:lnSpc>
+                <a:spcPct val="90000"/>
+              </a:lnSpc>
+              <a:spcBef>
+                <a:spcPts val="1000"/>
+              </a:spcBef>
+              <a:buFont typeface="Arial" panose="020B0604020202020204" pitchFamily="34" charset="0"/>
+              <a:buChar char="•"/>
+              <a:defRPr sz="2800" kern="1200">
+                <a:solidFill>
+                  <a:schemeClr val="tx1"/>
+                </a:solidFill>
+                <a:latin typeface="+mn-lt"/>
+                <a:ea typeface="+mn-ea"/>
+                <a:cs typeface="+mn-cs"/>
+              </a:defRPr>
+            </a:lvl1pPr>
+            <a:lvl2pPr marL="685800" indent="-228600" algn="l" defTabSz="914400" rtl="0" eaLnBrk="1" latinLnBrk="0" hangingPunct="1">
+              <a:lnSpc>
+                <a:spcPct val="90000"/>
+              </a:lnSpc>
+              <a:spcBef>
+                <a:spcPts val="500"/>
+              </a:spcBef>
+              <a:buFont typeface="Arial" panose="020B0604020202020204" pitchFamily="34" charset="0"/>
+              <a:buChar char="•"/>
+              <a:defRPr sz="2400" kern="1200">
+                <a:solidFill>
+                  <a:schemeClr val="tx1"/>
+                </a:solidFill>
+                <a:latin typeface="+mn-lt"/>
+                <a:ea typeface="+mn-ea"/>
+                <a:cs typeface="+mn-cs"/>
+              </a:defRPr>
+            </a:lvl2pPr>
+            <a:lvl3pPr marL="1143000" indent="-228600" algn="l" defTabSz="914400" rtl="0" eaLnBrk="1" latinLnBrk="0" hangingPunct="1">
+              <a:lnSpc>
+                <a:spcPct val="90000"/>
+              </a:lnSpc>
+              <a:spcBef>
+                <a:spcPts val="500"/>
+              </a:spcBef>
+              <a:buFont typeface="Arial" panose="020B0604020202020204" pitchFamily="34" charset="0"/>
+              <a:buChar char="•"/>
+              <a:defRPr sz="2000" kern="1200">
+                <a:solidFill>
+                  <a:schemeClr val="tx1"/>
+                </a:solidFill>
+                <a:latin typeface="+mn-lt"/>
+                <a:ea typeface="+mn-ea"/>
+                <a:cs typeface="+mn-cs"/>
+              </a:defRPr>
+            </a:lvl3pPr>
+            <a:lvl4pPr marL="1600200" indent="-228600" algn="l" defTabSz="914400" rtl="0" eaLnBrk="1" latinLnBrk="0" hangingPunct="1">
+              <a:lnSpc>
+                <a:spcPct val="90000"/>
+              </a:lnSpc>
+              <a:spcBef>
+                <a:spcPts val="500"/>
+              </a:spcBef>
+              <a:buFont typeface="Arial" panose="020B0604020202020204" pitchFamily="34" charset="0"/>
+              <a:buChar char="•"/>
+              <a:defRPr sz="1800" kern="1200">
+                <a:solidFill>
+                  <a:schemeClr val="tx1"/>
+                </a:solidFill>
+                <a:latin typeface="+mn-lt"/>
+                <a:ea typeface="+mn-ea"/>
+                <a:cs typeface="+mn-cs"/>
+              </a:defRPr>
+            </a:lvl4pPr>
+            <a:lvl5pPr marL="2057400" indent="-228600" algn="l" defTabSz="914400" rtl="0" eaLnBrk="1" latinLnBrk="0" hangingPunct="1">
+              <a:lnSpc>
+                <a:spcPct val="90000"/>
+              </a:lnSpc>
+              <a:spcBef>
+                <a:spcPts val="500"/>
+              </a:spcBef>
+              <a:buFont typeface="Arial" panose="020B0604020202020204" pitchFamily="34" charset="0"/>
+              <a:buChar char="•"/>
+              <a:defRPr sz="1800" kern="1200">
+                <a:solidFill>
+                  <a:schemeClr val="tx1"/>
+                </a:solidFill>
+                <a:latin typeface="+mn-lt"/>
+                <a:ea typeface="+mn-ea"/>
+                <a:cs typeface="+mn-cs"/>
+              </a:defRPr>
+            </a:lvl5pPr>
+            <a:lvl6pPr marL="2514600" indent="-228600" algn="l" defTabSz="914400" rtl="0" eaLnBrk="1" latinLnBrk="0" hangingPunct="1">
+              <a:lnSpc>
+                <a:spcPct val="90000"/>
+              </a:lnSpc>
+              <a:spcBef>
+                <a:spcPts val="500"/>
+              </a:spcBef>
+              <a:buFont typeface="Arial" panose="020B0604020202020204" pitchFamily="34" charset="0"/>
+              <a:buChar char="•"/>
+              <a:defRPr sz="1800" kern="1200">
+                <a:solidFill>
+                  <a:schemeClr val="tx1"/>
+                </a:solidFill>
+                <a:latin typeface="+mn-lt"/>
+                <a:ea typeface="+mn-ea"/>
+                <a:cs typeface="+mn-cs"/>
+              </a:defRPr>
+            </a:lvl6pPr>
+            <a:lvl7pPr marL="2971800" indent="-228600" algn="l" defTabSz="914400" rtl="0" eaLnBrk="1" latinLnBrk="0" hangingPunct="1">
+              <a:lnSpc>
+                <a:spcPct val="90000"/>
+              </a:lnSpc>
+              <a:spcBef>
+                <a:spcPts val="500"/>
+              </a:spcBef>
+              <a:buFont typeface="Arial" panose="020B0604020202020204" pitchFamily="34" charset="0"/>
+              <a:buChar char="•"/>
+              <a:defRPr sz="1800" kern="1200">
+                <a:solidFill>
+                  <a:schemeClr val="tx1"/>
+                </a:solidFill>
+                <a:latin typeface="+mn-lt"/>
+                <a:ea typeface="+mn-ea"/>
+                <a:cs typeface="+mn-cs"/>
+              </a:defRPr>
+            </a:lvl7pPr>
+            <a:lvl8pPr marL="3429000" indent="-228600" algn="l" defTabSz="914400" rtl="0" eaLnBrk="1" latinLnBrk="0" hangingPunct="1">
+              <a:lnSpc>
+                <a:spcPct val="90000"/>
+              </a:lnSpc>
+              <a:spcBef>
+                <a:spcPts val="500"/>
+              </a:spcBef>
+              <a:buFont typeface="Arial" panose="020B0604020202020204" pitchFamily="34" charset="0"/>
+              <a:buChar char="•"/>
+              <a:defRPr sz="1800" kern="1200">
+                <a:solidFill>
+                  <a:schemeClr val="tx1"/>
+                </a:solidFill>
+                <a:latin typeface="+mn-lt"/>
+                <a:ea typeface="+mn-ea"/>
+                <a:cs typeface="+mn-cs"/>
+              </a:defRPr>
+            </a:lvl8pPr>
+            <a:lvl9pPr marL="3886200" indent="-228600" algn="l" defTabSz="914400" rtl="0" eaLnBrk="1" latinLnBrk="0" hangingPunct="1">
+              <a:lnSpc>
+                <a:spcPct val="90000"/>
+              </a:lnSpc>
+              <a:spcBef>
+                <a:spcPts val="500"/>
+              </a:spcBef>
+              <a:buFont typeface="Arial" panose="020B0604020202020204" pitchFamily="34" charset="0"/>
+              <a:buChar char="•"/>
+              <a:defRPr sz="1800" kern="1200">
+                <a:solidFill>
+                  <a:schemeClr val="tx1"/>
+                </a:solidFill>
+                <a:latin typeface="+mn-lt"/>
+                <a:ea typeface="+mn-ea"/>
+                <a:cs typeface="+mn-cs"/>
+              </a:defRPr>
+            </a:lvl9pPr>
+          </a:lstStyle>
+          <a:p>
+            <a:r>
+              <a:rPr lang="en-US" dirty="0"/>
+              <a:t>For each property with pattern “</a:t>
+            </a:r>
+            <a:r>
+              <a:rPr lang="en-US" dirty="0" err="1"/>
+              <a:t>datacube</a:t>
+            </a:r>
+            <a:r>
+              <a:rPr lang="en-US" dirty="0"/>
+              <a:t>”, add an entry to the field catalog:</a:t>
+            </a:r>
+          </a:p>
+          <a:p>
+            <a:pPr marL="0" indent="0">
+              <a:buFont typeface="Arial" panose="020B0604020202020204" pitchFamily="34" charset="0"/>
+              <a:buNone/>
+            </a:pPr>
+            <a:endParaRPr lang="en-US" dirty="0"/>
+          </a:p>
+        </p:txBody>
+      </p:sp>
     </p:spTree>
     <p:extLst>
       <p:ext uri="{BB962C8B-B14F-4D97-AF65-F5344CB8AC3E}">
@@ -4217,10 +4468,155 @@
           </a:prstGeom>
         </p:spPr>
       </p:pic>
+      <p:pic>
+        <p:nvPicPr>
+          <p:cNvPr id="6" name="Picture 5">
+            <a:extLst>
+              <a:ext uri="{FF2B5EF4-FFF2-40B4-BE49-F238E27FC236}">
+                <a16:creationId xmlns:a16="http://schemas.microsoft.com/office/drawing/2014/main" id="{366C5169-7262-EA7F-3585-F047C965C2A6}"/>
+              </a:ext>
+            </a:extLst>
+          </p:cNvPr>
+          <p:cNvPicPr>
+            <a:picLocks noChangeAspect="1"/>
+          </p:cNvPicPr>
+          <p:nvPr/>
+        </p:nvPicPr>
+        <p:blipFill>
+          <a:blip r:embed="rId5"/>
+          <a:stretch>
+            <a:fillRect/>
+          </a:stretch>
+        </p:blipFill>
+        <p:spPr>
+          <a:xfrm>
+            <a:off x="6191997" y="1457764"/>
+            <a:ext cx="5430008" cy="4525006"/>
+          </a:xfrm>
+          <a:prstGeom prst="rect">
+            <a:avLst/>
+          </a:prstGeom>
+        </p:spPr>
+      </p:pic>
+      <p:pic>
+        <p:nvPicPr>
+          <p:cNvPr id="9" name="Picture 8">
+            <a:extLst>
+              <a:ext uri="{FF2B5EF4-FFF2-40B4-BE49-F238E27FC236}">
+                <a16:creationId xmlns:a16="http://schemas.microsoft.com/office/drawing/2014/main" id="{C9B9211E-10D1-52EC-AF1A-E1F8BA998CB3}"/>
+              </a:ext>
+            </a:extLst>
+          </p:cNvPr>
+          <p:cNvPicPr>
+            <a:picLocks noChangeAspect="1"/>
+          </p:cNvPicPr>
+          <p:nvPr/>
+        </p:nvPicPr>
+        <p:blipFill>
+          <a:blip r:embed="rId6"/>
+          <a:stretch>
+            <a:fillRect/>
+          </a:stretch>
+        </p:blipFill>
+        <p:spPr>
+          <a:xfrm>
+            <a:off x="742203" y="4111318"/>
+            <a:ext cx="5363323" cy="2200582"/>
+          </a:xfrm>
+          <a:prstGeom prst="rect">
+            <a:avLst/>
+          </a:prstGeom>
+        </p:spPr>
+      </p:pic>
     </p:spTree>
     <p:extLst>
       <p:ext uri="{BB962C8B-B14F-4D97-AF65-F5344CB8AC3E}">
         <p14:creationId xmlns:p14="http://schemas.microsoft.com/office/powerpoint/2010/main" val="2885429117"/>
+      </p:ext>
+    </p:extLst>
+  </p:cSld>
+  <p:clrMapOvr>
+    <a:masterClrMapping/>
+  </p:clrMapOvr>
+</p:sld>
+</file>
+
+<file path=ppt/slides/slide13.xml><?xml version="1.0" encoding="utf-8"?>
+<p:sld xmlns:a="http://schemas.openxmlformats.org/drawingml/2006/main" xmlns:r="http://schemas.openxmlformats.org/officeDocument/2006/relationships" xmlns:p="http://schemas.openxmlformats.org/presentationml/2006/main">
+  <p:cSld>
+    <p:spTree>
+      <p:nvGrpSpPr>
+        <p:cNvPr id="1" name=""/>
+        <p:cNvGrpSpPr/>
+        <p:nvPr/>
+      </p:nvGrpSpPr>
+      <p:grpSpPr>
+        <a:xfrm>
+          <a:off x="0" y="0"/>
+          <a:ext cx="0" cy="0"/>
+          <a:chOff x="0" y="0"/>
+          <a:chExt cx="0" cy="0"/>
+        </a:xfrm>
+      </p:grpSpPr>
+      <p:sp>
+        <p:nvSpPr>
+          <p:cNvPr id="2" name="Title 1">
+            <a:extLst>
+              <a:ext uri="{FF2B5EF4-FFF2-40B4-BE49-F238E27FC236}">
+                <a16:creationId xmlns:a16="http://schemas.microsoft.com/office/drawing/2014/main" id="{4290B844-515A-0520-79E4-4165F6E79CE3}"/>
+              </a:ext>
+            </a:extLst>
+          </p:cNvPr>
+          <p:cNvSpPr>
+            <a:spLocks noGrp="1"/>
+          </p:cNvSpPr>
+          <p:nvPr>
+            <p:ph type="title"/>
+          </p:nvPr>
+        </p:nvSpPr>
+        <p:spPr/>
+        <p:txBody>
+          <a:bodyPr>
+            <a:normAutofit/>
+          </a:bodyPr>
+          <a:lstStyle/>
+          <a:p>
+            <a:r>
+              <a:rPr lang="en-US" dirty="0"/>
+              <a:t>Join Measurement File with Field Catalog</a:t>
+            </a:r>
+          </a:p>
+        </p:txBody>
+      </p:sp>
+      <p:sp>
+        <p:nvSpPr>
+          <p:cNvPr id="3" name="Content Placeholder 2">
+            <a:extLst>
+              <a:ext uri="{FF2B5EF4-FFF2-40B4-BE49-F238E27FC236}">
+                <a16:creationId xmlns:a16="http://schemas.microsoft.com/office/drawing/2014/main" id="{E72B8013-5A96-19C3-594B-23DFD468CC01}"/>
+              </a:ext>
+            </a:extLst>
+          </p:cNvPr>
+          <p:cNvSpPr>
+            <a:spLocks noGrp="1"/>
+          </p:cNvSpPr>
+          <p:nvPr>
+            <p:ph idx="1"/>
+          </p:nvPr>
+        </p:nvSpPr>
+        <p:spPr/>
+        <p:txBody>
+          <a:bodyPr/>
+          <a:lstStyle/>
+          <a:p>
+            <a:endParaRPr lang="en-US"/>
+          </a:p>
+        </p:txBody>
+      </p:sp>
+    </p:spTree>
+    <p:extLst>
+      <p:ext uri="{BB962C8B-B14F-4D97-AF65-F5344CB8AC3E}">
+        <p14:creationId xmlns:p14="http://schemas.microsoft.com/office/powerpoint/2010/main" val="122710628"/>
       </p:ext>
     </p:extLst>
   </p:cSld>

--- a/Zontal/Zontal-ELN Signals Integration.pptx
+++ b/Zontal/Zontal-ELN Signals Integration.pptx
@@ -18,6 +18,7 @@
     <p:sldId id="269" r:id="rId12"/>
     <p:sldId id="271" r:id="rId13"/>
     <p:sldId id="272" r:id="rId14"/>
+    <p:sldId id="273" r:id="rId15"/>
   </p:sldIdLst>
   <p:sldSz cx="12192000" cy="6858000"/>
   <p:notesSz cx="6858000" cy="9144000"/>
@@ -122,6 +123,34 @@
     </p:ext>
   </p:extLst>
 </p:presentation>
+</file>
+
+<file path=ppt/authors.xml><?xml version="1.0" encoding="utf-8"?>
+<p188:authorLst xmlns:a="http://schemas.openxmlformats.org/drawingml/2006/main" xmlns:r="http://schemas.openxmlformats.org/officeDocument/2006/relationships" xmlns:p188="http://schemas.microsoft.com/office/powerpoint/2018/8/main">
+  <p188:author id="{9DF4F8CE-2AC2-3868-95C6-5413D476BC68}" name="Vanneste, Manu [JRDBE NON-J&amp;J]" initials="MV" userId="S::MVannest@its.jnj.com::18e0ccb2-2221-40c2-9d94-705e87712329" providerId="AD"/>
+</p188:authorLst>
+</file>
+
+<file path=ppt/comments/modernComment_110_7506A64.xml><?xml version="1.0" encoding="utf-8"?>
+<p188:cmLst xmlns:a="http://schemas.openxmlformats.org/drawingml/2006/main" xmlns:r="http://schemas.openxmlformats.org/officeDocument/2006/relationships" xmlns:p188="http://schemas.microsoft.com/office/powerpoint/2018/8/main">
+  <p188:cm id="{08513EB5-86A2-4448-8DD9-6A7B6A4C2037}" authorId="{9DF4F8CE-2AC2-3868-95C6-5413D476BC68}" created="2026-09-14T14:11:22.026">
+    <pc:sldMkLst xmlns:pc="http://schemas.microsoft.com/office/powerpoint/2013/main/command">
+      <pc:docMk/>
+      <pc:sldMk cId="122710628" sldId="272"/>
+    </pc:sldMkLst>
+    <p188:txBody>
+      <a:bodyPr/>
+      <a:lstStyle/>
+      <a:p>
+        <a:r>
+          <a:rPr lang="en-US"/>
+          <a:t>Regarding overwriting unit,
+as it is specified in the schema there is no need to overwrite, however case might be “no units”,”a unit”?</a:t>
+        </a:r>
+      </a:p>
+    </p188:txBody>
+  </p188:cm>
+</p188:cmLst>
 </file>
 
 <file path=ppt/slideLayouts/slideLayout1.xml><?xml version="1.0" encoding="utf-8"?>
@@ -4558,6 +4587,36 @@
           <a:chExt cx="0" cy="0"/>
         </a:xfrm>
       </p:grpSpPr>
+      <p:pic>
+        <p:nvPicPr>
+          <p:cNvPr id="20" name="Picture 19">
+            <a:extLst>
+              <a:ext uri="{FF2B5EF4-FFF2-40B4-BE49-F238E27FC236}">
+                <a16:creationId xmlns:a16="http://schemas.microsoft.com/office/drawing/2014/main" id="{E1DC9045-122F-5CF3-216F-53819F02D40A}"/>
+              </a:ext>
+            </a:extLst>
+          </p:cNvPr>
+          <p:cNvPicPr>
+            <a:picLocks noChangeAspect="1"/>
+          </p:cNvPicPr>
+          <p:nvPr/>
+        </p:nvPicPr>
+        <p:blipFill>
+          <a:blip r:embed="rId3"/>
+          <a:stretch>
+            <a:fillRect/>
+          </a:stretch>
+        </p:blipFill>
+        <p:spPr>
+          <a:xfrm>
+            <a:off x="1061525" y="1115571"/>
+            <a:ext cx="5372850" cy="2581635"/>
+          </a:xfrm>
+          <a:prstGeom prst="rect">
+            <a:avLst/>
+          </a:prstGeom>
+        </p:spPr>
+      </p:pic>
       <p:sp>
         <p:nvSpPr>
           <p:cNvPr id="2" name="Title 1">
@@ -4574,16 +4633,870 @@
             <p:ph type="title"/>
           </p:nvPr>
         </p:nvSpPr>
+        <p:spPr>
+          <a:xfrm>
+            <a:off x="6434375" y="1260664"/>
+            <a:ext cx="5941922" cy="631508"/>
+          </a:xfrm>
+        </p:spPr>
+        <p:txBody>
+          <a:bodyPr>
+            <a:normAutofit fontScale="90000"/>
+          </a:bodyPr>
+          <a:lstStyle/>
+          <a:p>
+            <a:r>
+              <a:rPr lang="en-US" dirty="0"/>
+              <a:t>Measurement File</a:t>
+            </a:r>
+          </a:p>
+        </p:txBody>
+      </p:sp>
+      <p:pic>
+        <p:nvPicPr>
+          <p:cNvPr id="5" name="Content Placeholder 4">
+            <a:extLst>
+              <a:ext uri="{FF2B5EF4-FFF2-40B4-BE49-F238E27FC236}">
+                <a16:creationId xmlns:a16="http://schemas.microsoft.com/office/drawing/2014/main" id="{628B14AC-2B87-7F0F-A148-8730D133DB59}"/>
+              </a:ext>
+            </a:extLst>
+          </p:cNvPr>
+          <p:cNvPicPr>
+            <a:picLocks noGrp="1" noChangeAspect="1"/>
+          </p:cNvPicPr>
+          <p:nvPr>
+            <p:ph idx="1"/>
+          </p:nvPr>
+        </p:nvPicPr>
+        <p:blipFill>
+          <a:blip r:embed="rId4"/>
+          <a:stretch>
+            <a:fillRect/>
+          </a:stretch>
+        </p:blipFill>
+        <p:spPr>
+          <a:xfrm>
+            <a:off x="1053048" y="3729990"/>
+            <a:ext cx="5352752" cy="2542252"/>
+          </a:xfrm>
+          <a:prstGeom prst="rect">
+            <a:avLst/>
+          </a:prstGeom>
+        </p:spPr>
+      </p:pic>
+      <p:pic>
+        <p:nvPicPr>
+          <p:cNvPr id="7" name="Picture 6">
+            <a:extLst>
+              <a:ext uri="{FF2B5EF4-FFF2-40B4-BE49-F238E27FC236}">
+                <a16:creationId xmlns:a16="http://schemas.microsoft.com/office/drawing/2014/main" id="{45204B93-ABDB-4D93-4B16-D92899F15E65}"/>
+              </a:ext>
+            </a:extLst>
+          </p:cNvPr>
+          <p:cNvPicPr>
+            <a:picLocks noChangeAspect="1"/>
+          </p:cNvPicPr>
+          <p:nvPr/>
+        </p:nvPicPr>
+        <p:blipFill>
+          <a:blip r:embed="rId5"/>
+          <a:stretch>
+            <a:fillRect/>
+          </a:stretch>
+        </p:blipFill>
+        <p:spPr>
+          <a:xfrm>
+            <a:off x="6462950" y="1842149"/>
+            <a:ext cx="3848637" cy="3296110"/>
+          </a:xfrm>
+          <a:prstGeom prst="rect">
+            <a:avLst/>
+          </a:prstGeom>
+        </p:spPr>
+      </p:pic>
+      <p:sp>
+        <p:nvSpPr>
+          <p:cNvPr id="9" name="Rectangle: Rounded Corners 8">
+            <a:extLst>
+              <a:ext uri="{FF2B5EF4-FFF2-40B4-BE49-F238E27FC236}">
+                <a16:creationId xmlns:a16="http://schemas.microsoft.com/office/drawing/2014/main" id="{B2CDBDC8-B219-654E-CADF-6AC074D401AF}"/>
+              </a:ext>
+            </a:extLst>
+          </p:cNvPr>
+          <p:cNvSpPr/>
+          <p:nvPr/>
+        </p:nvSpPr>
+        <p:spPr>
+          <a:xfrm>
+            <a:off x="8011743" y="4585812"/>
+            <a:ext cx="409499" cy="161615"/>
+          </a:xfrm>
+          <a:prstGeom prst="roundRect">
+            <a:avLst/>
+          </a:prstGeom>
+          <a:solidFill>
+            <a:srgbClr val="E97132">
+              <a:alpha val="25098"/>
+            </a:srgbClr>
+          </a:solidFill>
+          <a:ln>
+            <a:solidFill>
+              <a:schemeClr val="accent2"/>
+            </a:solidFill>
+          </a:ln>
+        </p:spPr>
+        <p:style>
+          <a:lnRef idx="2">
+            <a:schemeClr val="accent1">
+              <a:shade val="15000"/>
+            </a:schemeClr>
+          </a:lnRef>
+          <a:fillRef idx="1">
+            <a:schemeClr val="accent1"/>
+          </a:fillRef>
+          <a:effectRef idx="0">
+            <a:schemeClr val="accent1"/>
+          </a:effectRef>
+          <a:fontRef idx="minor">
+            <a:schemeClr val="lt1"/>
+          </a:fontRef>
+        </p:style>
+        <p:txBody>
+          <a:bodyPr rtlCol="0" anchor="ctr"/>
+          <a:lstStyle/>
+          <a:p>
+            <a:pPr algn="ctr"/>
+            <a:endParaRPr lang="en-US"/>
+          </a:p>
+        </p:txBody>
+      </p:sp>
+      <p:sp>
+        <p:nvSpPr>
+          <p:cNvPr id="12" name="Rectangle: Rounded Corners 11">
+            <a:extLst>
+              <a:ext uri="{FF2B5EF4-FFF2-40B4-BE49-F238E27FC236}">
+                <a16:creationId xmlns:a16="http://schemas.microsoft.com/office/drawing/2014/main" id="{006428A9-42ED-95E8-1041-86DE518D6BED}"/>
+              </a:ext>
+            </a:extLst>
+          </p:cNvPr>
+          <p:cNvSpPr/>
+          <p:nvPr/>
+        </p:nvSpPr>
+        <p:spPr>
+          <a:xfrm>
+            <a:off x="7954593" y="4755047"/>
+            <a:ext cx="409499" cy="161615"/>
+          </a:xfrm>
+          <a:prstGeom prst="roundRect">
+            <a:avLst/>
+          </a:prstGeom>
+          <a:solidFill>
+            <a:srgbClr val="E97132">
+              <a:alpha val="25098"/>
+            </a:srgbClr>
+          </a:solidFill>
+          <a:ln>
+            <a:solidFill>
+              <a:schemeClr val="accent2"/>
+            </a:solidFill>
+          </a:ln>
+        </p:spPr>
+        <p:style>
+          <a:lnRef idx="2">
+            <a:schemeClr val="accent1">
+              <a:shade val="15000"/>
+            </a:schemeClr>
+          </a:lnRef>
+          <a:fillRef idx="1">
+            <a:schemeClr val="accent1"/>
+          </a:fillRef>
+          <a:effectRef idx="0">
+            <a:schemeClr val="accent1"/>
+          </a:effectRef>
+          <a:fontRef idx="minor">
+            <a:schemeClr val="lt1"/>
+          </a:fontRef>
+        </p:style>
+        <p:txBody>
+          <a:bodyPr rtlCol="0" anchor="ctr"/>
+          <a:lstStyle/>
+          <a:p>
+            <a:pPr algn="ctr"/>
+            <a:endParaRPr lang="en-US"/>
+          </a:p>
+        </p:txBody>
+      </p:sp>
+      <p:sp>
+        <p:nvSpPr>
+          <p:cNvPr id="13" name="Rectangle: Rounded Corners 12">
+            <a:extLst>
+              <a:ext uri="{FF2B5EF4-FFF2-40B4-BE49-F238E27FC236}">
+                <a16:creationId xmlns:a16="http://schemas.microsoft.com/office/drawing/2014/main" id="{DFC2B5CF-06E7-7955-F829-1EAFBD9BA8EF}"/>
+              </a:ext>
+            </a:extLst>
+          </p:cNvPr>
+          <p:cNvSpPr/>
+          <p:nvPr/>
+        </p:nvSpPr>
+        <p:spPr>
+          <a:xfrm>
+            <a:off x="1831923" y="5189781"/>
+            <a:ext cx="409499" cy="161615"/>
+          </a:xfrm>
+          <a:prstGeom prst="roundRect">
+            <a:avLst/>
+          </a:prstGeom>
+          <a:solidFill>
+            <a:srgbClr val="E97132">
+              <a:alpha val="25098"/>
+            </a:srgbClr>
+          </a:solidFill>
+          <a:ln>
+            <a:solidFill>
+              <a:schemeClr val="accent2"/>
+            </a:solidFill>
+          </a:ln>
+        </p:spPr>
+        <p:style>
+          <a:lnRef idx="2">
+            <a:schemeClr val="accent1">
+              <a:shade val="15000"/>
+            </a:schemeClr>
+          </a:lnRef>
+          <a:fillRef idx="1">
+            <a:schemeClr val="accent1"/>
+          </a:fillRef>
+          <a:effectRef idx="0">
+            <a:schemeClr val="accent1"/>
+          </a:effectRef>
+          <a:fontRef idx="minor">
+            <a:schemeClr val="lt1"/>
+          </a:fontRef>
+        </p:style>
+        <p:txBody>
+          <a:bodyPr rtlCol="0" anchor="ctr"/>
+          <a:lstStyle/>
+          <a:p>
+            <a:pPr algn="ctr"/>
+            <a:endParaRPr lang="en-US"/>
+          </a:p>
+        </p:txBody>
+      </p:sp>
+      <p:sp>
+        <p:nvSpPr>
+          <p:cNvPr id="14" name="Rectangle: Rounded Corners 13">
+            <a:extLst>
+              <a:ext uri="{FF2B5EF4-FFF2-40B4-BE49-F238E27FC236}">
+                <a16:creationId xmlns:a16="http://schemas.microsoft.com/office/drawing/2014/main" id="{685F1880-A4CB-14E4-1589-8B07AF113F03}"/>
+              </a:ext>
+            </a:extLst>
+          </p:cNvPr>
+          <p:cNvSpPr/>
+          <p:nvPr/>
+        </p:nvSpPr>
+        <p:spPr>
+          <a:xfrm>
+            <a:off x="1809063" y="5375408"/>
+            <a:ext cx="409499" cy="161615"/>
+          </a:xfrm>
+          <a:prstGeom prst="roundRect">
+            <a:avLst/>
+          </a:prstGeom>
+          <a:solidFill>
+            <a:srgbClr val="E97132">
+              <a:alpha val="25098"/>
+            </a:srgbClr>
+          </a:solidFill>
+          <a:ln>
+            <a:solidFill>
+              <a:schemeClr val="accent2"/>
+            </a:solidFill>
+          </a:ln>
+        </p:spPr>
+        <p:style>
+          <a:lnRef idx="2">
+            <a:schemeClr val="accent1">
+              <a:shade val="15000"/>
+            </a:schemeClr>
+          </a:lnRef>
+          <a:fillRef idx="1">
+            <a:schemeClr val="accent1"/>
+          </a:fillRef>
+          <a:effectRef idx="0">
+            <a:schemeClr val="accent1"/>
+          </a:effectRef>
+          <a:fontRef idx="minor">
+            <a:schemeClr val="lt1"/>
+          </a:fontRef>
+        </p:style>
+        <p:txBody>
+          <a:bodyPr rtlCol="0" anchor="ctr"/>
+          <a:lstStyle/>
+          <a:p>
+            <a:pPr algn="ctr"/>
+            <a:endParaRPr lang="en-US"/>
+          </a:p>
+        </p:txBody>
+      </p:sp>
+      <p:cxnSp>
+        <p:nvCxnSpPr>
+          <p:cNvPr id="16" name="Straight Arrow Connector 15">
+            <a:extLst>
+              <a:ext uri="{FF2B5EF4-FFF2-40B4-BE49-F238E27FC236}">
+                <a16:creationId xmlns:a16="http://schemas.microsoft.com/office/drawing/2014/main" id="{A4CFC97D-606F-6A0E-065C-2A8580A46E88}"/>
+              </a:ext>
+            </a:extLst>
+          </p:cNvPr>
+          <p:cNvCxnSpPr>
+            <a:stCxn id="9" idx="1"/>
+            <a:endCxn id="13" idx="3"/>
+          </p:cNvCxnSpPr>
+          <p:nvPr/>
+        </p:nvCxnSpPr>
+        <p:spPr>
+          <a:xfrm flipH="1">
+            <a:off x="2241422" y="4666620"/>
+            <a:ext cx="5770321" cy="603969"/>
+          </a:xfrm>
+          <a:prstGeom prst="straightConnector1">
+            <a:avLst/>
+          </a:prstGeom>
+          <a:ln>
+            <a:solidFill>
+              <a:schemeClr val="accent2"/>
+            </a:solidFill>
+            <a:tailEnd type="triangle"/>
+          </a:ln>
+        </p:spPr>
+        <p:style>
+          <a:lnRef idx="2">
+            <a:schemeClr val="accent1"/>
+          </a:lnRef>
+          <a:fillRef idx="0">
+            <a:schemeClr val="accent1"/>
+          </a:fillRef>
+          <a:effectRef idx="1">
+            <a:schemeClr val="accent1"/>
+          </a:effectRef>
+          <a:fontRef idx="minor">
+            <a:schemeClr val="tx1"/>
+          </a:fontRef>
+        </p:style>
+      </p:cxnSp>
+      <p:cxnSp>
+        <p:nvCxnSpPr>
+          <p:cNvPr id="18" name="Straight Arrow Connector 17">
+            <a:extLst>
+              <a:ext uri="{FF2B5EF4-FFF2-40B4-BE49-F238E27FC236}">
+                <a16:creationId xmlns:a16="http://schemas.microsoft.com/office/drawing/2014/main" id="{9DDAA885-B3F2-3CC1-4472-A54A51393C8F}"/>
+              </a:ext>
+            </a:extLst>
+          </p:cNvPr>
+          <p:cNvCxnSpPr>
+            <a:stCxn id="12" idx="1"/>
+            <a:endCxn id="14" idx="3"/>
+          </p:cNvCxnSpPr>
+          <p:nvPr/>
+        </p:nvCxnSpPr>
+        <p:spPr>
+          <a:xfrm flipH="1">
+            <a:off x="2218562" y="4835855"/>
+            <a:ext cx="5736031" cy="620361"/>
+          </a:xfrm>
+          <a:prstGeom prst="straightConnector1">
+            <a:avLst/>
+          </a:prstGeom>
+          <a:ln w="19050" cap="flat" cmpd="sng" algn="ctr">
+            <a:solidFill>
+              <a:schemeClr val="accent2"/>
+            </a:solidFill>
+            <a:prstDash val="dash"/>
+            <a:round/>
+            <a:headEnd type="none" w="med" len="med"/>
+            <a:tailEnd type="none" w="med" len="med"/>
+          </a:ln>
+        </p:spPr>
+        <p:style>
+          <a:lnRef idx="0">
+            <a:scrgbClr r="0" g="0" b="0"/>
+          </a:lnRef>
+          <a:fillRef idx="0">
+            <a:scrgbClr r="0" g="0" b="0"/>
+          </a:fillRef>
+          <a:effectRef idx="0">
+            <a:scrgbClr r="0" g="0" b="0"/>
+          </a:effectRef>
+          <a:fontRef idx="minor">
+            <a:schemeClr val="tx1"/>
+          </a:fontRef>
+        </p:style>
+      </p:cxnSp>
+      <p:sp>
+        <p:nvSpPr>
+          <p:cNvPr id="24" name="Rectangle: Rounded Corners 23">
+            <a:extLst>
+              <a:ext uri="{FF2B5EF4-FFF2-40B4-BE49-F238E27FC236}">
+                <a16:creationId xmlns:a16="http://schemas.microsoft.com/office/drawing/2014/main" id="{6DD39E50-45E3-DB0E-FCC6-B426A94FDC0F}"/>
+              </a:ext>
+            </a:extLst>
+          </p:cNvPr>
+          <p:cNvSpPr/>
+          <p:nvPr/>
+        </p:nvSpPr>
+        <p:spPr>
+          <a:xfrm>
+            <a:off x="1839543" y="2787872"/>
+            <a:ext cx="409499" cy="161615"/>
+          </a:xfrm>
+          <a:prstGeom prst="roundRect">
+            <a:avLst/>
+          </a:prstGeom>
+          <a:solidFill>
+            <a:srgbClr val="E97132">
+              <a:alpha val="25098"/>
+            </a:srgbClr>
+          </a:solidFill>
+          <a:ln>
+            <a:solidFill>
+              <a:schemeClr val="accent2"/>
+            </a:solidFill>
+          </a:ln>
+        </p:spPr>
+        <p:style>
+          <a:lnRef idx="2">
+            <a:schemeClr val="accent1">
+              <a:shade val="15000"/>
+            </a:schemeClr>
+          </a:lnRef>
+          <a:fillRef idx="1">
+            <a:schemeClr val="accent1"/>
+          </a:fillRef>
+          <a:effectRef idx="0">
+            <a:schemeClr val="accent1"/>
+          </a:effectRef>
+          <a:fontRef idx="minor">
+            <a:schemeClr val="lt1"/>
+          </a:fontRef>
+        </p:style>
+        <p:txBody>
+          <a:bodyPr rtlCol="0" anchor="ctr"/>
+          <a:lstStyle/>
+          <a:p>
+            <a:pPr algn="ctr"/>
+            <a:endParaRPr lang="en-US"/>
+          </a:p>
+        </p:txBody>
+      </p:sp>
+      <p:sp>
+        <p:nvSpPr>
+          <p:cNvPr id="27" name="Rectangle: Rounded Corners 26">
+            <a:extLst>
+              <a:ext uri="{FF2B5EF4-FFF2-40B4-BE49-F238E27FC236}">
+                <a16:creationId xmlns:a16="http://schemas.microsoft.com/office/drawing/2014/main" id="{77FBDFF8-5921-55E4-16A3-DA54DA1F54CA}"/>
+              </a:ext>
+            </a:extLst>
+          </p:cNvPr>
+          <p:cNvSpPr/>
+          <p:nvPr/>
+        </p:nvSpPr>
+        <p:spPr>
+          <a:xfrm>
+            <a:off x="1839543" y="2585853"/>
+            <a:ext cx="409499" cy="161615"/>
+          </a:xfrm>
+          <a:prstGeom prst="roundRect">
+            <a:avLst/>
+          </a:prstGeom>
+          <a:solidFill>
+            <a:srgbClr val="E97132">
+              <a:alpha val="25098"/>
+            </a:srgbClr>
+          </a:solidFill>
+          <a:ln>
+            <a:solidFill>
+              <a:schemeClr val="accent2"/>
+            </a:solidFill>
+          </a:ln>
+        </p:spPr>
+        <p:style>
+          <a:lnRef idx="2">
+            <a:schemeClr val="accent1">
+              <a:shade val="15000"/>
+            </a:schemeClr>
+          </a:lnRef>
+          <a:fillRef idx="1">
+            <a:schemeClr val="accent1"/>
+          </a:fillRef>
+          <a:effectRef idx="0">
+            <a:schemeClr val="accent1"/>
+          </a:effectRef>
+          <a:fontRef idx="minor">
+            <a:schemeClr val="lt1"/>
+          </a:fontRef>
+        </p:style>
+        <p:txBody>
+          <a:bodyPr rtlCol="0" anchor="ctr"/>
+          <a:lstStyle/>
+          <a:p>
+            <a:pPr algn="ctr"/>
+            <a:endParaRPr lang="en-US"/>
+          </a:p>
+        </p:txBody>
+      </p:sp>
+      <p:sp>
+        <p:nvSpPr>
+          <p:cNvPr id="29" name="Rectangle: Rounded Corners 28">
+            <a:extLst>
+              <a:ext uri="{FF2B5EF4-FFF2-40B4-BE49-F238E27FC236}">
+                <a16:creationId xmlns:a16="http://schemas.microsoft.com/office/drawing/2014/main" id="{E5CE5EF8-2257-F067-77BD-2C3F25369E50}"/>
+              </a:ext>
+            </a:extLst>
+          </p:cNvPr>
+          <p:cNvSpPr/>
+          <p:nvPr/>
+        </p:nvSpPr>
+        <p:spPr>
+          <a:xfrm>
+            <a:off x="8031934" y="3127025"/>
+            <a:ext cx="409499" cy="161615"/>
+          </a:xfrm>
+          <a:prstGeom prst="roundRect">
+            <a:avLst/>
+          </a:prstGeom>
+          <a:solidFill>
+            <a:srgbClr val="E97132">
+              <a:alpha val="25098"/>
+            </a:srgbClr>
+          </a:solidFill>
+          <a:ln>
+            <a:solidFill>
+              <a:schemeClr val="accent2"/>
+            </a:solidFill>
+          </a:ln>
+        </p:spPr>
+        <p:style>
+          <a:lnRef idx="2">
+            <a:schemeClr val="accent1">
+              <a:shade val="15000"/>
+            </a:schemeClr>
+          </a:lnRef>
+          <a:fillRef idx="1">
+            <a:schemeClr val="accent1"/>
+          </a:fillRef>
+          <a:effectRef idx="0">
+            <a:schemeClr val="accent1"/>
+          </a:effectRef>
+          <a:fontRef idx="minor">
+            <a:schemeClr val="lt1"/>
+          </a:fontRef>
+        </p:style>
+        <p:txBody>
+          <a:bodyPr rtlCol="0" anchor="ctr"/>
+          <a:lstStyle/>
+          <a:p>
+            <a:pPr algn="ctr"/>
+            <a:endParaRPr lang="en-US"/>
+          </a:p>
+        </p:txBody>
+      </p:sp>
+      <p:sp>
+        <p:nvSpPr>
+          <p:cNvPr id="31" name="Rectangle: Rounded Corners 30">
+            <a:extLst>
+              <a:ext uri="{FF2B5EF4-FFF2-40B4-BE49-F238E27FC236}">
+                <a16:creationId xmlns:a16="http://schemas.microsoft.com/office/drawing/2014/main" id="{B13125E3-707A-1817-42C7-99A5AD0C8E8E}"/>
+              </a:ext>
+            </a:extLst>
+          </p:cNvPr>
+          <p:cNvSpPr/>
+          <p:nvPr/>
+        </p:nvSpPr>
+        <p:spPr>
+          <a:xfrm>
+            <a:off x="7982142" y="3319135"/>
+            <a:ext cx="548448" cy="161615"/>
+          </a:xfrm>
+          <a:prstGeom prst="roundRect">
+            <a:avLst/>
+          </a:prstGeom>
+          <a:solidFill>
+            <a:srgbClr val="E97132">
+              <a:alpha val="25098"/>
+            </a:srgbClr>
+          </a:solidFill>
+          <a:ln>
+            <a:solidFill>
+              <a:schemeClr val="accent2"/>
+            </a:solidFill>
+          </a:ln>
+        </p:spPr>
+        <p:style>
+          <a:lnRef idx="2">
+            <a:schemeClr val="accent1">
+              <a:shade val="15000"/>
+            </a:schemeClr>
+          </a:lnRef>
+          <a:fillRef idx="1">
+            <a:schemeClr val="accent1"/>
+          </a:fillRef>
+          <a:effectRef idx="0">
+            <a:schemeClr val="accent1"/>
+          </a:effectRef>
+          <a:fontRef idx="minor">
+            <a:schemeClr val="lt1"/>
+          </a:fontRef>
+        </p:style>
+        <p:txBody>
+          <a:bodyPr rtlCol="0" anchor="ctr"/>
+          <a:lstStyle/>
+          <a:p>
+            <a:pPr algn="ctr"/>
+            <a:endParaRPr lang="en-US"/>
+          </a:p>
+        </p:txBody>
+      </p:sp>
+      <p:cxnSp>
+        <p:nvCxnSpPr>
+          <p:cNvPr id="33" name="Straight Arrow Connector 32">
+            <a:extLst>
+              <a:ext uri="{FF2B5EF4-FFF2-40B4-BE49-F238E27FC236}">
+                <a16:creationId xmlns:a16="http://schemas.microsoft.com/office/drawing/2014/main" id="{E5092CCC-D2DD-5AC4-C158-F9CB20DFFD02}"/>
+              </a:ext>
+            </a:extLst>
+          </p:cNvPr>
+          <p:cNvCxnSpPr>
+            <a:stCxn id="29" idx="1"/>
+            <a:endCxn id="27" idx="3"/>
+          </p:cNvCxnSpPr>
+          <p:nvPr/>
+        </p:nvCxnSpPr>
+        <p:spPr>
+          <a:xfrm flipH="1" flipV="1">
+            <a:off x="2249042" y="2666661"/>
+            <a:ext cx="5782892" cy="541172"/>
+          </a:xfrm>
+          <a:prstGeom prst="straightConnector1">
+            <a:avLst/>
+          </a:prstGeom>
+          <a:ln>
+            <a:solidFill>
+              <a:schemeClr val="accent2"/>
+            </a:solidFill>
+            <a:tailEnd type="triangle"/>
+          </a:ln>
+        </p:spPr>
+        <p:style>
+          <a:lnRef idx="2">
+            <a:schemeClr val="accent1"/>
+          </a:lnRef>
+          <a:fillRef idx="0">
+            <a:schemeClr val="accent1"/>
+          </a:fillRef>
+          <a:effectRef idx="1">
+            <a:schemeClr val="accent1"/>
+          </a:effectRef>
+          <a:fontRef idx="minor">
+            <a:schemeClr val="tx1"/>
+          </a:fontRef>
+        </p:style>
+      </p:cxnSp>
+      <p:cxnSp>
+        <p:nvCxnSpPr>
+          <p:cNvPr id="35" name="Straight Arrow Connector 34">
+            <a:extLst>
+              <a:ext uri="{FF2B5EF4-FFF2-40B4-BE49-F238E27FC236}">
+                <a16:creationId xmlns:a16="http://schemas.microsoft.com/office/drawing/2014/main" id="{0477ACEA-B343-1C37-38EF-32161DCB5ACF}"/>
+              </a:ext>
+            </a:extLst>
+          </p:cNvPr>
+          <p:cNvCxnSpPr>
+            <a:stCxn id="31" idx="1"/>
+            <a:endCxn id="24" idx="3"/>
+          </p:cNvCxnSpPr>
+          <p:nvPr/>
+        </p:nvCxnSpPr>
+        <p:spPr>
+          <a:xfrm flipH="1" flipV="1">
+            <a:off x="2249042" y="2868680"/>
+            <a:ext cx="5733100" cy="531263"/>
+          </a:xfrm>
+          <a:prstGeom prst="straightConnector1">
+            <a:avLst/>
+          </a:prstGeom>
+          <a:ln w="19050" cap="flat" cmpd="sng" algn="ctr">
+            <a:solidFill>
+              <a:schemeClr val="accent2"/>
+            </a:solidFill>
+            <a:prstDash val="dash"/>
+            <a:round/>
+            <a:headEnd type="none" w="med" len="med"/>
+            <a:tailEnd type="none" w="med" len="med"/>
+          </a:ln>
+        </p:spPr>
+        <p:style>
+          <a:lnRef idx="0">
+            <a:scrgbClr r="0" g="0" b="0"/>
+          </a:lnRef>
+          <a:fillRef idx="0">
+            <a:scrgbClr r="0" g="0" b="0"/>
+          </a:fillRef>
+          <a:effectRef idx="0">
+            <a:scrgbClr r="0" g="0" b="0"/>
+          </a:effectRef>
+          <a:fontRef idx="minor">
+            <a:schemeClr val="tx1"/>
+          </a:fontRef>
+        </p:style>
+      </p:cxnSp>
+      <p:sp>
+        <p:nvSpPr>
+          <p:cNvPr id="37" name="TextBox 36">
+            <a:extLst>
+              <a:ext uri="{FF2B5EF4-FFF2-40B4-BE49-F238E27FC236}">
+                <a16:creationId xmlns:a16="http://schemas.microsoft.com/office/drawing/2014/main" id="{07B3F7C5-0A26-F6BA-13FA-E7453D2ED03E}"/>
+              </a:ext>
+            </a:extLst>
+          </p:cNvPr>
+          <p:cNvSpPr txBox="1"/>
+          <p:nvPr/>
+        </p:nvSpPr>
+        <p:spPr>
+          <a:xfrm>
+            <a:off x="985325" y="439369"/>
+            <a:ext cx="6096000" cy="769441"/>
+          </a:xfrm>
+          <a:prstGeom prst="rect">
+            <a:avLst/>
+          </a:prstGeom>
+          <a:noFill/>
+        </p:spPr>
+        <p:txBody>
+          <a:bodyPr wrap="square">
+            <a:spAutoFit/>
+          </a:bodyPr>
+          <a:lstStyle/>
+          <a:p>
+            <a:r>
+              <a:rPr lang="en-US" sz="4400" dirty="0"/>
+              <a:t>Field Catalog</a:t>
+            </a:r>
+            <a:endParaRPr lang="en-US" dirty="0"/>
+          </a:p>
+        </p:txBody>
+      </p:sp>
+      <p:sp>
+        <p:nvSpPr>
+          <p:cNvPr id="39" name="Title 1">
+            <a:extLst>
+              <a:ext uri="{FF2B5EF4-FFF2-40B4-BE49-F238E27FC236}">
+                <a16:creationId xmlns:a16="http://schemas.microsoft.com/office/drawing/2014/main" id="{4237C6F3-270D-855E-2716-92A2243235FF}"/>
+              </a:ext>
+            </a:extLst>
+          </p:cNvPr>
+          <p:cNvSpPr txBox="1">
+            <a:spLocks/>
+          </p:cNvSpPr>
+          <p:nvPr/>
+        </p:nvSpPr>
+        <p:spPr>
+          <a:xfrm>
+            <a:off x="5285405" y="212393"/>
+            <a:ext cx="5941922" cy="631508"/>
+          </a:xfrm>
+          <a:prstGeom prst="rect">
+            <a:avLst/>
+          </a:prstGeom>
+        </p:spPr>
+        <p:txBody>
+          <a:bodyPr vert="horz" lIns="91440" tIns="45720" rIns="91440" bIns="45720" rtlCol="0" anchor="ctr">
+            <a:normAutofit fontScale="90000" lnSpcReduction="10000"/>
+          </a:bodyPr>
+          <a:lstStyle>
+            <a:lvl1pPr algn="l" defTabSz="914400" rtl="0" eaLnBrk="1" latinLnBrk="0" hangingPunct="1">
+              <a:lnSpc>
+                <a:spcPct val="90000"/>
+              </a:lnSpc>
+              <a:spcBef>
+                <a:spcPct val="0"/>
+              </a:spcBef>
+              <a:buNone/>
+              <a:defRPr sz="4400" kern="1200">
+                <a:solidFill>
+                  <a:schemeClr val="tx1"/>
+                </a:solidFill>
+                <a:latin typeface="+mj-lt"/>
+                <a:ea typeface="+mj-ea"/>
+                <a:cs typeface="+mj-cs"/>
+              </a:defRPr>
+            </a:lvl1pPr>
+          </a:lstStyle>
+          <a:p>
+            <a:r>
+              <a:rPr lang="en-US" dirty="0"/>
+              <a:t>“Join”</a:t>
+            </a:r>
+          </a:p>
+        </p:txBody>
+      </p:sp>
+    </p:spTree>
+    <p:extLst>
+      <p:ext uri="{BB962C8B-B14F-4D97-AF65-F5344CB8AC3E}">
+        <p14:creationId xmlns:p14="http://schemas.microsoft.com/office/powerpoint/2010/main" val="122710628"/>
+      </p:ext>
+    </p:extLst>
+  </p:cSld>
+  <p:clrMapOvr>
+    <a:masterClrMapping/>
+  </p:clrMapOvr>
+  <p:extLst>
+    <p:ext uri="{6950BFC3-D8DA-4A85-94F7-54DA5524770B}">
+      <p188:commentRel xmlns:p188="http://schemas.microsoft.com/office/powerpoint/2018/8/main" r:id="rId2"/>
+    </p:ext>
+  </p:extLst>
+</p:sld>
+</file>
+
+<file path=ppt/slides/slide14.xml><?xml version="1.0" encoding="utf-8"?>
+<p:sld xmlns:a="http://schemas.openxmlformats.org/drawingml/2006/main" xmlns:r="http://schemas.openxmlformats.org/officeDocument/2006/relationships" xmlns:p="http://schemas.openxmlformats.org/presentationml/2006/main">
+  <p:cSld>
+    <p:spTree>
+      <p:nvGrpSpPr>
+        <p:cNvPr id="1" name=""/>
+        <p:cNvGrpSpPr/>
+        <p:nvPr/>
+      </p:nvGrpSpPr>
+      <p:grpSpPr>
+        <a:xfrm>
+          <a:off x="0" y="0"/>
+          <a:ext cx="0" cy="0"/>
+          <a:chOff x="0" y="0"/>
+          <a:chExt cx="0" cy="0"/>
+        </a:xfrm>
+      </p:grpSpPr>
+      <p:sp>
+        <p:nvSpPr>
+          <p:cNvPr id="2" name="Title 1">
+            <a:extLst>
+              <a:ext uri="{FF2B5EF4-FFF2-40B4-BE49-F238E27FC236}">
+                <a16:creationId xmlns:a16="http://schemas.microsoft.com/office/drawing/2014/main" id="{7F996DC5-DCE3-C2CA-B97C-27A7E29C4F92}"/>
+              </a:ext>
+            </a:extLst>
+          </p:cNvPr>
+          <p:cNvSpPr>
+            <a:spLocks noGrp="1"/>
+          </p:cNvSpPr>
+          <p:nvPr>
+            <p:ph type="title"/>
+          </p:nvPr>
+        </p:nvSpPr>
         <p:spPr/>
         <p:txBody>
-          <a:bodyPr>
-            <a:normAutofit/>
-          </a:bodyPr>
+          <a:bodyPr/>
           <a:lstStyle/>
           <a:p>
             <a:r>
               <a:rPr lang="en-US" dirty="0"/>
-              <a:t>Join Measurement File with Field Catalog</a:t>
+              <a:t>Export</a:t>
             </a:r>
           </a:p>
         </p:txBody>
@@ -4593,7 +5506,7 @@
           <p:cNvPr id="3" name="Content Placeholder 2">
             <a:extLst>
               <a:ext uri="{FF2B5EF4-FFF2-40B4-BE49-F238E27FC236}">
-                <a16:creationId xmlns:a16="http://schemas.microsoft.com/office/drawing/2014/main" id="{E72B8013-5A96-19C3-594B-23DFD468CC01}"/>
+                <a16:creationId xmlns:a16="http://schemas.microsoft.com/office/drawing/2014/main" id="{DCD1F26D-D806-CB13-5599-A99F4BAF9FAD}"/>
               </a:ext>
             </a:extLst>
           </p:cNvPr>
@@ -4609,14 +5522,14 @@
           <a:bodyPr/>
           <a:lstStyle/>
           <a:p>
-            <a:endParaRPr lang="en-US"/>
+            <a:endParaRPr lang="en-US" dirty="0"/>
           </a:p>
         </p:txBody>
       </p:sp>
     </p:spTree>
     <p:extLst>
       <p:ext uri="{BB962C8B-B14F-4D97-AF65-F5344CB8AC3E}">
-        <p14:creationId xmlns:p14="http://schemas.microsoft.com/office/powerpoint/2010/main" val="122710628"/>
+        <p14:creationId xmlns:p14="http://schemas.microsoft.com/office/powerpoint/2010/main" val="1638589801"/>
       </p:ext>
     </p:extLst>
   </p:cSld>
